--- a/modulo1_16S_DADA2_QIIME2/slides/modulo1_highlevel.pptx
+++ b/modulo1_16S_DADA2_QIIME2/slides/modulo1_highlevel.pptx
@@ -11,6 +11,7 @@
     <p:sldId id="259" r:id="rId10"/>
     <p:sldId id="260" r:id="rId11"/>
     <p:sldId id="261" r:id="rId12"/>
+    <p:sldId id="262" r:id="rId13"/>
   </p:sldIdLst>
   <p:sldSz cx="12188952" cy="6858000" type="screen4x3"/>
   <p:notesSz cx="6858000" cy="9144000"/>
@@ -3666,7 +3667,7 @@
         <p:spPr>
           <a:xfrm>
             <a:off x="384048" y="91440"/>
-            <a:ext cx="9144000" cy="658368"/>
+            <a:ext cx="10972800" cy="658368"/>
           </a:xfrm>
           <a:prstGeom prst="rect">
             <a:avLst/>
@@ -3686,7 +3687,7 @@
                   <a:srgbClr val="1E3A4A"/>
                 </a:solidFill>
               </a:rPr>
-              <a:t>The Big Picture</a:t>
+              <a:t>What We Will Accomplish Today</a:t>
             </a:r>
           </a:p>
         </p:txBody>
@@ -3699,8 +3700,8 @@
         </p:nvSpPr>
         <p:spPr>
           <a:xfrm>
-            <a:off x="384048" y="749808"/>
-            <a:ext cx="9144000" cy="384048"/>
+            <a:off x="384048" y="777240"/>
+            <a:ext cx="10972800" cy="384048"/>
           </a:xfrm>
           <a:prstGeom prst="rect">
             <a:avLst/>
@@ -3715,12 +3716,12 @@
           <a:p>
             <a:pPr algn="l"/>
             <a:r>
-              <a:rPr sz="1500" b="0" i="1">
+              <a:rPr sz="1400" b="0" i="1">
                 <a:solidFill>
                   <a:srgbClr val="6E8494"/>
                 </a:solidFill>
               </a:rPr>
-              <a:t>From a biological sample to a microbial profile</a:t>
+              <a:t>By the end of this workshop, you will be able to run and interpret a complete 16S analysis</a:t>
             </a:r>
           </a:p>
         </p:txBody>
@@ -3733,8 +3734,8 @@
         </p:nvSpPr>
         <p:spPr>
           <a:xfrm>
-            <a:off x="384048" y="1463040"/>
-            <a:ext cx="2011680" cy="2377440"/>
+            <a:off x="384048" y="1444752"/>
+            <a:ext cx="3703320" cy="2240280"/>
           </a:xfrm>
           <a:prstGeom prst="rect">
             <a:avLst/>
@@ -3778,8 +3779,8 @@
         </p:nvSpPr>
         <p:spPr>
           <a:xfrm>
-            <a:off x="384048" y="1463040"/>
-            <a:ext cx="2011680" cy="594360"/>
+            <a:off x="384048" y="1444752"/>
+            <a:ext cx="3703320" cy="475488"/>
           </a:xfrm>
           <a:prstGeom prst="rect">
             <a:avLst/>
@@ -3815,36 +3816,44 @@
       </p:sp>
       <p:sp>
         <p:nvSpPr>
-          <p:cNvPr id="9" name="TextBox 8"/>
-          <p:cNvSpPr txBox="1"/>
-          <p:nvPr/>
-        </p:nvSpPr>
-        <p:spPr>
-          <a:xfrm>
-            <a:off x="493776" y="1508760"/>
-            <a:ext cx="1828800" cy="548640"/>
-          </a:xfrm>
-          <a:prstGeom prst="rect">
-            <a:avLst/>
-          </a:prstGeom>
-          <a:noFill/>
-        </p:spPr>
-        <p:txBody>
-          <a:bodyPr wrap="square">
-            <a:spAutoFit/>
-          </a:bodyPr>
-          <a:lstStyle/>
-          <a:p>
-            <a:pPr algn="ctr"/>
-            <a:r>
-              <a:rPr sz="1400" b="1" i="0">
-                <a:solidFill>
-                  <a:srgbClr val="3D908A"/>
-                </a:solidFill>
-              </a:rPr>
-              <a:t>Sample
-collection</a:t>
-            </a:r>
+          <p:cNvPr id="9" name="Rectangle 8"/>
+          <p:cNvSpPr/>
+          <p:nvPr/>
+        </p:nvSpPr>
+        <p:spPr>
+          <a:xfrm>
+            <a:off x="384048" y="1444752"/>
+            <a:ext cx="256032" cy="2240280"/>
+          </a:xfrm>
+          <a:prstGeom prst="rect">
+            <a:avLst/>
+          </a:prstGeom>
+          <a:solidFill>
+            <a:srgbClr val="3D908A"/>
+          </a:solidFill>
+          <a:ln>
+            <a:noFill/>
+          </a:ln>
+        </p:spPr>
+        <p:style>
+          <a:lnRef idx="1">
+            <a:schemeClr val="accent1"/>
+          </a:lnRef>
+          <a:fillRef idx="3">
+            <a:schemeClr val="accent1"/>
+          </a:fillRef>
+          <a:effectRef idx="2">
+            <a:schemeClr val="accent1"/>
+          </a:effectRef>
+          <a:fontRef idx="minor">
+            <a:schemeClr val="lt1"/>
+          </a:fontRef>
+        </p:style>
+        <p:txBody>
+          <a:bodyPr rtlCol="0" anchor="ctr"/>
+          <a:lstStyle/>
+          <a:p>
+            <a:pPr algn="ctr"/>
           </a:p>
         </p:txBody>
       </p:sp>
@@ -3856,977 +3865,8 @@
         </p:nvSpPr>
         <p:spPr>
           <a:xfrm>
-            <a:off x="493776" y="2148840"/>
-            <a:ext cx="1828800" cy="1600200"/>
-          </a:xfrm>
-          <a:prstGeom prst="rect">
-            <a:avLst/>
-          </a:prstGeom>
-          <a:noFill/>
-        </p:spPr>
-        <p:txBody>
-          <a:bodyPr wrap="square">
-            <a:spAutoFit/>
-          </a:bodyPr>
-          <a:lstStyle/>
-          <a:p>
-            <a:pPr algn="ctr"/>
-            <a:r>
-              <a:rPr sz="1200" b="0" i="0">
-                <a:solidFill>
-                  <a:srgbClr val="1E3A4A"/>
-                </a:solidFill>
-              </a:rPr>
-              <a:t>Extract DNA from
-the sample</a:t>
-            </a:r>
-          </a:p>
-        </p:txBody>
-      </p:sp>
-      <p:cxnSp>
-        <p:nvCxnSpPr>
-          <p:cNvPr id="11" name="Connector 10"/>
-          <p:cNvCxnSpPr/>
-          <p:nvPr/>
-        </p:nvCxnSpPr>
-        <p:spPr>
-          <a:xfrm>
-            <a:off x="2395728" y="2651760"/>
-            <a:ext cx="201168" cy="0"/>
-          </a:xfrm>
-          <a:prstGeom prst="line">
-            <a:avLst/>
-          </a:prstGeom>
-          <a:ln w="25400">
-            <a:solidFill>
-              <a:srgbClr val="3D908A"/>
-            </a:solidFill>
-          </a:ln>
-        </p:spPr>
-        <p:style>
-          <a:lnRef idx="2">
-            <a:schemeClr val="accent1"/>
-          </a:lnRef>
-          <a:fillRef idx="0">
-            <a:schemeClr val="accent1"/>
-          </a:fillRef>
-          <a:effectRef idx="1">
-            <a:schemeClr val="accent1"/>
-          </a:effectRef>
-          <a:fontRef idx="minor">
-            <a:schemeClr val="tx1"/>
-          </a:fontRef>
-        </p:style>
-      </p:cxnSp>
-      <p:sp>
-        <p:nvSpPr>
-          <p:cNvPr id="12" name="Rectangle 11"/>
-          <p:cNvSpPr/>
-          <p:nvPr/>
-        </p:nvSpPr>
-        <p:spPr>
-          <a:xfrm>
-            <a:off x="2596896" y="1463040"/>
-            <a:ext cx="2011680" cy="2377440"/>
-          </a:xfrm>
-          <a:prstGeom prst="rect">
-            <a:avLst/>
-          </a:prstGeom>
-          <a:solidFill>
-            <a:srgbClr val="FFFFFF"/>
-          </a:solidFill>
-          <a:ln w="25400">
-            <a:solidFill>
-              <a:srgbClr val="BBD6ED"/>
-            </a:solidFill>
-          </a:ln>
-        </p:spPr>
-        <p:style>
-          <a:lnRef idx="1">
-            <a:schemeClr val="accent1"/>
-          </a:lnRef>
-          <a:fillRef idx="3">
-            <a:schemeClr val="accent1"/>
-          </a:fillRef>
-          <a:effectRef idx="2">
-            <a:schemeClr val="accent1"/>
-          </a:effectRef>
-          <a:fontRef idx="minor">
-            <a:schemeClr val="lt1"/>
-          </a:fontRef>
-        </p:style>
-        <p:txBody>
-          <a:bodyPr rtlCol="0" anchor="ctr"/>
-          <a:lstStyle/>
-          <a:p>
-            <a:pPr algn="ctr"/>
-          </a:p>
-        </p:txBody>
-      </p:sp>
-      <p:sp>
-        <p:nvSpPr>
-          <p:cNvPr id="13" name="Rectangle 12"/>
-          <p:cNvSpPr/>
-          <p:nvPr/>
-        </p:nvSpPr>
-        <p:spPr>
-          <a:xfrm>
-            <a:off x="2596896" y="1463040"/>
-            <a:ext cx="2011680" cy="594360"/>
-          </a:xfrm>
-          <a:prstGeom prst="rect">
-            <a:avLst/>
-          </a:prstGeom>
-          <a:solidFill>
-            <a:srgbClr val="BBD6ED"/>
-          </a:solidFill>
-          <a:ln>
-            <a:noFill/>
-          </a:ln>
-        </p:spPr>
-        <p:style>
-          <a:lnRef idx="1">
-            <a:schemeClr val="accent1"/>
-          </a:lnRef>
-          <a:fillRef idx="3">
-            <a:schemeClr val="accent1"/>
-          </a:fillRef>
-          <a:effectRef idx="2">
-            <a:schemeClr val="accent1"/>
-          </a:effectRef>
-          <a:fontRef idx="minor">
-            <a:schemeClr val="lt1"/>
-          </a:fontRef>
-        </p:style>
-        <p:txBody>
-          <a:bodyPr rtlCol="0" anchor="ctr"/>
-          <a:lstStyle/>
-          <a:p>
-            <a:pPr algn="ctr"/>
-          </a:p>
-        </p:txBody>
-      </p:sp>
-      <p:sp>
-        <p:nvSpPr>
-          <p:cNvPr id="14" name="TextBox 13"/>
-          <p:cNvSpPr txBox="1"/>
-          <p:nvPr/>
-        </p:nvSpPr>
-        <p:spPr>
-          <a:xfrm>
-            <a:off x="2706624" y="1508760"/>
-            <a:ext cx="1828800" cy="548640"/>
-          </a:xfrm>
-          <a:prstGeom prst="rect">
-            <a:avLst/>
-          </a:prstGeom>
-          <a:noFill/>
-        </p:spPr>
-        <p:txBody>
-          <a:bodyPr wrap="square">
-            <a:spAutoFit/>
-          </a:bodyPr>
-          <a:lstStyle/>
-          <a:p>
-            <a:pPr algn="ctr"/>
-            <a:r>
-              <a:rPr sz="1400" b="1" i="0">
-                <a:solidFill>
-                  <a:srgbClr val="4A7FA5"/>
-                </a:solidFill>
-              </a:rPr>
-              <a:t>Targeted
-amplification</a:t>
-            </a:r>
-          </a:p>
-        </p:txBody>
-      </p:sp>
-      <p:sp>
-        <p:nvSpPr>
-          <p:cNvPr id="15" name="TextBox 14"/>
-          <p:cNvSpPr txBox="1"/>
-          <p:nvPr/>
-        </p:nvSpPr>
-        <p:spPr>
-          <a:xfrm>
-            <a:off x="2706624" y="2148840"/>
-            <a:ext cx="1828800" cy="1600200"/>
-          </a:xfrm>
-          <a:prstGeom prst="rect">
-            <a:avLst/>
-          </a:prstGeom>
-          <a:noFill/>
-        </p:spPr>
-        <p:txBody>
-          <a:bodyPr wrap="square">
-            <a:spAutoFit/>
-          </a:bodyPr>
-          <a:lstStyle/>
-          <a:p>
-            <a:pPr algn="ctr"/>
-            <a:r>
-              <a:rPr sz="1200" b="0" i="0">
-                <a:solidFill>
-                  <a:srgbClr val="1E3A4A"/>
-                </a:solidFill>
-              </a:rPr>
-              <a:t>PCR-amplify the
-16S marker gene</a:t>
-            </a:r>
-          </a:p>
-        </p:txBody>
-      </p:sp>
-      <p:cxnSp>
-        <p:nvCxnSpPr>
-          <p:cNvPr id="16" name="Connector 15"/>
-          <p:cNvCxnSpPr/>
-          <p:nvPr/>
-        </p:nvCxnSpPr>
-        <p:spPr>
-          <a:xfrm>
-            <a:off x="4608576" y="2651760"/>
-            <a:ext cx="201168" cy="0"/>
-          </a:xfrm>
-          <a:prstGeom prst="line">
-            <a:avLst/>
-          </a:prstGeom>
-          <a:ln w="25400">
-            <a:solidFill>
-              <a:srgbClr val="4A7FA5"/>
-            </a:solidFill>
-          </a:ln>
-        </p:spPr>
-        <p:style>
-          <a:lnRef idx="2">
-            <a:schemeClr val="accent1"/>
-          </a:lnRef>
-          <a:fillRef idx="0">
-            <a:schemeClr val="accent1"/>
-          </a:fillRef>
-          <a:effectRef idx="1">
-            <a:schemeClr val="accent1"/>
-          </a:effectRef>
-          <a:fontRef idx="minor">
-            <a:schemeClr val="tx1"/>
-          </a:fontRef>
-        </p:style>
-      </p:cxnSp>
-      <p:sp>
-        <p:nvSpPr>
-          <p:cNvPr id="17" name="Rectangle 16"/>
-          <p:cNvSpPr/>
-          <p:nvPr/>
-        </p:nvSpPr>
-        <p:spPr>
-          <a:xfrm>
-            <a:off x="4809744" y="1463040"/>
-            <a:ext cx="2011680" cy="2377440"/>
-          </a:xfrm>
-          <a:prstGeom prst="rect">
-            <a:avLst/>
-          </a:prstGeom>
-          <a:solidFill>
-            <a:srgbClr val="FFFFFF"/>
-          </a:solidFill>
-          <a:ln w="25400">
-            <a:solidFill>
-              <a:srgbClr val="F5C8BE"/>
-            </a:solidFill>
-          </a:ln>
-        </p:spPr>
-        <p:style>
-          <a:lnRef idx="1">
-            <a:schemeClr val="accent1"/>
-          </a:lnRef>
-          <a:fillRef idx="3">
-            <a:schemeClr val="accent1"/>
-          </a:fillRef>
-          <a:effectRef idx="2">
-            <a:schemeClr val="accent1"/>
-          </a:effectRef>
-          <a:fontRef idx="minor">
-            <a:schemeClr val="lt1"/>
-          </a:fontRef>
-        </p:style>
-        <p:txBody>
-          <a:bodyPr rtlCol="0" anchor="ctr"/>
-          <a:lstStyle/>
-          <a:p>
-            <a:pPr algn="ctr"/>
-          </a:p>
-        </p:txBody>
-      </p:sp>
-      <p:sp>
-        <p:nvSpPr>
-          <p:cNvPr id="18" name="Rectangle 17"/>
-          <p:cNvSpPr/>
-          <p:nvPr/>
-        </p:nvSpPr>
-        <p:spPr>
-          <a:xfrm>
-            <a:off x="4809744" y="1463040"/>
-            <a:ext cx="2011680" cy="594360"/>
-          </a:xfrm>
-          <a:prstGeom prst="rect">
-            <a:avLst/>
-          </a:prstGeom>
-          <a:solidFill>
-            <a:srgbClr val="F5C8BE"/>
-          </a:solidFill>
-          <a:ln>
-            <a:noFill/>
-          </a:ln>
-        </p:spPr>
-        <p:style>
-          <a:lnRef idx="1">
-            <a:schemeClr val="accent1"/>
-          </a:lnRef>
-          <a:fillRef idx="3">
-            <a:schemeClr val="accent1"/>
-          </a:fillRef>
-          <a:effectRef idx="2">
-            <a:schemeClr val="accent1"/>
-          </a:effectRef>
-          <a:fontRef idx="minor">
-            <a:schemeClr val="lt1"/>
-          </a:fontRef>
-        </p:style>
-        <p:txBody>
-          <a:bodyPr rtlCol="0" anchor="ctr"/>
-          <a:lstStyle/>
-          <a:p>
-            <a:pPr algn="ctr"/>
-          </a:p>
-        </p:txBody>
-      </p:sp>
-      <p:sp>
-        <p:nvSpPr>
-          <p:cNvPr id="19" name="TextBox 18"/>
-          <p:cNvSpPr txBox="1"/>
-          <p:nvPr/>
-        </p:nvSpPr>
-        <p:spPr>
-          <a:xfrm>
-            <a:off x="4919472" y="1508760"/>
-            <a:ext cx="1828800" cy="548640"/>
-          </a:xfrm>
-          <a:prstGeom prst="rect">
-            <a:avLst/>
-          </a:prstGeom>
-          <a:noFill/>
-        </p:spPr>
-        <p:txBody>
-          <a:bodyPr wrap="square">
-            <a:spAutoFit/>
-          </a:bodyPr>
-          <a:lstStyle/>
-          <a:p>
-            <a:pPr algn="ctr"/>
-            <a:r>
-              <a:rPr sz="1400" b="1" i="0">
-                <a:solidFill>
-                  <a:srgbClr val="CB6B52"/>
-                </a:solidFill>
-              </a:rPr>
-              <a:t>Sequencing</a:t>
-            </a:r>
-          </a:p>
-        </p:txBody>
-      </p:sp>
-      <p:sp>
-        <p:nvSpPr>
-          <p:cNvPr id="20" name="TextBox 19"/>
-          <p:cNvSpPr txBox="1"/>
-          <p:nvPr/>
-        </p:nvSpPr>
-        <p:spPr>
-          <a:xfrm>
-            <a:off x="4919472" y="2148840"/>
-            <a:ext cx="1828800" cy="1600200"/>
-          </a:xfrm>
-          <a:prstGeom prst="rect">
-            <a:avLst/>
-          </a:prstGeom>
-          <a:noFill/>
-        </p:spPr>
-        <p:txBody>
-          <a:bodyPr wrap="square">
-            <a:spAutoFit/>
-          </a:bodyPr>
-          <a:lstStyle/>
-          <a:p>
-            <a:pPr algn="ctr"/>
-            <a:r>
-              <a:rPr sz="1200" b="0" i="0">
-                <a:solidFill>
-                  <a:srgbClr val="1E3A4A"/>
-                </a:solidFill>
-              </a:rPr>
-              <a:t>Read millions of
-DNA fragments</a:t>
-            </a:r>
-          </a:p>
-        </p:txBody>
-      </p:sp>
-      <p:cxnSp>
-        <p:nvCxnSpPr>
-          <p:cNvPr id="21" name="Connector 20"/>
-          <p:cNvCxnSpPr/>
-          <p:nvPr/>
-        </p:nvCxnSpPr>
-        <p:spPr>
-          <a:xfrm>
-            <a:off x="6821424" y="2651760"/>
-            <a:ext cx="201168" cy="0"/>
-          </a:xfrm>
-          <a:prstGeom prst="line">
-            <a:avLst/>
-          </a:prstGeom>
-          <a:ln w="25400">
-            <a:solidFill>
-              <a:srgbClr val="CB6B52"/>
-            </a:solidFill>
-          </a:ln>
-        </p:spPr>
-        <p:style>
-          <a:lnRef idx="2">
-            <a:schemeClr val="accent1"/>
-          </a:lnRef>
-          <a:fillRef idx="0">
-            <a:schemeClr val="accent1"/>
-          </a:fillRef>
-          <a:effectRef idx="1">
-            <a:schemeClr val="accent1"/>
-          </a:effectRef>
-          <a:fontRef idx="minor">
-            <a:schemeClr val="tx1"/>
-          </a:fontRef>
-        </p:style>
-      </p:cxnSp>
-      <p:sp>
-        <p:nvSpPr>
-          <p:cNvPr id="22" name="Rectangle 21"/>
-          <p:cNvSpPr/>
-          <p:nvPr/>
-        </p:nvSpPr>
-        <p:spPr>
-          <a:xfrm>
-            <a:off x="7022592" y="1463040"/>
-            <a:ext cx="2011680" cy="2377440"/>
-          </a:xfrm>
-          <a:prstGeom prst="rect">
-            <a:avLst/>
-          </a:prstGeom>
-          <a:solidFill>
-            <a:srgbClr val="FFFFFF"/>
-          </a:solidFill>
-          <a:ln w="25400">
-            <a:solidFill>
-              <a:srgbClr val="D5CFEE"/>
-            </a:solidFill>
-          </a:ln>
-        </p:spPr>
-        <p:style>
-          <a:lnRef idx="1">
-            <a:schemeClr val="accent1"/>
-          </a:lnRef>
-          <a:fillRef idx="3">
-            <a:schemeClr val="accent1"/>
-          </a:fillRef>
-          <a:effectRef idx="2">
-            <a:schemeClr val="accent1"/>
-          </a:effectRef>
-          <a:fontRef idx="minor">
-            <a:schemeClr val="lt1"/>
-          </a:fontRef>
-        </p:style>
-        <p:txBody>
-          <a:bodyPr rtlCol="0" anchor="ctr"/>
-          <a:lstStyle/>
-          <a:p>
-            <a:pPr algn="ctr"/>
-          </a:p>
-        </p:txBody>
-      </p:sp>
-      <p:sp>
-        <p:nvSpPr>
-          <p:cNvPr id="23" name="Rectangle 22"/>
-          <p:cNvSpPr/>
-          <p:nvPr/>
-        </p:nvSpPr>
-        <p:spPr>
-          <a:xfrm>
-            <a:off x="7022592" y="1463040"/>
-            <a:ext cx="2011680" cy="594360"/>
-          </a:xfrm>
-          <a:prstGeom prst="rect">
-            <a:avLst/>
-          </a:prstGeom>
-          <a:solidFill>
-            <a:srgbClr val="D5CFEE"/>
-          </a:solidFill>
-          <a:ln>
-            <a:noFill/>
-          </a:ln>
-        </p:spPr>
-        <p:style>
-          <a:lnRef idx="1">
-            <a:schemeClr val="accent1"/>
-          </a:lnRef>
-          <a:fillRef idx="3">
-            <a:schemeClr val="accent1"/>
-          </a:fillRef>
-          <a:effectRef idx="2">
-            <a:schemeClr val="accent1"/>
-          </a:effectRef>
-          <a:fontRef idx="minor">
-            <a:schemeClr val="lt1"/>
-          </a:fontRef>
-        </p:style>
-        <p:txBody>
-          <a:bodyPr rtlCol="0" anchor="ctr"/>
-          <a:lstStyle/>
-          <a:p>
-            <a:pPr algn="ctr"/>
-          </a:p>
-        </p:txBody>
-      </p:sp>
-      <p:sp>
-        <p:nvSpPr>
-          <p:cNvPr id="24" name="TextBox 23"/>
-          <p:cNvSpPr txBox="1"/>
-          <p:nvPr/>
-        </p:nvSpPr>
-        <p:spPr>
-          <a:xfrm>
-            <a:off x="7132320" y="1508760"/>
-            <a:ext cx="1828800" cy="548640"/>
-          </a:xfrm>
-          <a:prstGeom prst="rect">
-            <a:avLst/>
-          </a:prstGeom>
-          <a:noFill/>
-        </p:spPr>
-        <p:txBody>
-          <a:bodyPr wrap="square">
-            <a:spAutoFit/>
-          </a:bodyPr>
-          <a:lstStyle/>
-          <a:p>
-            <a:pPr algn="ctr"/>
-            <a:r>
-              <a:rPr sz="1400" b="1" i="0">
-                <a:solidFill>
-                  <a:srgbClr val="7B6EAA"/>
-                </a:solidFill>
-              </a:rPr>
-              <a:t>Data processing</a:t>
-            </a:r>
-          </a:p>
-        </p:txBody>
-      </p:sp>
-      <p:sp>
-        <p:nvSpPr>
-          <p:cNvPr id="25" name="TextBox 24"/>
-          <p:cNvSpPr txBox="1"/>
-          <p:nvPr/>
-        </p:nvSpPr>
-        <p:spPr>
-          <a:xfrm>
-            <a:off x="7132320" y="2148840"/>
-            <a:ext cx="1828800" cy="1600200"/>
-          </a:xfrm>
-          <a:prstGeom prst="rect">
-            <a:avLst/>
-          </a:prstGeom>
-          <a:noFill/>
-        </p:spPr>
-        <p:txBody>
-          <a:bodyPr wrap="square">
-            <a:spAutoFit/>
-          </a:bodyPr>
-          <a:lstStyle/>
-          <a:p>
-            <a:pPr algn="ctr"/>
-            <a:r>
-              <a:rPr sz="1200" b="0" i="0">
-                <a:solidFill>
-                  <a:srgbClr val="1E3A4A"/>
-                </a:solidFill>
-              </a:rPr>
-              <a:t>Clean, filter and
-identify sequences</a:t>
-            </a:r>
-          </a:p>
-        </p:txBody>
-      </p:sp>
-      <p:cxnSp>
-        <p:nvCxnSpPr>
-          <p:cNvPr id="26" name="Connector 25"/>
-          <p:cNvCxnSpPr/>
-          <p:nvPr/>
-        </p:nvCxnSpPr>
-        <p:spPr>
-          <a:xfrm>
-            <a:off x="9034272" y="2651760"/>
-            <a:ext cx="201168" cy="0"/>
-          </a:xfrm>
-          <a:prstGeom prst="line">
-            <a:avLst/>
-          </a:prstGeom>
-          <a:ln w="25400">
-            <a:solidFill>
-              <a:srgbClr val="7B6EAA"/>
-            </a:solidFill>
-          </a:ln>
-        </p:spPr>
-        <p:style>
-          <a:lnRef idx="2">
-            <a:schemeClr val="accent1"/>
-          </a:lnRef>
-          <a:fillRef idx="0">
-            <a:schemeClr val="accent1"/>
-          </a:fillRef>
-          <a:effectRef idx="1">
-            <a:schemeClr val="accent1"/>
-          </a:effectRef>
-          <a:fontRef idx="minor">
-            <a:schemeClr val="tx1"/>
-          </a:fontRef>
-        </p:style>
-      </p:cxnSp>
-      <p:sp>
-        <p:nvSpPr>
-          <p:cNvPr id="27" name="Rectangle 26"/>
-          <p:cNvSpPr/>
-          <p:nvPr/>
-        </p:nvSpPr>
-        <p:spPr>
-          <a:xfrm>
-            <a:off x="9235440" y="1463040"/>
-            <a:ext cx="2011680" cy="2377440"/>
-          </a:xfrm>
-          <a:prstGeom prst="rect">
-            <a:avLst/>
-          </a:prstGeom>
-          <a:solidFill>
-            <a:srgbClr val="FFFFFF"/>
-          </a:solidFill>
-          <a:ln w="25400">
-            <a:solidFill>
-              <a:srgbClr val="C3E6C8"/>
-            </a:solidFill>
-          </a:ln>
-        </p:spPr>
-        <p:style>
-          <a:lnRef idx="1">
-            <a:schemeClr val="accent1"/>
-          </a:lnRef>
-          <a:fillRef idx="3">
-            <a:schemeClr val="accent1"/>
-          </a:fillRef>
-          <a:effectRef idx="2">
-            <a:schemeClr val="accent1"/>
-          </a:effectRef>
-          <a:fontRef idx="minor">
-            <a:schemeClr val="lt1"/>
-          </a:fontRef>
-        </p:style>
-        <p:txBody>
-          <a:bodyPr rtlCol="0" anchor="ctr"/>
-          <a:lstStyle/>
-          <a:p>
-            <a:pPr algn="ctr"/>
-          </a:p>
-        </p:txBody>
-      </p:sp>
-      <p:sp>
-        <p:nvSpPr>
-          <p:cNvPr id="28" name="Rectangle 27"/>
-          <p:cNvSpPr/>
-          <p:nvPr/>
-        </p:nvSpPr>
-        <p:spPr>
-          <a:xfrm>
-            <a:off x="9235440" y="1463040"/>
-            <a:ext cx="2011680" cy="594360"/>
-          </a:xfrm>
-          <a:prstGeom prst="rect">
-            <a:avLst/>
-          </a:prstGeom>
-          <a:solidFill>
-            <a:srgbClr val="C3E6C8"/>
-          </a:solidFill>
-          <a:ln>
-            <a:noFill/>
-          </a:ln>
-        </p:spPr>
-        <p:style>
-          <a:lnRef idx="1">
-            <a:schemeClr val="accent1"/>
-          </a:lnRef>
-          <a:fillRef idx="3">
-            <a:schemeClr val="accent1"/>
-          </a:fillRef>
-          <a:effectRef idx="2">
-            <a:schemeClr val="accent1"/>
-          </a:effectRef>
-          <a:fontRef idx="minor">
-            <a:schemeClr val="lt1"/>
-          </a:fontRef>
-        </p:style>
-        <p:txBody>
-          <a:bodyPr rtlCol="0" anchor="ctr"/>
-          <a:lstStyle/>
-          <a:p>
-            <a:pPr algn="ctr"/>
-          </a:p>
-        </p:txBody>
-      </p:sp>
-      <p:sp>
-        <p:nvSpPr>
-          <p:cNvPr id="29" name="TextBox 28"/>
-          <p:cNvSpPr txBox="1"/>
-          <p:nvPr/>
-        </p:nvSpPr>
-        <p:spPr>
-          <a:xfrm>
-            <a:off x="9345168" y="1508760"/>
-            <a:ext cx="1828800" cy="548640"/>
-          </a:xfrm>
-          <a:prstGeom prst="rect">
-            <a:avLst/>
-          </a:prstGeom>
-          <a:noFill/>
-        </p:spPr>
-        <p:txBody>
-          <a:bodyPr wrap="square">
-            <a:spAutoFit/>
-          </a:bodyPr>
-          <a:lstStyle/>
-          <a:p>
-            <a:pPr algn="ctr"/>
-            <a:r>
-              <a:rPr sz="1400" b="1" i="0">
-                <a:solidFill>
-                  <a:srgbClr val="4F9A60"/>
-                </a:solidFill>
-              </a:rPr>
-              <a:t>Interpretation</a:t>
-            </a:r>
-          </a:p>
-        </p:txBody>
-      </p:sp>
-      <p:sp>
-        <p:nvSpPr>
-          <p:cNvPr id="30" name="TextBox 29"/>
-          <p:cNvSpPr txBox="1"/>
-          <p:nvPr/>
-        </p:nvSpPr>
-        <p:spPr>
-          <a:xfrm>
-            <a:off x="9345168" y="2148840"/>
-            <a:ext cx="1828800" cy="1600200"/>
-          </a:xfrm>
-          <a:prstGeom prst="rect">
-            <a:avLst/>
-          </a:prstGeom>
-          <a:noFill/>
-        </p:spPr>
-        <p:txBody>
-          <a:bodyPr wrap="square">
-            <a:spAutoFit/>
-          </a:bodyPr>
-          <a:lstStyle/>
-          <a:p>
-            <a:pPr algn="ctr"/>
-            <a:r>
-              <a:rPr sz="1200" b="0" i="0">
-                <a:solidFill>
-                  <a:srgbClr val="1E3A4A"/>
-                </a:solidFill>
-              </a:rPr>
-              <a:t>Diversity, taxonomy
-and statistics</a:t>
-            </a:r>
-          </a:p>
-        </p:txBody>
-      </p:sp>
-      <p:sp>
-        <p:nvSpPr>
-          <p:cNvPr id="31" name="Rectangle 30"/>
-          <p:cNvSpPr/>
-          <p:nvPr/>
-        </p:nvSpPr>
-        <p:spPr>
-          <a:xfrm>
-            <a:off x="384048" y="4041648"/>
-            <a:ext cx="11411712" cy="2240280"/>
-          </a:xfrm>
-          <a:prstGeom prst="rect">
-            <a:avLst/>
-          </a:prstGeom>
-          <a:solidFill>
-            <a:srgbClr val="FFFFFF"/>
-          </a:solidFill>
-          <a:ln w="19050">
-            <a:solidFill>
-              <a:srgbClr val="B8DEDB"/>
-            </a:solidFill>
-          </a:ln>
-        </p:spPr>
-        <p:style>
-          <a:lnRef idx="1">
-            <a:schemeClr val="accent1"/>
-          </a:lnRef>
-          <a:fillRef idx="3">
-            <a:schemeClr val="accent1"/>
-          </a:fillRef>
-          <a:effectRef idx="2">
-            <a:schemeClr val="accent1"/>
-          </a:effectRef>
-          <a:fontRef idx="minor">
-            <a:schemeClr val="lt1"/>
-          </a:fontRef>
-        </p:style>
-        <p:txBody>
-          <a:bodyPr rtlCol="0" anchor="ctr"/>
-          <a:lstStyle/>
-          <a:p>
-            <a:pPr algn="ctr"/>
-          </a:p>
-        </p:txBody>
-      </p:sp>
-      <p:sp>
-        <p:nvSpPr>
-          <p:cNvPr id="32" name="Rectangle 31"/>
-          <p:cNvSpPr/>
-          <p:nvPr/>
-        </p:nvSpPr>
-        <p:spPr>
-          <a:xfrm>
-            <a:off x="384048" y="4041648"/>
-            <a:ext cx="256032" cy="2240280"/>
-          </a:xfrm>
-          <a:prstGeom prst="rect">
-            <a:avLst/>
-          </a:prstGeom>
-          <a:solidFill>
-            <a:srgbClr val="3D908A"/>
-          </a:solidFill>
-          <a:ln>
-            <a:noFill/>
-          </a:ln>
-        </p:spPr>
-        <p:style>
-          <a:lnRef idx="1">
-            <a:schemeClr val="accent1"/>
-          </a:lnRef>
-          <a:fillRef idx="3">
-            <a:schemeClr val="accent1"/>
-          </a:fillRef>
-          <a:effectRef idx="2">
-            <a:schemeClr val="accent1"/>
-          </a:effectRef>
-          <a:fontRef idx="minor">
-            <a:schemeClr val="lt1"/>
-          </a:fontRef>
-        </p:style>
-        <p:txBody>
-          <a:bodyPr rtlCol="0" anchor="ctr"/>
-          <a:lstStyle/>
-          <a:p>
-            <a:pPr algn="ctr"/>
-          </a:p>
-        </p:txBody>
-      </p:sp>
-      <p:sp>
-        <p:nvSpPr>
-          <p:cNvPr id="33" name="TextBox 32"/>
-          <p:cNvSpPr txBox="1"/>
-          <p:nvPr/>
-        </p:nvSpPr>
-        <p:spPr>
-          <a:xfrm>
-            <a:off x="749808" y="4114800"/>
-            <a:ext cx="6400800" cy="384048"/>
-          </a:xfrm>
-          <a:prstGeom prst="rect">
-            <a:avLst/>
-          </a:prstGeom>
-          <a:noFill/>
-        </p:spPr>
-        <p:txBody>
-          <a:bodyPr wrap="square">
-            <a:spAutoFit/>
-          </a:bodyPr>
-          <a:lstStyle/>
-          <a:p>
-            <a:pPr algn="l"/>
-            <a:r>
-              <a:rPr sz="1600" b="1" i="0">
-                <a:solidFill>
-                  <a:srgbClr val="3D908A"/>
-                </a:solidFill>
-              </a:rPr>
-              <a:t>Why the 16S rRNA gene?</a:t>
-            </a:r>
-          </a:p>
-        </p:txBody>
-      </p:sp>
-      <p:sp>
-        <p:nvSpPr>
-          <p:cNvPr id="34" name="Rectangle 33"/>
-          <p:cNvSpPr/>
-          <p:nvPr/>
-        </p:nvSpPr>
-        <p:spPr>
-          <a:xfrm>
-            <a:off x="749808" y="4590288"/>
-            <a:ext cx="3383280" cy="1508760"/>
-          </a:xfrm>
-          <a:prstGeom prst="rect">
-            <a:avLst/>
-          </a:prstGeom>
-          <a:solidFill>
-            <a:srgbClr val="B8DEDB"/>
-          </a:solidFill>
-          <a:ln>
-            <a:noFill/>
-          </a:ln>
-        </p:spPr>
-        <p:style>
-          <a:lnRef idx="1">
-            <a:schemeClr val="accent1"/>
-          </a:lnRef>
-          <a:fillRef idx="3">
-            <a:schemeClr val="accent1"/>
-          </a:fillRef>
-          <a:effectRef idx="2">
-            <a:schemeClr val="accent1"/>
-          </a:effectRef>
-          <a:fontRef idx="minor">
-            <a:schemeClr val="lt1"/>
-          </a:fontRef>
-        </p:style>
-        <p:txBody>
-          <a:bodyPr rtlCol="0" anchor="ctr"/>
-          <a:lstStyle/>
-          <a:p>
-            <a:pPr algn="ctr"/>
-          </a:p>
-        </p:txBody>
-      </p:sp>
-      <p:sp>
-        <p:nvSpPr>
-          <p:cNvPr id="35" name="TextBox 34"/>
-          <p:cNvSpPr txBox="1"/>
-          <p:nvPr/>
-        </p:nvSpPr>
-        <p:spPr>
-          <a:xfrm>
-            <a:off x="859536" y="4645152"/>
-            <a:ext cx="3108960" cy="347472"/>
+            <a:off x="768096" y="1536192"/>
+            <a:ext cx="3200400" cy="320040"/>
           </a:xfrm>
           <a:prstGeom prst="rect">
             <a:avLst/>
@@ -4846,21 +3886,21 @@
                   <a:srgbClr val="3D908A"/>
                 </a:solidFill>
               </a:rPr>
-              <a:t>Universal</a:t>
-            </a:r>
-          </a:p>
-        </p:txBody>
-      </p:sp>
-      <p:sp>
-        <p:nvSpPr>
-          <p:cNvPr id="36" name="TextBox 35"/>
+              <a:t>Run a complete 16S pipeline</a:t>
+            </a:r>
+          </a:p>
+        </p:txBody>
+      </p:sp>
+      <p:sp>
+        <p:nvSpPr>
+          <p:cNvPr id="11" name="TextBox 10"/>
           <p:cNvSpPr txBox="1"/>
           <p:nvPr/>
         </p:nvSpPr>
         <p:spPr>
           <a:xfrm>
-            <a:off x="859536" y="5047488"/>
-            <a:ext cx="3108960" cy="960120"/>
+            <a:off x="768096" y="1975104"/>
+            <a:ext cx="3200400" cy="1600200"/>
           </a:xfrm>
           <a:prstGeom prst="rect">
             <a:avLst/>
@@ -4875,27 +3915,71 @@
           <a:p>
             <a:pPr algn="l"/>
             <a:r>
-              <a:rPr sz="1200" b="0" i="0">
+              <a:rPr sz="1100" b="0" i="0">
                 <a:solidFill>
                   <a:srgbClr val="1E3A4A"/>
                 </a:solidFill>
               </a:rPr>
-              <a:t>Found in every known
-bacterium and archaeon</a:t>
-            </a:r>
-          </a:p>
-        </p:txBody>
-      </p:sp>
-      <p:sp>
-        <p:nvSpPr>
-          <p:cNvPr id="37" name="Rectangle 36"/>
+              <a:t>Starting from raw FASTQ files, execute every step — import, quality control, primer removal, denoising, phylogeny, diversity, and taxonomy — using the same tools used in production environments.</a:t>
+            </a:r>
+          </a:p>
+        </p:txBody>
+      </p:sp>
+      <p:sp>
+        <p:nvSpPr>
+          <p:cNvPr id="12" name="Rectangle 11"/>
           <p:cNvSpPr/>
           <p:nvPr/>
         </p:nvSpPr>
         <p:spPr>
           <a:xfrm>
-            <a:off x="4407408" y="4590288"/>
-            <a:ext cx="3383280" cy="1508760"/>
+            <a:off x="4334256" y="1444752"/>
+            <a:ext cx="3703320" cy="2240280"/>
+          </a:xfrm>
+          <a:prstGeom prst="rect">
+            <a:avLst/>
+          </a:prstGeom>
+          <a:solidFill>
+            <a:srgbClr val="FFFFFF"/>
+          </a:solidFill>
+          <a:ln w="25400">
+            <a:solidFill>
+              <a:srgbClr val="BBD6ED"/>
+            </a:solidFill>
+          </a:ln>
+        </p:spPr>
+        <p:style>
+          <a:lnRef idx="1">
+            <a:schemeClr val="accent1"/>
+          </a:lnRef>
+          <a:fillRef idx="3">
+            <a:schemeClr val="accent1"/>
+          </a:fillRef>
+          <a:effectRef idx="2">
+            <a:schemeClr val="accent1"/>
+          </a:effectRef>
+          <a:fontRef idx="minor">
+            <a:schemeClr val="lt1"/>
+          </a:fontRef>
+        </p:style>
+        <p:txBody>
+          <a:bodyPr rtlCol="0" anchor="ctr"/>
+          <a:lstStyle/>
+          <a:p>
+            <a:pPr algn="ctr"/>
+          </a:p>
+        </p:txBody>
+      </p:sp>
+      <p:sp>
+        <p:nvSpPr>
+          <p:cNvPr id="13" name="Rectangle 12"/>
+          <p:cNvSpPr/>
+          <p:nvPr/>
+        </p:nvSpPr>
+        <p:spPr>
+          <a:xfrm>
+            <a:off x="4334256" y="1444752"/>
+            <a:ext cx="3703320" cy="475488"/>
           </a:xfrm>
           <a:prstGeom prst="rect">
             <a:avLst/>
@@ -4931,14 +4015,57 @@
       </p:sp>
       <p:sp>
         <p:nvSpPr>
-          <p:cNvPr id="38" name="TextBox 37"/>
+          <p:cNvPr id="14" name="Rectangle 13"/>
+          <p:cNvSpPr/>
+          <p:nvPr/>
+        </p:nvSpPr>
+        <p:spPr>
+          <a:xfrm>
+            <a:off x="4334256" y="1444752"/>
+            <a:ext cx="256032" cy="2240280"/>
+          </a:xfrm>
+          <a:prstGeom prst="rect">
+            <a:avLst/>
+          </a:prstGeom>
+          <a:solidFill>
+            <a:srgbClr val="4A7FA5"/>
+          </a:solidFill>
+          <a:ln>
+            <a:noFill/>
+          </a:ln>
+        </p:spPr>
+        <p:style>
+          <a:lnRef idx="1">
+            <a:schemeClr val="accent1"/>
+          </a:lnRef>
+          <a:fillRef idx="3">
+            <a:schemeClr val="accent1"/>
+          </a:fillRef>
+          <a:effectRef idx="2">
+            <a:schemeClr val="accent1"/>
+          </a:effectRef>
+          <a:fontRef idx="minor">
+            <a:schemeClr val="lt1"/>
+          </a:fontRef>
+        </p:style>
+        <p:txBody>
+          <a:bodyPr rtlCol="0" anchor="ctr"/>
+          <a:lstStyle/>
+          <a:p>
+            <a:pPr algn="ctr"/>
+          </a:p>
+        </p:txBody>
+      </p:sp>
+      <p:sp>
+        <p:nvSpPr>
+          <p:cNvPr id="15" name="TextBox 14"/>
           <p:cNvSpPr txBox="1"/>
           <p:nvPr/>
         </p:nvSpPr>
         <p:spPr>
           <a:xfrm>
-            <a:off x="4517136" y="4645152"/>
-            <a:ext cx="3108960" cy="347472"/>
+            <a:off x="4718304" y="1536192"/>
+            <a:ext cx="3200400" cy="320040"/>
           </a:xfrm>
           <a:prstGeom prst="rect">
             <a:avLst/>
@@ -4958,21 +4085,21 @@
                   <a:srgbClr val="4A7FA5"/>
                 </a:solidFill>
               </a:rPr>
-              <a:t>Discriminating</a:t>
-            </a:r>
-          </a:p>
-        </p:txBody>
-      </p:sp>
-      <p:sp>
-        <p:nvSpPr>
-          <p:cNvPr id="39" name="TextBox 38"/>
+              <a:t>Understand every decision</a:t>
+            </a:r>
+          </a:p>
+        </p:txBody>
+      </p:sp>
+      <p:sp>
+        <p:nvSpPr>
+          <p:cNvPr id="16" name="TextBox 15"/>
           <p:cNvSpPr txBox="1"/>
           <p:nvPr/>
         </p:nvSpPr>
         <p:spPr>
           <a:xfrm>
-            <a:off x="4517136" y="5047488"/>
-            <a:ext cx="3108960" cy="960120"/>
+            <a:off x="4718304" y="1975104"/>
+            <a:ext cx="3200400" cy="1600200"/>
           </a:xfrm>
           <a:prstGeom prst="rect">
             <a:avLst/>
@@ -4987,33 +4114,77 @@
           <a:p>
             <a:pPr algn="l"/>
             <a:r>
-              <a:rPr sz="1200" b="0" i="0">
+              <a:rPr sz="1100" b="0" i="0">
                 <a:solidFill>
                   <a:srgbClr val="1E3A4A"/>
                 </a:solidFill>
               </a:rPr>
-              <a:t>Variable regions allow us
-to tell species apart</a:t>
-            </a:r>
-          </a:p>
-        </p:txBody>
-      </p:sp>
-      <p:sp>
-        <p:nvSpPr>
-          <p:cNvPr id="40" name="Rectangle 39"/>
+              <a:t>Know why each step exists, what can go wrong, and how to read the outputs. Quality scores, denoising stats, rarefaction curves — you will know what to look for and what to worry about.</a:t>
+            </a:r>
+          </a:p>
+        </p:txBody>
+      </p:sp>
+      <p:sp>
+        <p:nvSpPr>
+          <p:cNvPr id="17" name="Rectangle 16"/>
           <p:cNvSpPr/>
           <p:nvPr/>
         </p:nvSpPr>
         <p:spPr>
           <a:xfrm>
-            <a:off x="8065008" y="4590288"/>
-            <a:ext cx="3383280" cy="1508760"/>
-          </a:xfrm>
-          <a:prstGeom prst="rect">
-            <a:avLst/>
-          </a:prstGeom>
-          <a:solidFill>
-            <a:srgbClr val="D5CFEE"/>
+            <a:off x="8284464" y="1444752"/>
+            <a:ext cx="3703320" cy="2240280"/>
+          </a:xfrm>
+          <a:prstGeom prst="rect">
+            <a:avLst/>
+          </a:prstGeom>
+          <a:solidFill>
+            <a:srgbClr val="FFFFFF"/>
+          </a:solidFill>
+          <a:ln w="25400">
+            <a:solidFill>
+              <a:srgbClr val="F5C8BE"/>
+            </a:solidFill>
+          </a:ln>
+        </p:spPr>
+        <p:style>
+          <a:lnRef idx="1">
+            <a:schemeClr val="accent1"/>
+          </a:lnRef>
+          <a:fillRef idx="3">
+            <a:schemeClr val="accent1"/>
+          </a:fillRef>
+          <a:effectRef idx="2">
+            <a:schemeClr val="accent1"/>
+          </a:effectRef>
+          <a:fontRef idx="minor">
+            <a:schemeClr val="lt1"/>
+          </a:fontRef>
+        </p:style>
+        <p:txBody>
+          <a:bodyPr rtlCol="0" anchor="ctr"/>
+          <a:lstStyle/>
+          <a:p>
+            <a:pPr algn="ctr"/>
+          </a:p>
+        </p:txBody>
+      </p:sp>
+      <p:sp>
+        <p:nvSpPr>
+          <p:cNvPr id="18" name="Rectangle 17"/>
+          <p:cNvSpPr/>
+          <p:nvPr/>
+        </p:nvSpPr>
+        <p:spPr>
+          <a:xfrm>
+            <a:off x="8284464" y="1444752"/>
+            <a:ext cx="3703320" cy="475488"/>
+          </a:xfrm>
+          <a:prstGeom prst="rect">
+            <a:avLst/>
+          </a:prstGeom>
+          <a:solidFill>
+            <a:srgbClr val="F5C8BE"/>
           </a:solidFill>
           <a:ln>
             <a:noFill/>
@@ -5043,14 +4214,256 @@
       </p:sp>
       <p:sp>
         <p:nvSpPr>
-          <p:cNvPr id="41" name="TextBox 40"/>
+          <p:cNvPr id="19" name="Rectangle 18"/>
+          <p:cNvSpPr/>
+          <p:nvPr/>
+        </p:nvSpPr>
+        <p:spPr>
+          <a:xfrm>
+            <a:off x="8284464" y="1444752"/>
+            <a:ext cx="256032" cy="2240280"/>
+          </a:xfrm>
+          <a:prstGeom prst="rect">
+            <a:avLst/>
+          </a:prstGeom>
+          <a:solidFill>
+            <a:srgbClr val="CB6B52"/>
+          </a:solidFill>
+          <a:ln>
+            <a:noFill/>
+          </a:ln>
+        </p:spPr>
+        <p:style>
+          <a:lnRef idx="1">
+            <a:schemeClr val="accent1"/>
+          </a:lnRef>
+          <a:fillRef idx="3">
+            <a:schemeClr val="accent1"/>
+          </a:fillRef>
+          <a:effectRef idx="2">
+            <a:schemeClr val="accent1"/>
+          </a:effectRef>
+          <a:fontRef idx="minor">
+            <a:schemeClr val="lt1"/>
+          </a:fontRef>
+        </p:style>
+        <p:txBody>
+          <a:bodyPr rtlCol="0" anchor="ctr"/>
+          <a:lstStyle/>
+          <a:p>
+            <a:pPr algn="ctr"/>
+          </a:p>
+        </p:txBody>
+      </p:sp>
+      <p:sp>
+        <p:nvSpPr>
+          <p:cNvPr id="20" name="TextBox 19"/>
           <p:cNvSpPr txBox="1"/>
           <p:nvPr/>
         </p:nvSpPr>
         <p:spPr>
           <a:xfrm>
-            <a:off x="8174736" y="4645152"/>
-            <a:ext cx="3108960" cy="347472"/>
+            <a:off x="8668512" y="1536192"/>
+            <a:ext cx="3200400" cy="320040"/>
+          </a:xfrm>
+          <a:prstGeom prst="rect">
+            <a:avLst/>
+          </a:prstGeom>
+          <a:noFill/>
+        </p:spPr>
+        <p:txBody>
+          <a:bodyPr wrap="square">
+            <a:spAutoFit/>
+          </a:bodyPr>
+          <a:lstStyle/>
+          <a:p>
+            <a:pPr algn="l"/>
+            <a:r>
+              <a:rPr sz="1300" b="1" i="0">
+                <a:solidFill>
+                  <a:srgbClr val="CB6B52"/>
+                </a:solidFill>
+              </a:rPr>
+              <a:t>Interpret diversity results</a:t>
+            </a:r>
+          </a:p>
+        </p:txBody>
+      </p:sp>
+      <p:sp>
+        <p:nvSpPr>
+          <p:cNvPr id="21" name="TextBox 20"/>
+          <p:cNvSpPr txBox="1"/>
+          <p:nvPr/>
+        </p:nvSpPr>
+        <p:spPr>
+          <a:xfrm>
+            <a:off x="8668512" y="1975104"/>
+            <a:ext cx="3200400" cy="1600200"/>
+          </a:xfrm>
+          <a:prstGeom prst="rect">
+            <a:avLst/>
+          </a:prstGeom>
+          <a:noFill/>
+        </p:spPr>
+        <p:txBody>
+          <a:bodyPr wrap="square">
+            <a:spAutoFit/>
+          </a:bodyPr>
+          <a:lstStyle/>
+          <a:p>
+            <a:pPr algn="l"/>
+            <a:r>
+              <a:rPr sz="1100" b="0" i="0">
+                <a:solidFill>
+                  <a:srgbClr val="1E3A4A"/>
+                </a:solidFill>
+              </a:rPr>
+              <a:t>Read and explain alpha diversity (richness within a sample) and beta diversity (differences between samples). Understand what a PCoA plot is telling you and whether the patterns are meaningful.</a:t>
+            </a:r>
+          </a:p>
+        </p:txBody>
+      </p:sp>
+      <p:sp>
+        <p:nvSpPr>
+          <p:cNvPr id="22" name="Rectangle 21"/>
+          <p:cNvSpPr/>
+          <p:nvPr/>
+        </p:nvSpPr>
+        <p:spPr>
+          <a:xfrm>
+            <a:off x="384048" y="3840480"/>
+            <a:ext cx="3703320" cy="2240280"/>
+          </a:xfrm>
+          <a:prstGeom prst="rect">
+            <a:avLst/>
+          </a:prstGeom>
+          <a:solidFill>
+            <a:srgbClr val="FFFFFF"/>
+          </a:solidFill>
+          <a:ln w="25400">
+            <a:solidFill>
+              <a:srgbClr val="D5CFEE"/>
+            </a:solidFill>
+          </a:ln>
+        </p:spPr>
+        <p:style>
+          <a:lnRef idx="1">
+            <a:schemeClr val="accent1"/>
+          </a:lnRef>
+          <a:fillRef idx="3">
+            <a:schemeClr val="accent1"/>
+          </a:fillRef>
+          <a:effectRef idx="2">
+            <a:schemeClr val="accent1"/>
+          </a:effectRef>
+          <a:fontRef idx="minor">
+            <a:schemeClr val="lt1"/>
+          </a:fontRef>
+        </p:style>
+        <p:txBody>
+          <a:bodyPr rtlCol="0" anchor="ctr"/>
+          <a:lstStyle/>
+          <a:p>
+            <a:pPr algn="ctr"/>
+          </a:p>
+        </p:txBody>
+      </p:sp>
+      <p:sp>
+        <p:nvSpPr>
+          <p:cNvPr id="23" name="Rectangle 22"/>
+          <p:cNvSpPr/>
+          <p:nvPr/>
+        </p:nvSpPr>
+        <p:spPr>
+          <a:xfrm>
+            <a:off x="384048" y="3840480"/>
+            <a:ext cx="3703320" cy="475488"/>
+          </a:xfrm>
+          <a:prstGeom prst="rect">
+            <a:avLst/>
+          </a:prstGeom>
+          <a:solidFill>
+            <a:srgbClr val="D5CFEE"/>
+          </a:solidFill>
+          <a:ln>
+            <a:noFill/>
+          </a:ln>
+        </p:spPr>
+        <p:style>
+          <a:lnRef idx="1">
+            <a:schemeClr val="accent1"/>
+          </a:lnRef>
+          <a:fillRef idx="3">
+            <a:schemeClr val="accent1"/>
+          </a:fillRef>
+          <a:effectRef idx="2">
+            <a:schemeClr val="accent1"/>
+          </a:effectRef>
+          <a:fontRef idx="minor">
+            <a:schemeClr val="lt1"/>
+          </a:fontRef>
+        </p:style>
+        <p:txBody>
+          <a:bodyPr rtlCol="0" anchor="ctr"/>
+          <a:lstStyle/>
+          <a:p>
+            <a:pPr algn="ctr"/>
+          </a:p>
+        </p:txBody>
+      </p:sp>
+      <p:sp>
+        <p:nvSpPr>
+          <p:cNvPr id="24" name="Rectangle 23"/>
+          <p:cNvSpPr/>
+          <p:nvPr/>
+        </p:nvSpPr>
+        <p:spPr>
+          <a:xfrm>
+            <a:off x="384048" y="3840480"/>
+            <a:ext cx="256032" cy="2240280"/>
+          </a:xfrm>
+          <a:prstGeom prst="rect">
+            <a:avLst/>
+          </a:prstGeom>
+          <a:solidFill>
+            <a:srgbClr val="7B6EAA"/>
+          </a:solidFill>
+          <a:ln>
+            <a:noFill/>
+          </a:ln>
+        </p:spPr>
+        <p:style>
+          <a:lnRef idx="1">
+            <a:schemeClr val="accent1"/>
+          </a:lnRef>
+          <a:fillRef idx="3">
+            <a:schemeClr val="accent1"/>
+          </a:fillRef>
+          <a:effectRef idx="2">
+            <a:schemeClr val="accent1"/>
+          </a:effectRef>
+          <a:fontRef idx="minor">
+            <a:schemeClr val="lt1"/>
+          </a:fontRef>
+        </p:style>
+        <p:txBody>
+          <a:bodyPr rtlCol="0" anchor="ctr"/>
+          <a:lstStyle/>
+          <a:p>
+            <a:pPr algn="ctr"/>
+          </a:p>
+        </p:txBody>
+      </p:sp>
+      <p:sp>
+        <p:nvSpPr>
+          <p:cNvPr id="25" name="TextBox 24"/>
+          <p:cNvSpPr txBox="1"/>
+          <p:nvPr/>
+        </p:nvSpPr>
+        <p:spPr>
+          <a:xfrm>
+            <a:off x="768096" y="3931920"/>
+            <a:ext cx="3200400" cy="320040"/>
           </a:xfrm>
           <a:prstGeom prst="rect">
             <a:avLst/>
@@ -5070,21 +4483,21 @@
                   <a:srgbClr val="7B6EAA"/>
                 </a:solidFill>
               </a:rPr>
-              <a:t>Practical</a:t>
-            </a:r>
-          </a:p>
-        </p:txBody>
-      </p:sp>
-      <p:sp>
-        <p:nvSpPr>
-          <p:cNvPr id="42" name="TextBox 41"/>
+              <a:t>Assign and visualize taxonomy</a:t>
+            </a:r>
+          </a:p>
+        </p:txBody>
+      </p:sp>
+      <p:sp>
+        <p:nvSpPr>
+          <p:cNvPr id="26" name="TextBox 25"/>
           <p:cNvSpPr txBox="1"/>
           <p:nvPr/>
         </p:nvSpPr>
         <p:spPr>
           <a:xfrm>
-            <a:off x="8174736" y="5047488"/>
-            <a:ext cx="3108960" cy="960120"/>
+            <a:off x="768096" y="4370832"/>
+            <a:ext cx="3200400" cy="1600200"/>
           </a:xfrm>
           <a:prstGeom prst="rect">
             <a:avLst/>
@@ -5099,13 +4512,211 @@
           <a:p>
             <a:pPr algn="l"/>
             <a:r>
-              <a:rPr sz="1200" b="0" i="0">
+              <a:rPr sz="1100" b="0" i="0">
                 <a:solidFill>
                   <a:srgbClr val="1E3A4A"/>
                 </a:solidFill>
               </a:rPr>
-              <a:t>Well-established protocols
-and huge reference databases</a:t>
+              <a:t>Match sequences to a reference database, understand confidence levels, filter out non-bacterial contaminants, and produce a publication-ready stacked barplot of community composition.</a:t>
+            </a:r>
+          </a:p>
+        </p:txBody>
+      </p:sp>
+      <p:sp>
+        <p:nvSpPr>
+          <p:cNvPr id="27" name="Rectangle 26"/>
+          <p:cNvSpPr/>
+          <p:nvPr/>
+        </p:nvSpPr>
+        <p:spPr>
+          <a:xfrm>
+            <a:off x="4334256" y="3840480"/>
+            <a:ext cx="3703320" cy="2240280"/>
+          </a:xfrm>
+          <a:prstGeom prst="rect">
+            <a:avLst/>
+          </a:prstGeom>
+          <a:solidFill>
+            <a:srgbClr val="FFFFFF"/>
+          </a:solidFill>
+          <a:ln w="25400">
+            <a:solidFill>
+              <a:srgbClr val="C3E6C8"/>
+            </a:solidFill>
+          </a:ln>
+        </p:spPr>
+        <p:style>
+          <a:lnRef idx="1">
+            <a:schemeClr val="accent1"/>
+          </a:lnRef>
+          <a:fillRef idx="3">
+            <a:schemeClr val="accent1"/>
+          </a:fillRef>
+          <a:effectRef idx="2">
+            <a:schemeClr val="accent1"/>
+          </a:effectRef>
+          <a:fontRef idx="minor">
+            <a:schemeClr val="lt1"/>
+          </a:fontRef>
+        </p:style>
+        <p:txBody>
+          <a:bodyPr rtlCol="0" anchor="ctr"/>
+          <a:lstStyle/>
+          <a:p>
+            <a:pPr algn="ctr"/>
+          </a:p>
+        </p:txBody>
+      </p:sp>
+      <p:sp>
+        <p:nvSpPr>
+          <p:cNvPr id="28" name="Rectangle 27"/>
+          <p:cNvSpPr/>
+          <p:nvPr/>
+        </p:nvSpPr>
+        <p:spPr>
+          <a:xfrm>
+            <a:off x="4334256" y="3840480"/>
+            <a:ext cx="3703320" cy="475488"/>
+          </a:xfrm>
+          <a:prstGeom prst="rect">
+            <a:avLst/>
+          </a:prstGeom>
+          <a:solidFill>
+            <a:srgbClr val="C3E6C8"/>
+          </a:solidFill>
+          <a:ln>
+            <a:noFill/>
+          </a:ln>
+        </p:spPr>
+        <p:style>
+          <a:lnRef idx="1">
+            <a:schemeClr val="accent1"/>
+          </a:lnRef>
+          <a:fillRef idx="3">
+            <a:schemeClr val="accent1"/>
+          </a:fillRef>
+          <a:effectRef idx="2">
+            <a:schemeClr val="accent1"/>
+          </a:effectRef>
+          <a:fontRef idx="minor">
+            <a:schemeClr val="lt1"/>
+          </a:fontRef>
+        </p:style>
+        <p:txBody>
+          <a:bodyPr rtlCol="0" anchor="ctr"/>
+          <a:lstStyle/>
+          <a:p>
+            <a:pPr algn="ctr"/>
+          </a:p>
+        </p:txBody>
+      </p:sp>
+      <p:sp>
+        <p:nvSpPr>
+          <p:cNvPr id="29" name="Rectangle 28"/>
+          <p:cNvSpPr/>
+          <p:nvPr/>
+        </p:nvSpPr>
+        <p:spPr>
+          <a:xfrm>
+            <a:off x="4334256" y="3840480"/>
+            <a:ext cx="256032" cy="2240280"/>
+          </a:xfrm>
+          <a:prstGeom prst="rect">
+            <a:avLst/>
+          </a:prstGeom>
+          <a:solidFill>
+            <a:srgbClr val="4F9A60"/>
+          </a:solidFill>
+          <a:ln>
+            <a:noFill/>
+          </a:ln>
+        </p:spPr>
+        <p:style>
+          <a:lnRef idx="1">
+            <a:schemeClr val="accent1"/>
+          </a:lnRef>
+          <a:fillRef idx="3">
+            <a:schemeClr val="accent1"/>
+          </a:fillRef>
+          <a:effectRef idx="2">
+            <a:schemeClr val="accent1"/>
+          </a:effectRef>
+          <a:fontRef idx="minor">
+            <a:schemeClr val="lt1"/>
+          </a:fontRef>
+        </p:style>
+        <p:txBody>
+          <a:bodyPr rtlCol="0" anchor="ctr"/>
+          <a:lstStyle/>
+          <a:p>
+            <a:pPr algn="ctr"/>
+          </a:p>
+        </p:txBody>
+      </p:sp>
+      <p:sp>
+        <p:nvSpPr>
+          <p:cNvPr id="30" name="TextBox 29"/>
+          <p:cNvSpPr txBox="1"/>
+          <p:nvPr/>
+        </p:nvSpPr>
+        <p:spPr>
+          <a:xfrm>
+            <a:off x="4718304" y="3931920"/>
+            <a:ext cx="3200400" cy="320040"/>
+          </a:xfrm>
+          <a:prstGeom prst="rect">
+            <a:avLst/>
+          </a:prstGeom>
+          <a:noFill/>
+        </p:spPr>
+        <p:txBody>
+          <a:bodyPr wrap="square">
+            <a:spAutoFit/>
+          </a:bodyPr>
+          <a:lstStyle/>
+          <a:p>
+            <a:pPr algn="l"/>
+            <a:r>
+              <a:rPr sz="1300" b="1" i="0">
+                <a:solidFill>
+                  <a:srgbClr val="4F9A60"/>
+                </a:solidFill>
+              </a:rPr>
+              <a:t>Apply this to your own data</a:t>
+            </a:r>
+          </a:p>
+        </p:txBody>
+      </p:sp>
+      <p:sp>
+        <p:nvSpPr>
+          <p:cNvPr id="31" name="TextBox 30"/>
+          <p:cNvSpPr txBox="1"/>
+          <p:nvPr/>
+        </p:nvSpPr>
+        <p:spPr>
+          <a:xfrm>
+            <a:off x="4718304" y="4370832"/>
+            <a:ext cx="3200400" cy="1600200"/>
+          </a:xfrm>
+          <a:prstGeom prst="rect">
+            <a:avLst/>
+          </a:prstGeom>
+          <a:noFill/>
+        </p:spPr>
+        <p:txBody>
+          <a:bodyPr wrap="square">
+            <a:spAutoFit/>
+          </a:bodyPr>
+          <a:lstStyle/>
+          <a:p>
+            <a:pPr algn="l"/>
+            <a:r>
+              <a:rPr sz="1100" b="0" i="0">
+                <a:solidFill>
+                  <a:srgbClr val="1E3A4A"/>
+                </a:solidFill>
+              </a:rPr>
+              <a:t>The pipeline you run today is the same one you will use on the dataset assigned for evaluation. After this workshop, you have everything you need to complete the analysis independently.</a:t>
             </a:r>
           </a:p>
         </p:txBody>
@@ -5194,7 +4805,7 @@
             <a:avLst/>
           </a:prstGeom>
           <a:solidFill>
-            <a:srgbClr val="CB6B52"/>
+            <a:srgbClr val="3D908A"/>
           </a:solidFill>
           <a:ln>
             <a:noFill/>
@@ -5237,7 +4848,7 @@
             <a:avLst/>
           </a:prstGeom>
           <a:solidFill>
-            <a:srgbClr val="CB6B52"/>
+            <a:srgbClr val="3D908A"/>
           </a:solidFill>
           <a:ln>
             <a:noFill/>
@@ -5274,7 +4885,7 @@
         <p:spPr>
           <a:xfrm>
             <a:off x="384048" y="91440"/>
-            <a:ext cx="10972800" cy="658368"/>
+            <a:ext cx="9144000" cy="658368"/>
           </a:xfrm>
           <a:prstGeom prst="rect">
             <a:avLst/>
@@ -5294,7 +4905,7 @@
                   <a:srgbClr val="1E3A4A"/>
                 </a:solidFill>
               </a:rPr>
-              <a:t>From Raw Data to Trusted Sequences</a:t>
+              <a:t>The Big Picture</a:t>
             </a:r>
           </a:p>
         </p:txBody>
@@ -5308,7 +4919,7 @@
         <p:spPr>
           <a:xfrm>
             <a:off x="384048" y="749808"/>
-            <a:ext cx="10972800" cy="384048"/>
+            <a:ext cx="9144000" cy="384048"/>
           </a:xfrm>
           <a:prstGeom prst="rect">
             <a:avLst/>
@@ -5328,7 +4939,7 @@
                   <a:srgbClr val="6E8494"/>
                 </a:solidFill>
               </a:rPr>
-              <a:t>Quality control, primer removal, and error correction</a:t>
+              <a:t>From a biological sample to a microbial profile</a:t>
             </a:r>
           </a:p>
         </p:txBody>
@@ -5341,8 +4952,394 @@
         </p:nvSpPr>
         <p:spPr>
           <a:xfrm>
-            <a:off x="384048" y="1444752"/>
-            <a:ext cx="5577840" cy="2331720"/>
+            <a:off x="384048" y="1463040"/>
+            <a:ext cx="2011680" cy="2377440"/>
+          </a:xfrm>
+          <a:prstGeom prst="rect">
+            <a:avLst/>
+          </a:prstGeom>
+          <a:solidFill>
+            <a:srgbClr val="FFFFFF"/>
+          </a:solidFill>
+          <a:ln w="25400">
+            <a:solidFill>
+              <a:srgbClr val="B8DEDB"/>
+            </a:solidFill>
+          </a:ln>
+        </p:spPr>
+        <p:style>
+          <a:lnRef idx="1">
+            <a:schemeClr val="accent1"/>
+          </a:lnRef>
+          <a:fillRef idx="3">
+            <a:schemeClr val="accent1"/>
+          </a:fillRef>
+          <a:effectRef idx="2">
+            <a:schemeClr val="accent1"/>
+          </a:effectRef>
+          <a:fontRef idx="minor">
+            <a:schemeClr val="lt1"/>
+          </a:fontRef>
+        </p:style>
+        <p:txBody>
+          <a:bodyPr rtlCol="0" anchor="ctr"/>
+          <a:lstStyle/>
+          <a:p>
+            <a:pPr algn="ctr"/>
+          </a:p>
+        </p:txBody>
+      </p:sp>
+      <p:sp>
+        <p:nvSpPr>
+          <p:cNvPr id="8" name="Rectangle 7"/>
+          <p:cNvSpPr/>
+          <p:nvPr/>
+        </p:nvSpPr>
+        <p:spPr>
+          <a:xfrm>
+            <a:off x="384048" y="1463040"/>
+            <a:ext cx="2011680" cy="594360"/>
+          </a:xfrm>
+          <a:prstGeom prst="rect">
+            <a:avLst/>
+          </a:prstGeom>
+          <a:solidFill>
+            <a:srgbClr val="B8DEDB"/>
+          </a:solidFill>
+          <a:ln>
+            <a:noFill/>
+          </a:ln>
+        </p:spPr>
+        <p:style>
+          <a:lnRef idx="1">
+            <a:schemeClr val="accent1"/>
+          </a:lnRef>
+          <a:fillRef idx="3">
+            <a:schemeClr val="accent1"/>
+          </a:fillRef>
+          <a:effectRef idx="2">
+            <a:schemeClr val="accent1"/>
+          </a:effectRef>
+          <a:fontRef idx="minor">
+            <a:schemeClr val="lt1"/>
+          </a:fontRef>
+        </p:style>
+        <p:txBody>
+          <a:bodyPr rtlCol="0" anchor="ctr"/>
+          <a:lstStyle/>
+          <a:p>
+            <a:pPr algn="ctr"/>
+          </a:p>
+        </p:txBody>
+      </p:sp>
+      <p:sp>
+        <p:nvSpPr>
+          <p:cNvPr id="9" name="TextBox 8"/>
+          <p:cNvSpPr txBox="1"/>
+          <p:nvPr/>
+        </p:nvSpPr>
+        <p:spPr>
+          <a:xfrm>
+            <a:off x="493776" y="1508760"/>
+            <a:ext cx="1828800" cy="548640"/>
+          </a:xfrm>
+          <a:prstGeom prst="rect">
+            <a:avLst/>
+          </a:prstGeom>
+          <a:noFill/>
+        </p:spPr>
+        <p:txBody>
+          <a:bodyPr wrap="square">
+            <a:spAutoFit/>
+          </a:bodyPr>
+          <a:lstStyle/>
+          <a:p>
+            <a:pPr algn="ctr"/>
+            <a:r>
+              <a:rPr sz="1400" b="1" i="0">
+                <a:solidFill>
+                  <a:srgbClr val="3D908A"/>
+                </a:solidFill>
+              </a:rPr>
+              <a:t>Sample
+collection</a:t>
+            </a:r>
+          </a:p>
+        </p:txBody>
+      </p:sp>
+      <p:sp>
+        <p:nvSpPr>
+          <p:cNvPr id="10" name="TextBox 9"/>
+          <p:cNvSpPr txBox="1"/>
+          <p:nvPr/>
+        </p:nvSpPr>
+        <p:spPr>
+          <a:xfrm>
+            <a:off x="493776" y="2148840"/>
+            <a:ext cx="1828800" cy="1600200"/>
+          </a:xfrm>
+          <a:prstGeom prst="rect">
+            <a:avLst/>
+          </a:prstGeom>
+          <a:noFill/>
+        </p:spPr>
+        <p:txBody>
+          <a:bodyPr wrap="square">
+            <a:spAutoFit/>
+          </a:bodyPr>
+          <a:lstStyle/>
+          <a:p>
+            <a:pPr algn="ctr"/>
+            <a:r>
+              <a:rPr sz="1200" b="0" i="0">
+                <a:solidFill>
+                  <a:srgbClr val="1E3A4A"/>
+                </a:solidFill>
+              </a:rPr>
+              <a:t>Extract DNA from
+the sample</a:t>
+            </a:r>
+          </a:p>
+        </p:txBody>
+      </p:sp>
+      <p:cxnSp>
+        <p:nvCxnSpPr>
+          <p:cNvPr id="11" name="Connector 10"/>
+          <p:cNvCxnSpPr/>
+          <p:nvPr/>
+        </p:nvCxnSpPr>
+        <p:spPr>
+          <a:xfrm>
+            <a:off x="2395728" y="2651760"/>
+            <a:ext cx="201168" cy="0"/>
+          </a:xfrm>
+          <a:prstGeom prst="line">
+            <a:avLst/>
+          </a:prstGeom>
+          <a:ln w="25400">
+            <a:solidFill>
+              <a:srgbClr val="3D908A"/>
+            </a:solidFill>
+          </a:ln>
+        </p:spPr>
+        <p:style>
+          <a:lnRef idx="2">
+            <a:schemeClr val="accent1"/>
+          </a:lnRef>
+          <a:fillRef idx="0">
+            <a:schemeClr val="accent1"/>
+          </a:fillRef>
+          <a:effectRef idx="1">
+            <a:schemeClr val="accent1"/>
+          </a:effectRef>
+          <a:fontRef idx="minor">
+            <a:schemeClr val="tx1"/>
+          </a:fontRef>
+        </p:style>
+      </p:cxnSp>
+      <p:sp>
+        <p:nvSpPr>
+          <p:cNvPr id="12" name="Rectangle 11"/>
+          <p:cNvSpPr/>
+          <p:nvPr/>
+        </p:nvSpPr>
+        <p:spPr>
+          <a:xfrm>
+            <a:off x="2596896" y="1463040"/>
+            <a:ext cx="2011680" cy="2377440"/>
+          </a:xfrm>
+          <a:prstGeom prst="rect">
+            <a:avLst/>
+          </a:prstGeom>
+          <a:solidFill>
+            <a:srgbClr val="FFFFFF"/>
+          </a:solidFill>
+          <a:ln w="25400">
+            <a:solidFill>
+              <a:srgbClr val="BBD6ED"/>
+            </a:solidFill>
+          </a:ln>
+        </p:spPr>
+        <p:style>
+          <a:lnRef idx="1">
+            <a:schemeClr val="accent1"/>
+          </a:lnRef>
+          <a:fillRef idx="3">
+            <a:schemeClr val="accent1"/>
+          </a:fillRef>
+          <a:effectRef idx="2">
+            <a:schemeClr val="accent1"/>
+          </a:effectRef>
+          <a:fontRef idx="minor">
+            <a:schemeClr val="lt1"/>
+          </a:fontRef>
+        </p:style>
+        <p:txBody>
+          <a:bodyPr rtlCol="0" anchor="ctr"/>
+          <a:lstStyle/>
+          <a:p>
+            <a:pPr algn="ctr"/>
+          </a:p>
+        </p:txBody>
+      </p:sp>
+      <p:sp>
+        <p:nvSpPr>
+          <p:cNvPr id="13" name="Rectangle 12"/>
+          <p:cNvSpPr/>
+          <p:nvPr/>
+        </p:nvSpPr>
+        <p:spPr>
+          <a:xfrm>
+            <a:off x="2596896" y="1463040"/>
+            <a:ext cx="2011680" cy="594360"/>
+          </a:xfrm>
+          <a:prstGeom prst="rect">
+            <a:avLst/>
+          </a:prstGeom>
+          <a:solidFill>
+            <a:srgbClr val="BBD6ED"/>
+          </a:solidFill>
+          <a:ln>
+            <a:noFill/>
+          </a:ln>
+        </p:spPr>
+        <p:style>
+          <a:lnRef idx="1">
+            <a:schemeClr val="accent1"/>
+          </a:lnRef>
+          <a:fillRef idx="3">
+            <a:schemeClr val="accent1"/>
+          </a:fillRef>
+          <a:effectRef idx="2">
+            <a:schemeClr val="accent1"/>
+          </a:effectRef>
+          <a:fontRef idx="minor">
+            <a:schemeClr val="lt1"/>
+          </a:fontRef>
+        </p:style>
+        <p:txBody>
+          <a:bodyPr rtlCol="0" anchor="ctr"/>
+          <a:lstStyle/>
+          <a:p>
+            <a:pPr algn="ctr"/>
+          </a:p>
+        </p:txBody>
+      </p:sp>
+      <p:sp>
+        <p:nvSpPr>
+          <p:cNvPr id="14" name="TextBox 13"/>
+          <p:cNvSpPr txBox="1"/>
+          <p:nvPr/>
+        </p:nvSpPr>
+        <p:spPr>
+          <a:xfrm>
+            <a:off x="2706624" y="1508760"/>
+            <a:ext cx="1828800" cy="548640"/>
+          </a:xfrm>
+          <a:prstGeom prst="rect">
+            <a:avLst/>
+          </a:prstGeom>
+          <a:noFill/>
+        </p:spPr>
+        <p:txBody>
+          <a:bodyPr wrap="square">
+            <a:spAutoFit/>
+          </a:bodyPr>
+          <a:lstStyle/>
+          <a:p>
+            <a:pPr algn="ctr"/>
+            <a:r>
+              <a:rPr sz="1400" b="1" i="0">
+                <a:solidFill>
+                  <a:srgbClr val="4A7FA5"/>
+                </a:solidFill>
+              </a:rPr>
+              <a:t>Targeted
+amplification</a:t>
+            </a:r>
+          </a:p>
+        </p:txBody>
+      </p:sp>
+      <p:sp>
+        <p:nvSpPr>
+          <p:cNvPr id="15" name="TextBox 14"/>
+          <p:cNvSpPr txBox="1"/>
+          <p:nvPr/>
+        </p:nvSpPr>
+        <p:spPr>
+          <a:xfrm>
+            <a:off x="2706624" y="2148840"/>
+            <a:ext cx="1828800" cy="1600200"/>
+          </a:xfrm>
+          <a:prstGeom prst="rect">
+            <a:avLst/>
+          </a:prstGeom>
+          <a:noFill/>
+        </p:spPr>
+        <p:txBody>
+          <a:bodyPr wrap="square">
+            <a:spAutoFit/>
+          </a:bodyPr>
+          <a:lstStyle/>
+          <a:p>
+            <a:pPr algn="ctr"/>
+            <a:r>
+              <a:rPr sz="1200" b="0" i="0">
+                <a:solidFill>
+                  <a:srgbClr val="1E3A4A"/>
+                </a:solidFill>
+              </a:rPr>
+              <a:t>PCR-amplify the
+16S marker gene</a:t>
+            </a:r>
+          </a:p>
+        </p:txBody>
+      </p:sp>
+      <p:cxnSp>
+        <p:nvCxnSpPr>
+          <p:cNvPr id="16" name="Connector 15"/>
+          <p:cNvCxnSpPr/>
+          <p:nvPr/>
+        </p:nvCxnSpPr>
+        <p:spPr>
+          <a:xfrm>
+            <a:off x="4608576" y="2651760"/>
+            <a:ext cx="201168" cy="0"/>
+          </a:xfrm>
+          <a:prstGeom prst="line">
+            <a:avLst/>
+          </a:prstGeom>
+          <a:ln w="25400">
+            <a:solidFill>
+              <a:srgbClr val="4A7FA5"/>
+            </a:solidFill>
+          </a:ln>
+        </p:spPr>
+        <p:style>
+          <a:lnRef idx="2">
+            <a:schemeClr val="accent1"/>
+          </a:lnRef>
+          <a:fillRef idx="0">
+            <a:schemeClr val="accent1"/>
+          </a:fillRef>
+          <a:effectRef idx="1">
+            <a:schemeClr val="accent1"/>
+          </a:effectRef>
+          <a:fontRef idx="minor">
+            <a:schemeClr val="tx1"/>
+          </a:fontRef>
+        </p:style>
+      </p:cxnSp>
+      <p:sp>
+        <p:nvSpPr>
+          <p:cNvPr id="17" name="Rectangle 16"/>
+          <p:cNvSpPr/>
+          <p:nvPr/>
+        </p:nvSpPr>
+        <p:spPr>
+          <a:xfrm>
+            <a:off x="4809744" y="1463040"/>
+            <a:ext cx="2011680" cy="2377440"/>
           </a:xfrm>
           <a:prstGeom prst="rect">
             <a:avLst/>
@@ -5380,14 +5377,14 @@
       </p:sp>
       <p:sp>
         <p:nvSpPr>
-          <p:cNvPr id="8" name="Rectangle 7"/>
+          <p:cNvPr id="18" name="Rectangle 17"/>
           <p:cNvSpPr/>
           <p:nvPr/>
         </p:nvSpPr>
         <p:spPr>
           <a:xfrm>
-            <a:off x="384048" y="1444752"/>
-            <a:ext cx="457200" cy="2331720"/>
+            <a:off x="4809744" y="1463040"/>
+            <a:ext cx="2011680" cy="594360"/>
           </a:xfrm>
           <a:prstGeom prst="rect">
             <a:avLst/>
@@ -5423,57 +5420,14 @@
       </p:sp>
       <p:sp>
         <p:nvSpPr>
-          <p:cNvPr id="9" name="Rectangle 8"/>
-          <p:cNvSpPr/>
-          <p:nvPr/>
-        </p:nvSpPr>
-        <p:spPr>
-          <a:xfrm>
-            <a:off x="384048" y="1444752"/>
-            <a:ext cx="5577840" cy="475488"/>
-          </a:xfrm>
-          <a:prstGeom prst="rect">
-            <a:avLst/>
-          </a:prstGeom>
-          <a:solidFill>
-            <a:srgbClr val="F5C8BE"/>
-          </a:solidFill>
-          <a:ln>
-            <a:noFill/>
-          </a:ln>
-        </p:spPr>
-        <p:style>
-          <a:lnRef idx="1">
-            <a:schemeClr val="accent1"/>
-          </a:lnRef>
-          <a:fillRef idx="3">
-            <a:schemeClr val="accent1"/>
-          </a:fillRef>
-          <a:effectRef idx="2">
-            <a:schemeClr val="accent1"/>
-          </a:effectRef>
-          <a:fontRef idx="minor">
-            <a:schemeClr val="lt1"/>
-          </a:fontRef>
-        </p:style>
-        <p:txBody>
-          <a:bodyPr rtlCol="0" anchor="ctr"/>
-          <a:lstStyle/>
-          <a:p>
-            <a:pPr algn="ctr"/>
-          </a:p>
-        </p:txBody>
-      </p:sp>
-      <p:sp>
-        <p:nvSpPr>
-          <p:cNvPr id="10" name="TextBox 9"/>
+          <p:cNvPr id="19" name="TextBox 18"/>
           <p:cNvSpPr txBox="1"/>
           <p:nvPr/>
         </p:nvSpPr>
         <p:spPr>
           <a:xfrm>
-            <a:off x="438912" y="1517904"/>
-            <a:ext cx="365760" cy="347472"/>
+            <a:off x="4919472" y="1508760"/>
+            <a:ext cx="1828800" cy="548640"/>
           </a:xfrm>
           <a:prstGeom prst="rect">
             <a:avLst/>
@@ -5487,61 +5441,27 @@
           <a:lstStyle/>
           <a:p>
             <a:pPr algn="ctr"/>
-            <a:r>
-              <a:rPr sz="2000" b="1" i="0">
-                <a:solidFill>
-                  <a:srgbClr val="CB6B52"/>
-                </a:solidFill>
-              </a:rPr>
-              <a:t>1</a:t>
-            </a:r>
-          </a:p>
-        </p:txBody>
-      </p:sp>
-      <p:sp>
-        <p:nvSpPr>
-          <p:cNvPr id="11" name="TextBox 10"/>
-          <p:cNvSpPr txBox="1"/>
-          <p:nvPr/>
-        </p:nvSpPr>
-        <p:spPr>
-          <a:xfrm>
-            <a:off x="950976" y="1536192"/>
-            <a:ext cx="4846320" cy="347472"/>
-          </a:xfrm>
-          <a:prstGeom prst="rect">
-            <a:avLst/>
-          </a:prstGeom>
-          <a:noFill/>
-        </p:spPr>
-        <p:txBody>
-          <a:bodyPr wrap="square">
-            <a:spAutoFit/>
-          </a:bodyPr>
-          <a:lstStyle/>
-          <a:p>
-            <a:pPr algn="l"/>
             <a:r>
               <a:rPr sz="1400" b="1" i="0">
                 <a:solidFill>
                   <a:srgbClr val="CB6B52"/>
                 </a:solidFill>
               </a:rPr>
-              <a:t>Raw reads arrive</a:t>
-            </a:r>
-          </a:p>
-        </p:txBody>
-      </p:sp>
-      <p:sp>
-        <p:nvSpPr>
-          <p:cNvPr id="12" name="TextBox 11"/>
+              <a:t>Sequencing</a:t>
+            </a:r>
+          </a:p>
+        </p:txBody>
+      </p:sp>
+      <p:sp>
+        <p:nvSpPr>
+          <p:cNvPr id="20" name="TextBox 19"/>
           <p:cNvSpPr txBox="1"/>
           <p:nvPr/>
         </p:nvSpPr>
         <p:spPr>
           <a:xfrm>
-            <a:off x="950976" y="1993392"/>
-            <a:ext cx="4846320" cy="1664208"/>
+            <a:off x="4919472" y="2148840"/>
+            <a:ext cx="1828800" cy="1600200"/>
           </a:xfrm>
           <a:prstGeom prst="rect">
             <a:avLst/>
@@ -5554,44 +5474,78 @@
           </a:bodyPr>
           <a:lstStyle/>
           <a:p>
-            <a:pPr algn="l"/>
+            <a:pPr algn="ctr"/>
             <a:r>
               <a:rPr sz="1200" b="0" i="0">
                 <a:solidFill>
                   <a:srgbClr val="1E3A4A"/>
                 </a:solidFill>
               </a:rPr>
-              <a:t>Millions of short DNA sequences come off the sequencer.
-Each read has a quality score at every position — a measure
-of how confident the machine is in each base call.</a:t>
-            </a:r>
-          </a:p>
-        </p:txBody>
-      </p:sp>
-      <p:sp>
-        <p:nvSpPr>
-          <p:cNvPr id="13" name="Rectangle 12"/>
-          <p:cNvSpPr/>
-          <p:nvPr/>
-        </p:nvSpPr>
-        <p:spPr>
-          <a:xfrm>
-            <a:off x="6281928" y="1444752"/>
-            <a:ext cx="5577840" cy="2331720"/>
-          </a:xfrm>
-          <a:prstGeom prst="rect">
-            <a:avLst/>
-          </a:prstGeom>
-          <a:solidFill>
-            <a:srgbClr val="FFFFFF"/>
-          </a:solidFill>
+              <a:t>Read millions of
+DNA fragments</a:t>
+            </a:r>
+          </a:p>
+        </p:txBody>
+      </p:sp>
+      <p:cxnSp>
+        <p:nvCxnSpPr>
+          <p:cNvPr id="21" name="Connector 20"/>
+          <p:cNvCxnSpPr/>
+          <p:nvPr/>
+        </p:nvCxnSpPr>
+        <p:spPr>
+          <a:xfrm>
+            <a:off x="6821424" y="2651760"/>
+            <a:ext cx="201168" cy="0"/>
+          </a:xfrm>
+          <a:prstGeom prst="line">
+            <a:avLst/>
+          </a:prstGeom>
           <a:ln w="25400">
             <a:solidFill>
-              <a:srgbClr val="BBD6ED"/>
+              <a:srgbClr val="CB6B52"/>
             </a:solidFill>
           </a:ln>
         </p:spPr>
         <p:style>
+          <a:lnRef idx="2">
+            <a:schemeClr val="accent1"/>
+          </a:lnRef>
+          <a:fillRef idx="0">
+            <a:schemeClr val="accent1"/>
+          </a:fillRef>
+          <a:effectRef idx="1">
+            <a:schemeClr val="accent1"/>
+          </a:effectRef>
+          <a:fontRef idx="minor">
+            <a:schemeClr val="tx1"/>
+          </a:fontRef>
+        </p:style>
+      </p:cxnSp>
+      <p:sp>
+        <p:nvSpPr>
+          <p:cNvPr id="22" name="Rectangle 21"/>
+          <p:cNvSpPr/>
+          <p:nvPr/>
+        </p:nvSpPr>
+        <p:spPr>
+          <a:xfrm>
+            <a:off x="7022592" y="1463040"/>
+            <a:ext cx="2011680" cy="2377440"/>
+          </a:xfrm>
+          <a:prstGeom prst="rect">
+            <a:avLst/>
+          </a:prstGeom>
+          <a:solidFill>
+            <a:srgbClr val="FFFFFF"/>
+          </a:solidFill>
+          <a:ln w="25400">
+            <a:solidFill>
+              <a:srgbClr val="D5CFEE"/>
+            </a:solidFill>
+          </a:ln>
+        </p:spPr>
+        <p:style>
           <a:lnRef idx="1">
             <a:schemeClr val="accent1"/>
           </a:lnRef>
@@ -5615,20 +5569,20 @@
       </p:sp>
       <p:sp>
         <p:nvSpPr>
-          <p:cNvPr id="14" name="Rectangle 13"/>
+          <p:cNvPr id="23" name="Rectangle 22"/>
           <p:cNvSpPr/>
           <p:nvPr/>
         </p:nvSpPr>
         <p:spPr>
           <a:xfrm>
-            <a:off x="6281928" y="1444752"/>
-            <a:ext cx="457200" cy="2331720"/>
-          </a:xfrm>
-          <a:prstGeom prst="rect">
-            <a:avLst/>
-          </a:prstGeom>
-          <a:solidFill>
-            <a:srgbClr val="BBD6ED"/>
+            <a:off x="7022592" y="1463040"/>
+            <a:ext cx="2011680" cy="594360"/>
+          </a:xfrm>
+          <a:prstGeom prst="rect">
+            <a:avLst/>
+          </a:prstGeom>
+          <a:solidFill>
+            <a:srgbClr val="D5CFEE"/>
           </a:solidFill>
           <a:ln>
             <a:noFill/>
@@ -5658,57 +5612,14 @@
       </p:sp>
       <p:sp>
         <p:nvSpPr>
-          <p:cNvPr id="15" name="Rectangle 14"/>
-          <p:cNvSpPr/>
-          <p:nvPr/>
-        </p:nvSpPr>
-        <p:spPr>
-          <a:xfrm>
-            <a:off x="6281928" y="1444752"/>
-            <a:ext cx="5577840" cy="475488"/>
-          </a:xfrm>
-          <a:prstGeom prst="rect">
-            <a:avLst/>
-          </a:prstGeom>
-          <a:solidFill>
-            <a:srgbClr val="BBD6ED"/>
-          </a:solidFill>
-          <a:ln>
-            <a:noFill/>
-          </a:ln>
-        </p:spPr>
-        <p:style>
-          <a:lnRef idx="1">
-            <a:schemeClr val="accent1"/>
-          </a:lnRef>
-          <a:fillRef idx="3">
-            <a:schemeClr val="accent1"/>
-          </a:fillRef>
-          <a:effectRef idx="2">
-            <a:schemeClr val="accent1"/>
-          </a:effectRef>
-          <a:fontRef idx="minor">
-            <a:schemeClr val="lt1"/>
-          </a:fontRef>
-        </p:style>
-        <p:txBody>
-          <a:bodyPr rtlCol="0" anchor="ctr"/>
-          <a:lstStyle/>
-          <a:p>
-            <a:pPr algn="ctr"/>
-          </a:p>
-        </p:txBody>
-      </p:sp>
-      <p:sp>
-        <p:nvSpPr>
-          <p:cNvPr id="16" name="TextBox 15"/>
+          <p:cNvPr id="24" name="TextBox 23"/>
           <p:cNvSpPr txBox="1"/>
           <p:nvPr/>
         </p:nvSpPr>
         <p:spPr>
           <a:xfrm>
-            <a:off x="6336792" y="1517904"/>
-            <a:ext cx="365760" cy="347472"/>
+            <a:off x="7132320" y="1508760"/>
+            <a:ext cx="1828800" cy="548640"/>
           </a:xfrm>
           <a:prstGeom prst="rect">
             <a:avLst/>
@@ -5723,26 +5634,26 @@
           <a:p>
             <a:pPr algn="ctr"/>
             <a:r>
-              <a:rPr sz="2000" b="1" i="0">
+              <a:rPr sz="1400" b="1" i="0">
                 <a:solidFill>
-                  <a:srgbClr val="4A7FA5"/>
+                  <a:srgbClr val="7B6EAA"/>
                 </a:solidFill>
               </a:rPr>
-              <a:t>2</a:t>
-            </a:r>
-          </a:p>
-        </p:txBody>
-      </p:sp>
-      <p:sp>
-        <p:nvSpPr>
-          <p:cNvPr id="17" name="TextBox 16"/>
+              <a:t>Data processing</a:t>
+            </a:r>
+          </a:p>
+        </p:txBody>
+      </p:sp>
+      <p:sp>
+        <p:nvSpPr>
+          <p:cNvPr id="25" name="TextBox 24"/>
           <p:cNvSpPr txBox="1"/>
           <p:nvPr/>
         </p:nvSpPr>
         <p:spPr>
           <a:xfrm>
-            <a:off x="6848856" y="1536192"/>
-            <a:ext cx="4846320" cy="347472"/>
+            <a:off x="7132320" y="2148840"/>
+            <a:ext cx="1828800" cy="1600200"/>
           </a:xfrm>
           <a:prstGeom prst="rect">
             <a:avLst/>
@@ -5755,78 +5666,78 @@
           </a:bodyPr>
           <a:lstStyle/>
           <a:p>
-            <a:pPr algn="l"/>
-            <a:r>
-              <a:rPr sz="1400" b="1" i="0">
-                <a:solidFill>
-                  <a:srgbClr val="4A7FA5"/>
-                </a:solidFill>
-              </a:rPr>
-              <a:t>Quality inspection</a:t>
-            </a:r>
-          </a:p>
-        </p:txBody>
-      </p:sp>
-      <p:sp>
-        <p:nvSpPr>
-          <p:cNvPr id="18" name="TextBox 17"/>
-          <p:cNvSpPr txBox="1"/>
-          <p:nvPr/>
-        </p:nvSpPr>
-        <p:spPr>
-          <a:xfrm>
-            <a:off x="6848856" y="1993392"/>
-            <a:ext cx="4846320" cy="1664208"/>
-          </a:xfrm>
-          <a:prstGeom prst="rect">
-            <a:avLst/>
-          </a:prstGeom>
-          <a:noFill/>
-        </p:spPr>
-        <p:txBody>
-          <a:bodyPr wrap="square">
-            <a:spAutoFit/>
-          </a:bodyPr>
-          <a:lstStyle/>
-          <a:p>
-            <a:pPr algn="l"/>
+            <a:pPr algn="ctr"/>
             <a:r>
               <a:rPr sz="1200" b="0" i="0">
                 <a:solidFill>
                   <a:srgbClr val="1E3A4A"/>
                 </a:solidFill>
               </a:rPr>
-              <a:t>We inspect quality scores across all positions.
-Reads that fall below acceptable thresholds are discarded.
-This is the first filter that protects data integrity.</a:t>
-            </a:r>
-          </a:p>
-        </p:txBody>
-      </p:sp>
-      <p:sp>
-        <p:nvSpPr>
-          <p:cNvPr id="19" name="Rectangle 18"/>
-          <p:cNvSpPr/>
-          <p:nvPr/>
-        </p:nvSpPr>
-        <p:spPr>
-          <a:xfrm>
-            <a:off x="384048" y="3959352"/>
-            <a:ext cx="5577840" cy="2331720"/>
-          </a:xfrm>
-          <a:prstGeom prst="rect">
-            <a:avLst/>
-          </a:prstGeom>
-          <a:solidFill>
-            <a:srgbClr val="FFFFFF"/>
-          </a:solidFill>
+              <a:t>Clean, filter and
+identify sequences</a:t>
+            </a:r>
+          </a:p>
+        </p:txBody>
+      </p:sp>
+      <p:cxnSp>
+        <p:nvCxnSpPr>
+          <p:cNvPr id="26" name="Connector 25"/>
+          <p:cNvCxnSpPr/>
+          <p:nvPr/>
+        </p:nvCxnSpPr>
+        <p:spPr>
+          <a:xfrm>
+            <a:off x="9034272" y="2651760"/>
+            <a:ext cx="201168" cy="0"/>
+          </a:xfrm>
+          <a:prstGeom prst="line">
+            <a:avLst/>
+          </a:prstGeom>
           <a:ln w="25400">
             <a:solidFill>
-              <a:srgbClr val="B8DEDB"/>
+              <a:srgbClr val="7B6EAA"/>
             </a:solidFill>
           </a:ln>
         </p:spPr>
         <p:style>
+          <a:lnRef idx="2">
+            <a:schemeClr val="accent1"/>
+          </a:lnRef>
+          <a:fillRef idx="0">
+            <a:schemeClr val="accent1"/>
+          </a:fillRef>
+          <a:effectRef idx="1">
+            <a:schemeClr val="accent1"/>
+          </a:effectRef>
+          <a:fontRef idx="minor">
+            <a:schemeClr val="tx1"/>
+          </a:fontRef>
+        </p:style>
+      </p:cxnSp>
+      <p:sp>
+        <p:nvSpPr>
+          <p:cNvPr id="27" name="Rectangle 26"/>
+          <p:cNvSpPr/>
+          <p:nvPr/>
+        </p:nvSpPr>
+        <p:spPr>
+          <a:xfrm>
+            <a:off x="9235440" y="1463040"/>
+            <a:ext cx="2011680" cy="2377440"/>
+          </a:xfrm>
+          <a:prstGeom prst="rect">
+            <a:avLst/>
+          </a:prstGeom>
+          <a:solidFill>
+            <a:srgbClr val="FFFFFF"/>
+          </a:solidFill>
+          <a:ln w="25400">
+            <a:solidFill>
+              <a:srgbClr val="C3E6C8"/>
+            </a:solidFill>
+          </a:ln>
+        </p:spPr>
+        <p:style>
           <a:lnRef idx="1">
             <a:schemeClr val="accent1"/>
           </a:lnRef>
@@ -5850,20 +5761,20 @@
       </p:sp>
       <p:sp>
         <p:nvSpPr>
-          <p:cNvPr id="20" name="Rectangle 19"/>
+          <p:cNvPr id="28" name="Rectangle 27"/>
           <p:cNvSpPr/>
           <p:nvPr/>
         </p:nvSpPr>
         <p:spPr>
           <a:xfrm>
-            <a:off x="384048" y="3959352"/>
-            <a:ext cx="457200" cy="2331720"/>
-          </a:xfrm>
-          <a:prstGeom prst="rect">
-            <a:avLst/>
-          </a:prstGeom>
-          <a:solidFill>
-            <a:srgbClr val="B8DEDB"/>
+            <a:off x="9235440" y="1463040"/>
+            <a:ext cx="2011680" cy="594360"/>
+          </a:xfrm>
+          <a:prstGeom prst="rect">
+            <a:avLst/>
+          </a:prstGeom>
+          <a:solidFill>
+            <a:srgbClr val="C3E6C8"/>
           </a:solidFill>
           <a:ln>
             <a:noFill/>
@@ -5893,57 +5804,14 @@
       </p:sp>
       <p:sp>
         <p:nvSpPr>
-          <p:cNvPr id="21" name="Rectangle 20"/>
-          <p:cNvSpPr/>
-          <p:nvPr/>
-        </p:nvSpPr>
-        <p:spPr>
-          <a:xfrm>
-            <a:off x="384048" y="3959352"/>
-            <a:ext cx="5577840" cy="475488"/>
-          </a:xfrm>
-          <a:prstGeom prst="rect">
-            <a:avLst/>
-          </a:prstGeom>
-          <a:solidFill>
-            <a:srgbClr val="B8DEDB"/>
-          </a:solidFill>
-          <a:ln>
-            <a:noFill/>
-          </a:ln>
-        </p:spPr>
-        <p:style>
-          <a:lnRef idx="1">
-            <a:schemeClr val="accent1"/>
-          </a:lnRef>
-          <a:fillRef idx="3">
-            <a:schemeClr val="accent1"/>
-          </a:fillRef>
-          <a:effectRef idx="2">
-            <a:schemeClr val="accent1"/>
-          </a:effectRef>
-          <a:fontRef idx="minor">
-            <a:schemeClr val="lt1"/>
-          </a:fontRef>
-        </p:style>
-        <p:txBody>
-          <a:bodyPr rtlCol="0" anchor="ctr"/>
-          <a:lstStyle/>
-          <a:p>
-            <a:pPr algn="ctr"/>
-          </a:p>
-        </p:txBody>
-      </p:sp>
-      <p:sp>
-        <p:nvSpPr>
-          <p:cNvPr id="22" name="TextBox 21"/>
+          <p:cNvPr id="29" name="TextBox 28"/>
           <p:cNvSpPr txBox="1"/>
           <p:nvPr/>
         </p:nvSpPr>
         <p:spPr>
           <a:xfrm>
-            <a:off x="438912" y="4032504"/>
-            <a:ext cx="365760" cy="347472"/>
+            <a:off x="9345168" y="1508760"/>
+            <a:ext cx="1828800" cy="548640"/>
           </a:xfrm>
           <a:prstGeom prst="rect">
             <a:avLst/>
@@ -5958,26 +5826,26 @@
           <a:p>
             <a:pPr algn="ctr"/>
             <a:r>
-              <a:rPr sz="2000" b="1" i="0">
+              <a:rPr sz="1400" b="1" i="0">
                 <a:solidFill>
-                  <a:srgbClr val="3D908A"/>
+                  <a:srgbClr val="4F9A60"/>
                 </a:solidFill>
               </a:rPr>
-              <a:t>3</a:t>
-            </a:r>
-          </a:p>
-        </p:txBody>
-      </p:sp>
-      <p:sp>
-        <p:nvSpPr>
-          <p:cNvPr id="23" name="TextBox 22"/>
+              <a:t>Interpretation</a:t>
+            </a:r>
+          </a:p>
+        </p:txBody>
+      </p:sp>
+      <p:sp>
+        <p:nvSpPr>
+          <p:cNvPr id="30" name="TextBox 29"/>
           <p:cNvSpPr txBox="1"/>
           <p:nvPr/>
         </p:nvSpPr>
         <p:spPr>
           <a:xfrm>
-            <a:off x="950976" y="4050791"/>
-            <a:ext cx="4846320" cy="347472"/>
+            <a:off x="9345168" y="2148840"/>
+            <a:ext cx="1828800" cy="1600200"/>
           </a:xfrm>
           <a:prstGeom prst="rect">
             <a:avLst/>
@@ -5990,64 +5858,29 @@
           </a:bodyPr>
           <a:lstStyle/>
           <a:p>
-            <a:pPr algn="l"/>
-            <a:r>
-              <a:rPr sz="1400" b="1" i="0">
-                <a:solidFill>
-                  <a:srgbClr val="3D908A"/>
-                </a:solidFill>
-              </a:rPr>
-              <a:t>Primer removal</a:t>
-            </a:r>
-          </a:p>
-        </p:txBody>
-      </p:sp>
-      <p:sp>
-        <p:nvSpPr>
-          <p:cNvPr id="24" name="TextBox 23"/>
-          <p:cNvSpPr txBox="1"/>
-          <p:nvPr/>
-        </p:nvSpPr>
-        <p:spPr>
-          <a:xfrm>
-            <a:off x="950976" y="4507992"/>
-            <a:ext cx="4846320" cy="1664208"/>
-          </a:xfrm>
-          <a:prstGeom prst="rect">
-            <a:avLst/>
-          </a:prstGeom>
-          <a:noFill/>
-        </p:spPr>
-        <p:txBody>
-          <a:bodyPr wrap="square">
-            <a:spAutoFit/>
-          </a:bodyPr>
-          <a:lstStyle/>
-          <a:p>
-            <a:pPr algn="l"/>
+            <a:pPr algn="ctr"/>
             <a:r>
               <a:rPr sz="1200" b="0" i="0">
                 <a:solidFill>
                   <a:srgbClr val="1E3A4A"/>
                 </a:solidFill>
               </a:rPr>
-              <a:t>PCR primers are attached to every read — they are not
-biological signal. We strip them before any analysis
-so they don't distort the results.</a:t>
-            </a:r>
-          </a:p>
-        </p:txBody>
-      </p:sp>
-      <p:sp>
-        <p:nvSpPr>
-          <p:cNvPr id="25" name="Rectangle 24"/>
+              <a:t>Diversity, taxonomy
+and statistics</a:t>
+            </a:r>
+          </a:p>
+        </p:txBody>
+      </p:sp>
+      <p:sp>
+        <p:nvSpPr>
+          <p:cNvPr id="31" name="Rectangle 30"/>
           <p:cNvSpPr/>
           <p:nvPr/>
         </p:nvSpPr>
         <p:spPr>
           <a:xfrm>
-            <a:off x="6281928" y="3959352"/>
-            <a:ext cx="5577840" cy="2331720"/>
+            <a:off x="384048" y="4041648"/>
+            <a:ext cx="11411712" cy="2240280"/>
           </a:xfrm>
           <a:prstGeom prst="rect">
             <a:avLst/>
@@ -6055,9 +5888,9 @@
           <a:solidFill>
             <a:srgbClr val="FFFFFF"/>
           </a:solidFill>
-          <a:ln w="25400">
+          <a:ln w="19050">
             <a:solidFill>
-              <a:srgbClr val="C3E6C8"/>
+              <a:srgbClr val="B8DEDB"/>
             </a:solidFill>
           </a:ln>
         </p:spPr>
@@ -6085,20 +5918,20 @@
       </p:sp>
       <p:sp>
         <p:nvSpPr>
-          <p:cNvPr id="26" name="Rectangle 25"/>
+          <p:cNvPr id="32" name="Rectangle 31"/>
           <p:cNvSpPr/>
           <p:nvPr/>
         </p:nvSpPr>
         <p:spPr>
           <a:xfrm>
-            <a:off x="6281928" y="3959352"/>
-            <a:ext cx="457200" cy="2331720"/>
-          </a:xfrm>
-          <a:prstGeom prst="rect">
-            <a:avLst/>
-          </a:prstGeom>
-          <a:solidFill>
-            <a:srgbClr val="C3E6C8"/>
+            <a:off x="384048" y="4041648"/>
+            <a:ext cx="256032" cy="2240280"/>
+          </a:xfrm>
+          <a:prstGeom prst="rect">
+            <a:avLst/>
+          </a:prstGeom>
+          <a:solidFill>
+            <a:srgbClr val="3D908A"/>
           </a:solidFill>
           <a:ln>
             <a:noFill/>
@@ -6128,57 +5961,14 @@
       </p:sp>
       <p:sp>
         <p:nvSpPr>
-          <p:cNvPr id="27" name="Rectangle 26"/>
-          <p:cNvSpPr/>
-          <p:nvPr/>
-        </p:nvSpPr>
-        <p:spPr>
-          <a:xfrm>
-            <a:off x="6281928" y="3959352"/>
-            <a:ext cx="5577840" cy="475488"/>
-          </a:xfrm>
-          <a:prstGeom prst="rect">
-            <a:avLst/>
-          </a:prstGeom>
-          <a:solidFill>
-            <a:srgbClr val="C3E6C8"/>
-          </a:solidFill>
-          <a:ln>
-            <a:noFill/>
-          </a:ln>
-        </p:spPr>
-        <p:style>
-          <a:lnRef idx="1">
-            <a:schemeClr val="accent1"/>
-          </a:lnRef>
-          <a:fillRef idx="3">
-            <a:schemeClr val="accent1"/>
-          </a:fillRef>
-          <a:effectRef idx="2">
-            <a:schemeClr val="accent1"/>
-          </a:effectRef>
-          <a:fontRef idx="minor">
-            <a:schemeClr val="lt1"/>
-          </a:fontRef>
-        </p:style>
-        <p:txBody>
-          <a:bodyPr rtlCol="0" anchor="ctr"/>
-          <a:lstStyle/>
-          <a:p>
-            <a:pPr algn="ctr"/>
-          </a:p>
-        </p:txBody>
-      </p:sp>
-      <p:sp>
-        <p:nvSpPr>
-          <p:cNvPr id="28" name="TextBox 27"/>
+          <p:cNvPr id="33" name="TextBox 32"/>
           <p:cNvSpPr txBox="1"/>
           <p:nvPr/>
         </p:nvSpPr>
         <p:spPr>
           <a:xfrm>
-            <a:off x="6336792" y="4032504"/>
-            <a:ext cx="365760" cy="347472"/>
+            <a:off x="749808" y="4114800"/>
+            <a:ext cx="6400800" cy="384048"/>
           </a:xfrm>
           <a:prstGeom prst="rect">
             <a:avLst/>
@@ -6191,28 +5981,71 @@
           </a:bodyPr>
           <a:lstStyle/>
           <a:p>
-            <a:pPr algn="ctr"/>
-            <a:r>
-              <a:rPr sz="2000" b="1" i="0">
+            <a:pPr algn="l"/>
+            <a:r>
+              <a:rPr sz="1600" b="1" i="0">
                 <a:solidFill>
-                  <a:srgbClr val="4F9A60"/>
+                  <a:srgbClr val="3D908A"/>
                 </a:solidFill>
               </a:rPr>
-              <a:t>4</a:t>
-            </a:r>
-          </a:p>
-        </p:txBody>
-      </p:sp>
-      <p:sp>
-        <p:nvSpPr>
-          <p:cNvPr id="29" name="TextBox 28"/>
+              <a:t>Why the 16S rRNA gene?</a:t>
+            </a:r>
+          </a:p>
+        </p:txBody>
+      </p:sp>
+      <p:sp>
+        <p:nvSpPr>
+          <p:cNvPr id="34" name="Rectangle 33"/>
+          <p:cNvSpPr/>
+          <p:nvPr/>
+        </p:nvSpPr>
+        <p:spPr>
+          <a:xfrm>
+            <a:off x="749808" y="4590288"/>
+            <a:ext cx="3383280" cy="1508760"/>
+          </a:xfrm>
+          <a:prstGeom prst="rect">
+            <a:avLst/>
+          </a:prstGeom>
+          <a:solidFill>
+            <a:srgbClr val="B8DEDB"/>
+          </a:solidFill>
+          <a:ln>
+            <a:noFill/>
+          </a:ln>
+        </p:spPr>
+        <p:style>
+          <a:lnRef idx="1">
+            <a:schemeClr val="accent1"/>
+          </a:lnRef>
+          <a:fillRef idx="3">
+            <a:schemeClr val="accent1"/>
+          </a:fillRef>
+          <a:effectRef idx="2">
+            <a:schemeClr val="accent1"/>
+          </a:effectRef>
+          <a:fontRef idx="minor">
+            <a:schemeClr val="lt1"/>
+          </a:fontRef>
+        </p:style>
+        <p:txBody>
+          <a:bodyPr rtlCol="0" anchor="ctr"/>
+          <a:lstStyle/>
+          <a:p>
+            <a:pPr algn="ctr"/>
+          </a:p>
+        </p:txBody>
+      </p:sp>
+      <p:sp>
+        <p:nvSpPr>
+          <p:cNvPr id="35" name="TextBox 34"/>
           <p:cNvSpPr txBox="1"/>
           <p:nvPr/>
         </p:nvSpPr>
         <p:spPr>
           <a:xfrm>
-            <a:off x="6848856" y="4050791"/>
-            <a:ext cx="4846320" cy="347472"/>
+            <a:off x="859536" y="4645152"/>
+            <a:ext cx="3108960" cy="347472"/>
           </a:xfrm>
           <a:prstGeom prst="rect">
             <a:avLst/>
@@ -6227,26 +6060,26 @@
           <a:p>
             <a:pPr algn="l"/>
             <a:r>
-              <a:rPr sz="1400" b="1" i="0">
+              <a:rPr sz="1300" b="1" i="0">
                 <a:solidFill>
-                  <a:srgbClr val="4F9A60"/>
+                  <a:srgbClr val="3D908A"/>
                 </a:solidFill>
               </a:rPr>
-              <a:t>Error correction → ASVs</a:t>
-            </a:r>
-          </a:p>
-        </p:txBody>
-      </p:sp>
-      <p:sp>
-        <p:nvSpPr>
-          <p:cNvPr id="30" name="TextBox 29"/>
+              <a:t>Universal</a:t>
+            </a:r>
+          </a:p>
+        </p:txBody>
+      </p:sp>
+      <p:sp>
+        <p:nvSpPr>
+          <p:cNvPr id="36" name="TextBox 35"/>
           <p:cNvSpPr txBox="1"/>
           <p:nvPr/>
         </p:nvSpPr>
         <p:spPr>
           <a:xfrm>
-            <a:off x="6848856" y="4507992"/>
-            <a:ext cx="4846320" cy="1664208"/>
+            <a:off x="859536" y="5047488"/>
+            <a:ext cx="3108960" cy="960120"/>
           </a:xfrm>
           <a:prstGeom prst="rect">
             <a:avLst/>
@@ -6266,29 +6099,28 @@
                   <a:srgbClr val="1E3A4A"/>
                 </a:solidFill>
               </a:rPr>
-              <a:t>Sequencers make mistakes. We build a statistical model
-of errors from the data itself, then correct them.
-The result: exact, unique sequences called ASVs.</a:t>
-            </a:r>
-          </a:p>
-        </p:txBody>
-      </p:sp>
-      <p:sp>
-        <p:nvSpPr>
-          <p:cNvPr id="31" name="Rectangle 30"/>
+              <a:t>Found in every known
+bacterium and archaeon</a:t>
+            </a:r>
+          </a:p>
+        </p:txBody>
+      </p:sp>
+      <p:sp>
+        <p:nvSpPr>
+          <p:cNvPr id="37" name="Rectangle 36"/>
           <p:cNvSpPr/>
           <p:nvPr/>
         </p:nvSpPr>
         <p:spPr>
           <a:xfrm>
-            <a:off x="384048" y="6446520"/>
-            <a:ext cx="11411712" cy="347472"/>
-          </a:xfrm>
-          <a:prstGeom prst="rect">
-            <a:avLst/>
-          </a:prstGeom>
-          <a:solidFill>
-            <a:srgbClr val="F5C8BE"/>
+            <a:off x="4407408" y="4590288"/>
+            <a:ext cx="3383280" cy="1508760"/>
+          </a:xfrm>
+          <a:prstGeom prst="rect">
+            <a:avLst/>
+          </a:prstGeom>
+          <a:solidFill>
+            <a:srgbClr val="BBD6ED"/>
           </a:solidFill>
           <a:ln>
             <a:noFill/>
@@ -6318,14 +6150,14 @@
       </p:sp>
       <p:sp>
         <p:nvSpPr>
-          <p:cNvPr id="32" name="TextBox 31"/>
+          <p:cNvPr id="38" name="TextBox 37"/>
           <p:cNvSpPr txBox="1"/>
           <p:nvPr/>
         </p:nvSpPr>
         <p:spPr>
           <a:xfrm>
-            <a:off x="566928" y="6492240"/>
-            <a:ext cx="10972800" cy="256032"/>
+            <a:off x="4517136" y="4645152"/>
+            <a:ext cx="3108960" cy="347472"/>
           </a:xfrm>
           <a:prstGeom prst="rect">
             <a:avLst/>
@@ -6338,14 +6170,161 @@
           </a:bodyPr>
           <a:lstStyle/>
           <a:p>
-            <a:pPr algn="ctr"/>
-            <a:r>
-              <a:rPr sz="1100" b="0" i="1">
+            <a:pPr algn="l"/>
+            <a:r>
+              <a:rPr sz="1300" b="1" i="0">
                 <a:solidFill>
-                  <a:srgbClr val="CB6B52"/>
+                  <a:srgbClr val="4A7FA5"/>
                 </a:solidFill>
               </a:rPr>
-              <a:t>ASV  (Amplicon Sequence Variant)  —  an exact, unique biological sequence. More precise than the older OTU approach (97% clustering).</a:t>
+              <a:t>Discriminating</a:t>
+            </a:r>
+          </a:p>
+        </p:txBody>
+      </p:sp>
+      <p:sp>
+        <p:nvSpPr>
+          <p:cNvPr id="39" name="TextBox 38"/>
+          <p:cNvSpPr txBox="1"/>
+          <p:nvPr/>
+        </p:nvSpPr>
+        <p:spPr>
+          <a:xfrm>
+            <a:off x="4517136" y="5047488"/>
+            <a:ext cx="3108960" cy="960120"/>
+          </a:xfrm>
+          <a:prstGeom prst="rect">
+            <a:avLst/>
+          </a:prstGeom>
+          <a:noFill/>
+        </p:spPr>
+        <p:txBody>
+          <a:bodyPr wrap="square">
+            <a:spAutoFit/>
+          </a:bodyPr>
+          <a:lstStyle/>
+          <a:p>
+            <a:pPr algn="l"/>
+            <a:r>
+              <a:rPr sz="1200" b="0" i="0">
+                <a:solidFill>
+                  <a:srgbClr val="1E3A4A"/>
+                </a:solidFill>
+              </a:rPr>
+              <a:t>Variable regions allow us
+to tell species apart</a:t>
+            </a:r>
+          </a:p>
+        </p:txBody>
+      </p:sp>
+      <p:sp>
+        <p:nvSpPr>
+          <p:cNvPr id="40" name="Rectangle 39"/>
+          <p:cNvSpPr/>
+          <p:nvPr/>
+        </p:nvSpPr>
+        <p:spPr>
+          <a:xfrm>
+            <a:off x="8065008" y="4590288"/>
+            <a:ext cx="3383280" cy="1508760"/>
+          </a:xfrm>
+          <a:prstGeom prst="rect">
+            <a:avLst/>
+          </a:prstGeom>
+          <a:solidFill>
+            <a:srgbClr val="D5CFEE"/>
+          </a:solidFill>
+          <a:ln>
+            <a:noFill/>
+          </a:ln>
+        </p:spPr>
+        <p:style>
+          <a:lnRef idx="1">
+            <a:schemeClr val="accent1"/>
+          </a:lnRef>
+          <a:fillRef idx="3">
+            <a:schemeClr val="accent1"/>
+          </a:fillRef>
+          <a:effectRef idx="2">
+            <a:schemeClr val="accent1"/>
+          </a:effectRef>
+          <a:fontRef idx="minor">
+            <a:schemeClr val="lt1"/>
+          </a:fontRef>
+        </p:style>
+        <p:txBody>
+          <a:bodyPr rtlCol="0" anchor="ctr"/>
+          <a:lstStyle/>
+          <a:p>
+            <a:pPr algn="ctr"/>
+          </a:p>
+        </p:txBody>
+      </p:sp>
+      <p:sp>
+        <p:nvSpPr>
+          <p:cNvPr id="41" name="TextBox 40"/>
+          <p:cNvSpPr txBox="1"/>
+          <p:nvPr/>
+        </p:nvSpPr>
+        <p:spPr>
+          <a:xfrm>
+            <a:off x="8174736" y="4645152"/>
+            <a:ext cx="3108960" cy="347472"/>
+          </a:xfrm>
+          <a:prstGeom prst="rect">
+            <a:avLst/>
+          </a:prstGeom>
+          <a:noFill/>
+        </p:spPr>
+        <p:txBody>
+          <a:bodyPr wrap="square">
+            <a:spAutoFit/>
+          </a:bodyPr>
+          <a:lstStyle/>
+          <a:p>
+            <a:pPr algn="l"/>
+            <a:r>
+              <a:rPr sz="1300" b="1" i="0">
+                <a:solidFill>
+                  <a:srgbClr val="7B6EAA"/>
+                </a:solidFill>
+              </a:rPr>
+              <a:t>Practical</a:t>
+            </a:r>
+          </a:p>
+        </p:txBody>
+      </p:sp>
+      <p:sp>
+        <p:nvSpPr>
+          <p:cNvPr id="42" name="TextBox 41"/>
+          <p:cNvSpPr txBox="1"/>
+          <p:nvPr/>
+        </p:nvSpPr>
+        <p:spPr>
+          <a:xfrm>
+            <a:off x="8174736" y="5047488"/>
+            <a:ext cx="3108960" cy="960120"/>
+          </a:xfrm>
+          <a:prstGeom prst="rect">
+            <a:avLst/>
+          </a:prstGeom>
+          <a:noFill/>
+        </p:spPr>
+        <p:txBody>
+          <a:bodyPr wrap="square">
+            <a:spAutoFit/>
+          </a:bodyPr>
+          <a:lstStyle/>
+          <a:p>
+            <a:pPr algn="l"/>
+            <a:r>
+              <a:rPr sz="1200" b="0" i="0">
+                <a:solidFill>
+                  <a:srgbClr val="1E3A4A"/>
+                </a:solidFill>
+              </a:rPr>
+              <a:t>Well-established protocols
+and huge reference databases</a:t>
             </a:r>
           </a:p>
         </p:txBody>
@@ -6434,7 +6413,7 @@
             <a:avLst/>
           </a:prstGeom>
           <a:solidFill>
-            <a:srgbClr val="4A7FA5"/>
+            <a:srgbClr val="CB6B52"/>
           </a:solidFill>
           <a:ln>
             <a:noFill/>
@@ -6477,7 +6456,7 @@
             <a:avLst/>
           </a:prstGeom>
           <a:solidFill>
-            <a:srgbClr val="4A7FA5"/>
+            <a:srgbClr val="CB6B52"/>
           </a:solidFill>
           <a:ln>
             <a:noFill/>
@@ -6534,7 +6513,7 @@
                   <a:srgbClr val="1E3A4A"/>
                 </a:solidFill>
               </a:rPr>
-              <a:t>Measuring Diversity</a:t>
+              <a:t>From Raw Data to Trusted Sequences</a:t>
             </a:r>
           </a:p>
         </p:txBody>
@@ -6568,7 +6547,7 @@
                   <a:srgbClr val="6E8494"/>
                 </a:solidFill>
               </a:rPr>
-              <a:t>How rich is each sample? How different are the communities from each other?</a:t>
+              <a:t>Quality control, primer removal, and error correction</a:t>
             </a:r>
           </a:p>
         </p:txBody>
@@ -6582,7 +6561,242 @@
         <p:spPr>
           <a:xfrm>
             <a:off x="384048" y="1444752"/>
-            <a:ext cx="5440680" cy="3154680"/>
+            <a:ext cx="5577840" cy="2331720"/>
+          </a:xfrm>
+          <a:prstGeom prst="rect">
+            <a:avLst/>
+          </a:prstGeom>
+          <a:solidFill>
+            <a:srgbClr val="FFFFFF"/>
+          </a:solidFill>
+          <a:ln w="25400">
+            <a:solidFill>
+              <a:srgbClr val="F5C8BE"/>
+            </a:solidFill>
+          </a:ln>
+        </p:spPr>
+        <p:style>
+          <a:lnRef idx="1">
+            <a:schemeClr val="accent1"/>
+          </a:lnRef>
+          <a:fillRef idx="3">
+            <a:schemeClr val="accent1"/>
+          </a:fillRef>
+          <a:effectRef idx="2">
+            <a:schemeClr val="accent1"/>
+          </a:effectRef>
+          <a:fontRef idx="minor">
+            <a:schemeClr val="lt1"/>
+          </a:fontRef>
+        </p:style>
+        <p:txBody>
+          <a:bodyPr rtlCol="0" anchor="ctr"/>
+          <a:lstStyle/>
+          <a:p>
+            <a:pPr algn="ctr"/>
+          </a:p>
+        </p:txBody>
+      </p:sp>
+      <p:sp>
+        <p:nvSpPr>
+          <p:cNvPr id="8" name="Rectangle 7"/>
+          <p:cNvSpPr/>
+          <p:nvPr/>
+        </p:nvSpPr>
+        <p:spPr>
+          <a:xfrm>
+            <a:off x="384048" y="1444752"/>
+            <a:ext cx="457200" cy="2331720"/>
+          </a:xfrm>
+          <a:prstGeom prst="rect">
+            <a:avLst/>
+          </a:prstGeom>
+          <a:solidFill>
+            <a:srgbClr val="F5C8BE"/>
+          </a:solidFill>
+          <a:ln>
+            <a:noFill/>
+          </a:ln>
+        </p:spPr>
+        <p:style>
+          <a:lnRef idx="1">
+            <a:schemeClr val="accent1"/>
+          </a:lnRef>
+          <a:fillRef idx="3">
+            <a:schemeClr val="accent1"/>
+          </a:fillRef>
+          <a:effectRef idx="2">
+            <a:schemeClr val="accent1"/>
+          </a:effectRef>
+          <a:fontRef idx="minor">
+            <a:schemeClr val="lt1"/>
+          </a:fontRef>
+        </p:style>
+        <p:txBody>
+          <a:bodyPr rtlCol="0" anchor="ctr"/>
+          <a:lstStyle/>
+          <a:p>
+            <a:pPr algn="ctr"/>
+          </a:p>
+        </p:txBody>
+      </p:sp>
+      <p:sp>
+        <p:nvSpPr>
+          <p:cNvPr id="9" name="Rectangle 8"/>
+          <p:cNvSpPr/>
+          <p:nvPr/>
+        </p:nvSpPr>
+        <p:spPr>
+          <a:xfrm>
+            <a:off x="384048" y="1444752"/>
+            <a:ext cx="5577840" cy="475488"/>
+          </a:xfrm>
+          <a:prstGeom prst="rect">
+            <a:avLst/>
+          </a:prstGeom>
+          <a:solidFill>
+            <a:srgbClr val="F5C8BE"/>
+          </a:solidFill>
+          <a:ln>
+            <a:noFill/>
+          </a:ln>
+        </p:spPr>
+        <p:style>
+          <a:lnRef idx="1">
+            <a:schemeClr val="accent1"/>
+          </a:lnRef>
+          <a:fillRef idx="3">
+            <a:schemeClr val="accent1"/>
+          </a:fillRef>
+          <a:effectRef idx="2">
+            <a:schemeClr val="accent1"/>
+          </a:effectRef>
+          <a:fontRef idx="minor">
+            <a:schemeClr val="lt1"/>
+          </a:fontRef>
+        </p:style>
+        <p:txBody>
+          <a:bodyPr rtlCol="0" anchor="ctr"/>
+          <a:lstStyle/>
+          <a:p>
+            <a:pPr algn="ctr"/>
+          </a:p>
+        </p:txBody>
+      </p:sp>
+      <p:sp>
+        <p:nvSpPr>
+          <p:cNvPr id="10" name="TextBox 9"/>
+          <p:cNvSpPr txBox="1"/>
+          <p:nvPr/>
+        </p:nvSpPr>
+        <p:spPr>
+          <a:xfrm>
+            <a:off x="438912" y="1517904"/>
+            <a:ext cx="365760" cy="347472"/>
+          </a:xfrm>
+          <a:prstGeom prst="rect">
+            <a:avLst/>
+          </a:prstGeom>
+          <a:noFill/>
+        </p:spPr>
+        <p:txBody>
+          <a:bodyPr wrap="square">
+            <a:spAutoFit/>
+          </a:bodyPr>
+          <a:lstStyle/>
+          <a:p>
+            <a:pPr algn="ctr"/>
+            <a:r>
+              <a:rPr sz="2000" b="1" i="0">
+                <a:solidFill>
+                  <a:srgbClr val="CB6B52"/>
+                </a:solidFill>
+              </a:rPr>
+              <a:t>1</a:t>
+            </a:r>
+          </a:p>
+        </p:txBody>
+      </p:sp>
+      <p:sp>
+        <p:nvSpPr>
+          <p:cNvPr id="11" name="TextBox 10"/>
+          <p:cNvSpPr txBox="1"/>
+          <p:nvPr/>
+        </p:nvSpPr>
+        <p:spPr>
+          <a:xfrm>
+            <a:off x="950976" y="1536192"/>
+            <a:ext cx="4846320" cy="347472"/>
+          </a:xfrm>
+          <a:prstGeom prst="rect">
+            <a:avLst/>
+          </a:prstGeom>
+          <a:noFill/>
+        </p:spPr>
+        <p:txBody>
+          <a:bodyPr wrap="square">
+            <a:spAutoFit/>
+          </a:bodyPr>
+          <a:lstStyle/>
+          <a:p>
+            <a:pPr algn="l"/>
+            <a:r>
+              <a:rPr sz="1400" b="1" i="0">
+                <a:solidFill>
+                  <a:srgbClr val="CB6B52"/>
+                </a:solidFill>
+              </a:rPr>
+              <a:t>Raw reads arrive</a:t>
+            </a:r>
+          </a:p>
+        </p:txBody>
+      </p:sp>
+      <p:sp>
+        <p:nvSpPr>
+          <p:cNvPr id="12" name="TextBox 11"/>
+          <p:cNvSpPr txBox="1"/>
+          <p:nvPr/>
+        </p:nvSpPr>
+        <p:spPr>
+          <a:xfrm>
+            <a:off x="950976" y="1993392"/>
+            <a:ext cx="4846320" cy="1664208"/>
+          </a:xfrm>
+          <a:prstGeom prst="rect">
+            <a:avLst/>
+          </a:prstGeom>
+          <a:noFill/>
+        </p:spPr>
+        <p:txBody>
+          <a:bodyPr wrap="square">
+            <a:spAutoFit/>
+          </a:bodyPr>
+          <a:lstStyle/>
+          <a:p>
+            <a:pPr algn="l"/>
+            <a:r>
+              <a:rPr sz="1200" b="0" i="0">
+                <a:solidFill>
+                  <a:srgbClr val="1E3A4A"/>
+                </a:solidFill>
+              </a:rPr>
+              <a:t>Millions of short DNA sequences come off the sequencer.
+Each read has a quality score at every position — a measure
+of how confident the machine is in each base call.</a:t>
+            </a:r>
+          </a:p>
+        </p:txBody>
+      </p:sp>
+      <p:sp>
+        <p:nvSpPr>
+          <p:cNvPr id="13" name="Rectangle 12"/>
+          <p:cNvSpPr/>
+          <p:nvPr/>
+        </p:nvSpPr>
+        <p:spPr>
+          <a:xfrm>
+            <a:off x="6281928" y="1444752"/>
+            <a:ext cx="5577840" cy="2331720"/>
           </a:xfrm>
           <a:prstGeom prst="rect">
             <a:avLst/>
@@ -6620,14 +6834,14 @@
       </p:sp>
       <p:sp>
         <p:nvSpPr>
-          <p:cNvPr id="8" name="Rectangle 7"/>
+          <p:cNvPr id="14" name="Rectangle 13"/>
           <p:cNvSpPr/>
           <p:nvPr/>
         </p:nvSpPr>
         <p:spPr>
           <a:xfrm>
-            <a:off x="384048" y="1444752"/>
-            <a:ext cx="5440680" cy="530352"/>
+            <a:off x="6281928" y="1444752"/>
+            <a:ext cx="457200" cy="2331720"/>
           </a:xfrm>
           <a:prstGeom prst="rect">
             <a:avLst/>
@@ -6663,14 +6877,57 @@
       </p:sp>
       <p:sp>
         <p:nvSpPr>
-          <p:cNvPr id="9" name="TextBox 8"/>
+          <p:cNvPr id="15" name="Rectangle 14"/>
+          <p:cNvSpPr/>
+          <p:nvPr/>
+        </p:nvSpPr>
+        <p:spPr>
+          <a:xfrm>
+            <a:off x="6281928" y="1444752"/>
+            <a:ext cx="5577840" cy="475488"/>
+          </a:xfrm>
+          <a:prstGeom prst="rect">
+            <a:avLst/>
+          </a:prstGeom>
+          <a:solidFill>
+            <a:srgbClr val="BBD6ED"/>
+          </a:solidFill>
+          <a:ln>
+            <a:noFill/>
+          </a:ln>
+        </p:spPr>
+        <p:style>
+          <a:lnRef idx="1">
+            <a:schemeClr val="accent1"/>
+          </a:lnRef>
+          <a:fillRef idx="3">
+            <a:schemeClr val="accent1"/>
+          </a:fillRef>
+          <a:effectRef idx="2">
+            <a:schemeClr val="accent1"/>
+          </a:effectRef>
+          <a:fontRef idx="minor">
+            <a:schemeClr val="lt1"/>
+          </a:fontRef>
+        </p:style>
+        <p:txBody>
+          <a:bodyPr rtlCol="0" anchor="ctr"/>
+          <a:lstStyle/>
+          <a:p>
+            <a:pPr algn="ctr"/>
+          </a:p>
+        </p:txBody>
+      </p:sp>
+      <p:sp>
+        <p:nvSpPr>
+          <p:cNvPr id="16" name="TextBox 15"/>
           <p:cNvSpPr txBox="1"/>
           <p:nvPr/>
         </p:nvSpPr>
         <p:spPr>
           <a:xfrm>
-            <a:off x="566928" y="1499616"/>
-            <a:ext cx="5029200" cy="384048"/>
+            <a:off x="6336792" y="1517904"/>
+            <a:ext cx="365760" cy="347472"/>
           </a:xfrm>
           <a:prstGeom prst="rect">
             <a:avLst/>
@@ -6683,28 +6940,28 @@
           </a:bodyPr>
           <a:lstStyle/>
           <a:p>
-            <a:pPr algn="l"/>
-            <a:r>
-              <a:rPr sz="1600" b="1" i="0">
+            <a:pPr algn="ctr"/>
+            <a:r>
+              <a:rPr sz="2000" b="1" i="0">
                 <a:solidFill>
                   <a:srgbClr val="4A7FA5"/>
                 </a:solidFill>
               </a:rPr>
-              <a:t>Alpha diversity  ·  Within a sample</a:t>
-            </a:r>
-          </a:p>
-        </p:txBody>
-      </p:sp>
-      <p:sp>
-        <p:nvSpPr>
-          <p:cNvPr id="10" name="TextBox 9"/>
+              <a:t>2</a:t>
+            </a:r>
+          </a:p>
+        </p:txBody>
+      </p:sp>
+      <p:sp>
+        <p:nvSpPr>
+          <p:cNvPr id="17" name="TextBox 16"/>
           <p:cNvSpPr txBox="1"/>
           <p:nvPr/>
         </p:nvSpPr>
         <p:spPr>
           <a:xfrm>
-            <a:off x="566928" y="2084831"/>
-            <a:ext cx="5074920" cy="2395728"/>
+            <a:off x="6848856" y="1536192"/>
+            <a:ext cx="4846320" cy="347472"/>
           </a:xfrm>
           <a:prstGeom prst="rect">
             <a:avLst/>
@@ -6719,32 +6976,62 @@
           <a:p>
             <a:pPr algn="l"/>
             <a:r>
-              <a:rPr sz="1300" b="0" i="0">
+              <a:rPr sz="1400" b="1" i="0">
+                <a:solidFill>
+                  <a:srgbClr val="4A7FA5"/>
+                </a:solidFill>
+              </a:rPr>
+              <a:t>Quality inspection</a:t>
+            </a:r>
+          </a:p>
+        </p:txBody>
+      </p:sp>
+      <p:sp>
+        <p:nvSpPr>
+          <p:cNvPr id="18" name="TextBox 17"/>
+          <p:cNvSpPr txBox="1"/>
+          <p:nvPr/>
+        </p:nvSpPr>
+        <p:spPr>
+          <a:xfrm>
+            <a:off x="6848856" y="1993392"/>
+            <a:ext cx="4846320" cy="1664208"/>
+          </a:xfrm>
+          <a:prstGeom prst="rect">
+            <a:avLst/>
+          </a:prstGeom>
+          <a:noFill/>
+        </p:spPr>
+        <p:txBody>
+          <a:bodyPr wrap="square">
+            <a:spAutoFit/>
+          </a:bodyPr>
+          <a:lstStyle/>
+          <a:p>
+            <a:pPr algn="l"/>
+            <a:r>
+              <a:rPr sz="1200" b="0" i="0">
                 <a:solidFill>
                   <a:srgbClr val="1E3A4A"/>
                 </a:solidFill>
               </a:rPr>
-              <a:t>How many different microbes are present in ONE sample?
-We measure:
-·  Richness — how many distinct types exist
-·  Evenness — are they equally abundant, or does
-   one type dominate?
-·  Phylogenetic diversity — how evolutionarily
-   spread out are they?</a:t>
-            </a:r>
-          </a:p>
-        </p:txBody>
-      </p:sp>
-      <p:sp>
-        <p:nvSpPr>
-          <p:cNvPr id="11" name="Rectangle 10"/>
+              <a:t>We inspect quality scores across all positions.
+Reads that fall below acceptable thresholds are discarded.
+This is the first filter that protects data integrity.</a:t>
+            </a:r>
+          </a:p>
+        </p:txBody>
+      </p:sp>
+      <p:sp>
+        <p:nvSpPr>
+          <p:cNvPr id="19" name="Rectangle 18"/>
           <p:cNvSpPr/>
           <p:nvPr/>
         </p:nvSpPr>
         <p:spPr>
           <a:xfrm>
-            <a:off x="6007608" y="1444752"/>
-            <a:ext cx="5788152" cy="3154680"/>
+            <a:off x="384048" y="3959352"/>
+            <a:ext cx="5577840" cy="2331720"/>
           </a:xfrm>
           <a:prstGeom prst="rect">
             <a:avLst/>
@@ -6754,7 +7041,7 @@
           </a:solidFill>
           <a:ln w="25400">
             <a:solidFill>
-              <a:srgbClr val="F5C8BE"/>
+              <a:srgbClr val="B8DEDB"/>
             </a:solidFill>
           </a:ln>
         </p:spPr>
@@ -6782,20 +7069,20 @@
       </p:sp>
       <p:sp>
         <p:nvSpPr>
-          <p:cNvPr id="12" name="Rectangle 11"/>
+          <p:cNvPr id="20" name="Rectangle 19"/>
           <p:cNvSpPr/>
           <p:nvPr/>
         </p:nvSpPr>
         <p:spPr>
           <a:xfrm>
-            <a:off x="6007608" y="1444752"/>
-            <a:ext cx="5788152" cy="530352"/>
-          </a:xfrm>
-          <a:prstGeom prst="rect">
-            <a:avLst/>
-          </a:prstGeom>
-          <a:solidFill>
-            <a:srgbClr val="F5C8BE"/>
+            <a:off x="384048" y="3959352"/>
+            <a:ext cx="457200" cy="2331720"/>
+          </a:xfrm>
+          <a:prstGeom prst="rect">
+            <a:avLst/>
+          </a:prstGeom>
+          <a:solidFill>
+            <a:srgbClr val="B8DEDB"/>
           </a:solidFill>
           <a:ln>
             <a:noFill/>
@@ -6825,14 +7112,57 @@
       </p:sp>
       <p:sp>
         <p:nvSpPr>
-          <p:cNvPr id="13" name="TextBox 12"/>
+          <p:cNvPr id="21" name="Rectangle 20"/>
+          <p:cNvSpPr/>
+          <p:nvPr/>
+        </p:nvSpPr>
+        <p:spPr>
+          <a:xfrm>
+            <a:off x="384048" y="3959352"/>
+            <a:ext cx="5577840" cy="475488"/>
+          </a:xfrm>
+          <a:prstGeom prst="rect">
+            <a:avLst/>
+          </a:prstGeom>
+          <a:solidFill>
+            <a:srgbClr val="B8DEDB"/>
+          </a:solidFill>
+          <a:ln>
+            <a:noFill/>
+          </a:ln>
+        </p:spPr>
+        <p:style>
+          <a:lnRef idx="1">
+            <a:schemeClr val="accent1"/>
+          </a:lnRef>
+          <a:fillRef idx="3">
+            <a:schemeClr val="accent1"/>
+          </a:fillRef>
+          <a:effectRef idx="2">
+            <a:schemeClr val="accent1"/>
+          </a:effectRef>
+          <a:fontRef idx="minor">
+            <a:schemeClr val="lt1"/>
+          </a:fontRef>
+        </p:style>
+        <p:txBody>
+          <a:bodyPr rtlCol="0" anchor="ctr"/>
+          <a:lstStyle/>
+          <a:p>
+            <a:pPr algn="ctr"/>
+          </a:p>
+        </p:txBody>
+      </p:sp>
+      <p:sp>
+        <p:nvSpPr>
+          <p:cNvPr id="22" name="TextBox 21"/>
           <p:cNvSpPr txBox="1"/>
           <p:nvPr/>
         </p:nvSpPr>
         <p:spPr>
           <a:xfrm>
-            <a:off x="6190488" y="1499616"/>
-            <a:ext cx="5394960" cy="384048"/>
+            <a:off x="438912" y="4032504"/>
+            <a:ext cx="365760" cy="347472"/>
           </a:xfrm>
           <a:prstGeom prst="rect">
             <a:avLst/>
@@ -6845,580 +7175,396 @@
           </a:bodyPr>
           <a:lstStyle/>
           <a:p>
+            <a:pPr algn="ctr"/>
+            <a:r>
+              <a:rPr sz="2000" b="1" i="0">
+                <a:solidFill>
+                  <a:srgbClr val="3D908A"/>
+                </a:solidFill>
+              </a:rPr>
+              <a:t>3</a:t>
+            </a:r>
+          </a:p>
+        </p:txBody>
+      </p:sp>
+      <p:sp>
+        <p:nvSpPr>
+          <p:cNvPr id="23" name="TextBox 22"/>
+          <p:cNvSpPr txBox="1"/>
+          <p:nvPr/>
+        </p:nvSpPr>
+        <p:spPr>
+          <a:xfrm>
+            <a:off x="950976" y="4050791"/>
+            <a:ext cx="4846320" cy="347472"/>
+          </a:xfrm>
+          <a:prstGeom prst="rect">
+            <a:avLst/>
+          </a:prstGeom>
+          <a:noFill/>
+        </p:spPr>
+        <p:txBody>
+          <a:bodyPr wrap="square">
+            <a:spAutoFit/>
+          </a:bodyPr>
+          <a:lstStyle/>
+          <a:p>
             <a:pPr algn="l"/>
             <a:r>
-              <a:rPr sz="1600" b="1" i="0">
+              <a:rPr sz="1400" b="1" i="0">
+                <a:solidFill>
+                  <a:srgbClr val="3D908A"/>
+                </a:solidFill>
+              </a:rPr>
+              <a:t>Primer removal</a:t>
+            </a:r>
+          </a:p>
+        </p:txBody>
+      </p:sp>
+      <p:sp>
+        <p:nvSpPr>
+          <p:cNvPr id="24" name="TextBox 23"/>
+          <p:cNvSpPr txBox="1"/>
+          <p:nvPr/>
+        </p:nvSpPr>
+        <p:spPr>
+          <a:xfrm>
+            <a:off x="950976" y="4507992"/>
+            <a:ext cx="4846320" cy="1664208"/>
+          </a:xfrm>
+          <a:prstGeom prst="rect">
+            <a:avLst/>
+          </a:prstGeom>
+          <a:noFill/>
+        </p:spPr>
+        <p:txBody>
+          <a:bodyPr wrap="square">
+            <a:spAutoFit/>
+          </a:bodyPr>
+          <a:lstStyle/>
+          <a:p>
+            <a:pPr algn="l"/>
+            <a:r>
+              <a:rPr sz="1200" b="0" i="0">
+                <a:solidFill>
+                  <a:srgbClr val="1E3A4A"/>
+                </a:solidFill>
+              </a:rPr>
+              <a:t>PCR primers are attached to every read — they are not
+biological signal. We strip them before any analysis
+so they don't distort the results.</a:t>
+            </a:r>
+          </a:p>
+        </p:txBody>
+      </p:sp>
+      <p:sp>
+        <p:nvSpPr>
+          <p:cNvPr id="25" name="Rectangle 24"/>
+          <p:cNvSpPr/>
+          <p:nvPr/>
+        </p:nvSpPr>
+        <p:spPr>
+          <a:xfrm>
+            <a:off x="6281928" y="3959352"/>
+            <a:ext cx="5577840" cy="2331720"/>
+          </a:xfrm>
+          <a:prstGeom prst="rect">
+            <a:avLst/>
+          </a:prstGeom>
+          <a:solidFill>
+            <a:srgbClr val="FFFFFF"/>
+          </a:solidFill>
+          <a:ln w="25400">
+            <a:solidFill>
+              <a:srgbClr val="C3E6C8"/>
+            </a:solidFill>
+          </a:ln>
+        </p:spPr>
+        <p:style>
+          <a:lnRef idx="1">
+            <a:schemeClr val="accent1"/>
+          </a:lnRef>
+          <a:fillRef idx="3">
+            <a:schemeClr val="accent1"/>
+          </a:fillRef>
+          <a:effectRef idx="2">
+            <a:schemeClr val="accent1"/>
+          </a:effectRef>
+          <a:fontRef idx="minor">
+            <a:schemeClr val="lt1"/>
+          </a:fontRef>
+        </p:style>
+        <p:txBody>
+          <a:bodyPr rtlCol="0" anchor="ctr"/>
+          <a:lstStyle/>
+          <a:p>
+            <a:pPr algn="ctr"/>
+          </a:p>
+        </p:txBody>
+      </p:sp>
+      <p:sp>
+        <p:nvSpPr>
+          <p:cNvPr id="26" name="Rectangle 25"/>
+          <p:cNvSpPr/>
+          <p:nvPr/>
+        </p:nvSpPr>
+        <p:spPr>
+          <a:xfrm>
+            <a:off x="6281928" y="3959352"/>
+            <a:ext cx="457200" cy="2331720"/>
+          </a:xfrm>
+          <a:prstGeom prst="rect">
+            <a:avLst/>
+          </a:prstGeom>
+          <a:solidFill>
+            <a:srgbClr val="C3E6C8"/>
+          </a:solidFill>
+          <a:ln>
+            <a:noFill/>
+          </a:ln>
+        </p:spPr>
+        <p:style>
+          <a:lnRef idx="1">
+            <a:schemeClr val="accent1"/>
+          </a:lnRef>
+          <a:fillRef idx="3">
+            <a:schemeClr val="accent1"/>
+          </a:fillRef>
+          <a:effectRef idx="2">
+            <a:schemeClr val="accent1"/>
+          </a:effectRef>
+          <a:fontRef idx="minor">
+            <a:schemeClr val="lt1"/>
+          </a:fontRef>
+        </p:style>
+        <p:txBody>
+          <a:bodyPr rtlCol="0" anchor="ctr"/>
+          <a:lstStyle/>
+          <a:p>
+            <a:pPr algn="ctr"/>
+          </a:p>
+        </p:txBody>
+      </p:sp>
+      <p:sp>
+        <p:nvSpPr>
+          <p:cNvPr id="27" name="Rectangle 26"/>
+          <p:cNvSpPr/>
+          <p:nvPr/>
+        </p:nvSpPr>
+        <p:spPr>
+          <a:xfrm>
+            <a:off x="6281928" y="3959352"/>
+            <a:ext cx="5577840" cy="475488"/>
+          </a:xfrm>
+          <a:prstGeom prst="rect">
+            <a:avLst/>
+          </a:prstGeom>
+          <a:solidFill>
+            <a:srgbClr val="C3E6C8"/>
+          </a:solidFill>
+          <a:ln>
+            <a:noFill/>
+          </a:ln>
+        </p:spPr>
+        <p:style>
+          <a:lnRef idx="1">
+            <a:schemeClr val="accent1"/>
+          </a:lnRef>
+          <a:fillRef idx="3">
+            <a:schemeClr val="accent1"/>
+          </a:fillRef>
+          <a:effectRef idx="2">
+            <a:schemeClr val="accent1"/>
+          </a:effectRef>
+          <a:fontRef idx="minor">
+            <a:schemeClr val="lt1"/>
+          </a:fontRef>
+        </p:style>
+        <p:txBody>
+          <a:bodyPr rtlCol="0" anchor="ctr"/>
+          <a:lstStyle/>
+          <a:p>
+            <a:pPr algn="ctr"/>
+          </a:p>
+        </p:txBody>
+      </p:sp>
+      <p:sp>
+        <p:nvSpPr>
+          <p:cNvPr id="28" name="TextBox 27"/>
+          <p:cNvSpPr txBox="1"/>
+          <p:nvPr/>
+        </p:nvSpPr>
+        <p:spPr>
+          <a:xfrm>
+            <a:off x="6336792" y="4032504"/>
+            <a:ext cx="365760" cy="347472"/>
+          </a:xfrm>
+          <a:prstGeom prst="rect">
+            <a:avLst/>
+          </a:prstGeom>
+          <a:noFill/>
+        </p:spPr>
+        <p:txBody>
+          <a:bodyPr wrap="square">
+            <a:spAutoFit/>
+          </a:bodyPr>
+          <a:lstStyle/>
+          <a:p>
+            <a:pPr algn="ctr"/>
+            <a:r>
+              <a:rPr sz="2000" b="1" i="0">
+                <a:solidFill>
+                  <a:srgbClr val="4F9A60"/>
+                </a:solidFill>
+              </a:rPr>
+              <a:t>4</a:t>
+            </a:r>
+          </a:p>
+        </p:txBody>
+      </p:sp>
+      <p:sp>
+        <p:nvSpPr>
+          <p:cNvPr id="29" name="TextBox 28"/>
+          <p:cNvSpPr txBox="1"/>
+          <p:nvPr/>
+        </p:nvSpPr>
+        <p:spPr>
+          <a:xfrm>
+            <a:off x="6848856" y="4050791"/>
+            <a:ext cx="4846320" cy="347472"/>
+          </a:xfrm>
+          <a:prstGeom prst="rect">
+            <a:avLst/>
+          </a:prstGeom>
+          <a:noFill/>
+        </p:spPr>
+        <p:txBody>
+          <a:bodyPr wrap="square">
+            <a:spAutoFit/>
+          </a:bodyPr>
+          <a:lstStyle/>
+          <a:p>
+            <a:pPr algn="l"/>
+            <a:r>
+              <a:rPr sz="1400" b="1" i="0">
+                <a:solidFill>
+                  <a:srgbClr val="4F9A60"/>
+                </a:solidFill>
+              </a:rPr>
+              <a:t>Error correction → ASVs</a:t>
+            </a:r>
+          </a:p>
+        </p:txBody>
+      </p:sp>
+      <p:sp>
+        <p:nvSpPr>
+          <p:cNvPr id="30" name="TextBox 29"/>
+          <p:cNvSpPr txBox="1"/>
+          <p:nvPr/>
+        </p:nvSpPr>
+        <p:spPr>
+          <a:xfrm>
+            <a:off x="6848856" y="4507992"/>
+            <a:ext cx="4846320" cy="1664208"/>
+          </a:xfrm>
+          <a:prstGeom prst="rect">
+            <a:avLst/>
+          </a:prstGeom>
+          <a:noFill/>
+        </p:spPr>
+        <p:txBody>
+          <a:bodyPr wrap="square">
+            <a:spAutoFit/>
+          </a:bodyPr>
+          <a:lstStyle/>
+          <a:p>
+            <a:pPr algn="l"/>
+            <a:r>
+              <a:rPr sz="1200" b="0" i="0">
+                <a:solidFill>
+                  <a:srgbClr val="1E3A4A"/>
+                </a:solidFill>
+              </a:rPr>
+              <a:t>Sequencers make mistakes. We build a statistical model
+of errors from the data itself, then correct them.
+The result: exact, unique sequences called ASVs.</a:t>
+            </a:r>
+          </a:p>
+        </p:txBody>
+      </p:sp>
+      <p:sp>
+        <p:nvSpPr>
+          <p:cNvPr id="31" name="Rectangle 30"/>
+          <p:cNvSpPr/>
+          <p:nvPr/>
+        </p:nvSpPr>
+        <p:spPr>
+          <a:xfrm>
+            <a:off x="384048" y="6446520"/>
+            <a:ext cx="11411712" cy="347472"/>
+          </a:xfrm>
+          <a:prstGeom prst="rect">
+            <a:avLst/>
+          </a:prstGeom>
+          <a:solidFill>
+            <a:srgbClr val="F5C8BE"/>
+          </a:solidFill>
+          <a:ln>
+            <a:noFill/>
+          </a:ln>
+        </p:spPr>
+        <p:style>
+          <a:lnRef idx="1">
+            <a:schemeClr val="accent1"/>
+          </a:lnRef>
+          <a:fillRef idx="3">
+            <a:schemeClr val="accent1"/>
+          </a:fillRef>
+          <a:effectRef idx="2">
+            <a:schemeClr val="accent1"/>
+          </a:effectRef>
+          <a:fontRef idx="minor">
+            <a:schemeClr val="lt1"/>
+          </a:fontRef>
+        </p:style>
+        <p:txBody>
+          <a:bodyPr rtlCol="0" anchor="ctr"/>
+          <a:lstStyle/>
+          <a:p>
+            <a:pPr algn="ctr"/>
+          </a:p>
+        </p:txBody>
+      </p:sp>
+      <p:sp>
+        <p:nvSpPr>
+          <p:cNvPr id="32" name="TextBox 31"/>
+          <p:cNvSpPr txBox="1"/>
+          <p:nvPr/>
+        </p:nvSpPr>
+        <p:spPr>
+          <a:xfrm>
+            <a:off x="566928" y="6492240"/>
+            <a:ext cx="10972800" cy="256032"/>
+          </a:xfrm>
+          <a:prstGeom prst="rect">
+            <a:avLst/>
+          </a:prstGeom>
+          <a:noFill/>
+        </p:spPr>
+        <p:txBody>
+          <a:bodyPr wrap="square">
+            <a:spAutoFit/>
+          </a:bodyPr>
+          <a:lstStyle/>
+          <a:p>
+            <a:pPr algn="ctr"/>
+            <a:r>
+              <a:rPr sz="1100" b="0" i="1">
                 <a:solidFill>
                   <a:srgbClr val="CB6B52"/>
                 </a:solidFill>
               </a:rPr>
-              <a:t>Beta diversity  ·  Between samples</a:t>
-            </a:r>
-          </a:p>
-        </p:txBody>
-      </p:sp>
-      <p:sp>
-        <p:nvSpPr>
-          <p:cNvPr id="14" name="TextBox 13"/>
-          <p:cNvSpPr txBox="1"/>
-          <p:nvPr/>
-        </p:nvSpPr>
-        <p:spPr>
-          <a:xfrm>
-            <a:off x="6190488" y="2084831"/>
-            <a:ext cx="5394960" cy="2395728"/>
-          </a:xfrm>
-          <a:prstGeom prst="rect">
-            <a:avLst/>
-          </a:prstGeom>
-          <a:noFill/>
-        </p:spPr>
-        <p:txBody>
-          <a:bodyPr wrap="square">
-            <a:spAutoFit/>
-          </a:bodyPr>
-          <a:lstStyle/>
-          <a:p>
-            <a:pPr algn="l"/>
-            <a:r>
-              <a:rPr sz="1300" b="0" i="0">
-                <a:solidFill>
-                  <a:srgbClr val="1E3A4A"/>
-                </a:solidFill>
-              </a:rPr>
-              <a:t>How similar or different are two communities?
-We compare all pairs of samples and project
-them into a 2D plot (PCoA).
-·  Samples close together share a similar
-   microbial composition.
-·  Samples far apart have distinct communities.
-·  Groups that cluster = shared structure.</a:t>
-            </a:r>
-          </a:p>
-        </p:txBody>
-      </p:sp>
-      <p:sp>
-        <p:nvSpPr>
-          <p:cNvPr id="15" name="Rectangle 14"/>
-          <p:cNvSpPr/>
-          <p:nvPr/>
-        </p:nvSpPr>
-        <p:spPr>
-          <a:xfrm>
-            <a:off x="384048" y="4681728"/>
-            <a:ext cx="11411712" cy="1572768"/>
-          </a:xfrm>
-          <a:prstGeom prst="rect">
-            <a:avLst/>
-          </a:prstGeom>
-          <a:solidFill>
-            <a:srgbClr val="FFFFFF"/>
-          </a:solidFill>
-          <a:ln w="12700">
-            <a:solidFill>
-              <a:srgbClr val="E8EDF1"/>
-            </a:solidFill>
-          </a:ln>
-        </p:spPr>
-        <p:style>
-          <a:lnRef idx="1">
-            <a:schemeClr val="accent1"/>
-          </a:lnRef>
-          <a:fillRef idx="3">
-            <a:schemeClr val="accent1"/>
-          </a:fillRef>
-          <a:effectRef idx="2">
-            <a:schemeClr val="accent1"/>
-          </a:effectRef>
-          <a:fontRef idx="minor">
-            <a:schemeClr val="lt1"/>
-          </a:fontRef>
-        </p:style>
-        <p:txBody>
-          <a:bodyPr rtlCol="0" anchor="ctr"/>
-          <a:lstStyle/>
-          <a:p>
-            <a:pPr algn="ctr"/>
-          </a:p>
-        </p:txBody>
-      </p:sp>
-      <p:sp>
-        <p:nvSpPr>
-          <p:cNvPr id="16" name="Rectangle 15"/>
-          <p:cNvSpPr/>
-          <p:nvPr/>
-        </p:nvSpPr>
-        <p:spPr>
-          <a:xfrm>
-            <a:off x="384048" y="4681728"/>
-            <a:ext cx="256032" cy="1572768"/>
-          </a:xfrm>
-          <a:prstGeom prst="rect">
-            <a:avLst/>
-          </a:prstGeom>
-          <a:solidFill>
-            <a:srgbClr val="6E8494"/>
-          </a:solidFill>
-          <a:ln>
-            <a:noFill/>
-          </a:ln>
-        </p:spPr>
-        <p:style>
-          <a:lnRef idx="1">
-            <a:schemeClr val="accent1"/>
-          </a:lnRef>
-          <a:fillRef idx="3">
-            <a:schemeClr val="accent1"/>
-          </a:fillRef>
-          <a:effectRef idx="2">
-            <a:schemeClr val="accent1"/>
-          </a:effectRef>
-          <a:fontRef idx="minor">
-            <a:schemeClr val="lt1"/>
-          </a:fontRef>
-        </p:style>
-        <p:txBody>
-          <a:bodyPr rtlCol="0" anchor="ctr"/>
-          <a:lstStyle/>
-          <a:p>
-            <a:pPr algn="ctr"/>
-          </a:p>
-        </p:txBody>
-      </p:sp>
-      <p:sp>
-        <p:nvSpPr>
-          <p:cNvPr id="17" name="TextBox 16"/>
-          <p:cNvSpPr txBox="1"/>
-          <p:nvPr/>
-        </p:nvSpPr>
-        <p:spPr>
-          <a:xfrm>
-            <a:off x="749808" y="4754880"/>
-            <a:ext cx="3657600" cy="347472"/>
-          </a:xfrm>
-          <a:prstGeom prst="rect">
-            <a:avLst/>
-          </a:prstGeom>
-          <a:noFill/>
-        </p:spPr>
-        <p:txBody>
-          <a:bodyPr wrap="square">
-            <a:spAutoFit/>
-          </a:bodyPr>
-          <a:lstStyle/>
-          <a:p>
-            <a:pPr algn="l"/>
-            <a:r>
-              <a:rPr sz="1400" b="1" i="0">
-                <a:solidFill>
-                  <a:srgbClr val="1E3A4A"/>
-                </a:solidFill>
-              </a:rPr>
-              <a:t>Why rarefaction?</a:t>
-            </a:r>
-          </a:p>
-        </p:txBody>
-      </p:sp>
-      <p:sp>
-        <p:nvSpPr>
-          <p:cNvPr id="18" name="TextBox 17"/>
-          <p:cNvSpPr txBox="1"/>
-          <p:nvPr/>
-        </p:nvSpPr>
-        <p:spPr>
-          <a:xfrm>
-            <a:off x="749808" y="5157216"/>
-            <a:ext cx="10789920" cy="841248"/>
-          </a:xfrm>
-          <a:prstGeom prst="rect">
-            <a:avLst/>
-          </a:prstGeom>
-          <a:noFill/>
-        </p:spPr>
-        <p:txBody>
-          <a:bodyPr wrap="square">
-            <a:spAutoFit/>
-          </a:bodyPr>
-          <a:lstStyle/>
-          <a:p>
-            <a:pPr algn="l"/>
-            <a:r>
-              <a:rPr sz="1300" b="0" i="0">
-                <a:solidFill>
-                  <a:srgbClr val="1E3A4A"/>
-                </a:solidFill>
-              </a:rPr>
-              <a:t>Different samples often have different numbers of reads — not because of biology, but because of technical variation in sequencing.
-To compare diversity fairly, we subsample all samples down to the same depth before computing any metrics.</a:t>
-            </a:r>
-          </a:p>
-        </p:txBody>
-      </p:sp>
-      <p:sp>
-        <p:nvSpPr>
-          <p:cNvPr id="19" name="Rectangle 18"/>
-          <p:cNvSpPr/>
-          <p:nvPr/>
-        </p:nvSpPr>
-        <p:spPr>
-          <a:xfrm>
-            <a:off x="8686800" y="4754880"/>
-            <a:ext cx="2926080" cy="1371600"/>
-          </a:xfrm>
-          <a:prstGeom prst="rect">
-            <a:avLst/>
-          </a:prstGeom>
-          <a:solidFill>
-            <a:srgbClr val="E8EDF1"/>
-          </a:solidFill>
-          <a:ln>
-            <a:noFill/>
-          </a:ln>
-        </p:spPr>
-        <p:style>
-          <a:lnRef idx="1">
-            <a:schemeClr val="accent1"/>
-          </a:lnRef>
-          <a:fillRef idx="3">
-            <a:schemeClr val="accent1"/>
-          </a:fillRef>
-          <a:effectRef idx="2">
-            <a:schemeClr val="accent1"/>
-          </a:effectRef>
-          <a:fontRef idx="minor">
-            <a:schemeClr val="lt1"/>
-          </a:fontRef>
-        </p:style>
-        <p:txBody>
-          <a:bodyPr rtlCol="0" anchor="ctr"/>
-          <a:lstStyle/>
-          <a:p>
-            <a:pPr algn="ctr"/>
-          </a:p>
-        </p:txBody>
-      </p:sp>
-      <p:sp>
-        <p:nvSpPr>
-          <p:cNvPr id="20" name="TextBox 19"/>
-          <p:cNvSpPr txBox="1"/>
-          <p:nvPr/>
-        </p:nvSpPr>
-        <p:spPr>
-          <a:xfrm>
-            <a:off x="8823960" y="4773168"/>
-            <a:ext cx="2560320" cy="256032"/>
-          </a:xfrm>
-          <a:prstGeom prst="rect">
-            <a:avLst/>
-          </a:prstGeom>
-          <a:noFill/>
-        </p:spPr>
-        <p:txBody>
-          <a:bodyPr wrap="square">
-            <a:spAutoFit/>
-          </a:bodyPr>
-          <a:lstStyle/>
-          <a:p>
-            <a:pPr algn="ctr"/>
-            <a:r>
-              <a:rPr sz="1000" b="0" i="1">
-                <a:solidFill>
-                  <a:srgbClr val="6E8494"/>
-                </a:solidFill>
-              </a:rPr>
-              <a:t>PCoA plot</a:t>
-            </a:r>
-          </a:p>
-        </p:txBody>
-      </p:sp>
-      <p:sp>
-        <p:nvSpPr>
-          <p:cNvPr id="21" name="Oval 20"/>
-          <p:cNvSpPr/>
-          <p:nvPr/>
-        </p:nvSpPr>
-        <p:spPr>
-          <a:xfrm>
-            <a:off x="8942832" y="5239512"/>
-            <a:ext cx="219456" cy="219456"/>
-          </a:xfrm>
-          <a:prstGeom prst="ellipse">
-            <a:avLst/>
-          </a:prstGeom>
-          <a:solidFill>
-            <a:srgbClr val="3D908A"/>
-          </a:solidFill>
-          <a:ln>
-            <a:noFill/>
-          </a:ln>
-        </p:spPr>
-        <p:style>
-          <a:lnRef idx="1">
-            <a:schemeClr val="accent1"/>
-          </a:lnRef>
-          <a:fillRef idx="3">
-            <a:schemeClr val="accent1"/>
-          </a:fillRef>
-          <a:effectRef idx="2">
-            <a:schemeClr val="accent1"/>
-          </a:effectRef>
-          <a:fontRef idx="minor">
-            <a:schemeClr val="lt1"/>
-          </a:fontRef>
-        </p:style>
-        <p:txBody>
-          <a:bodyPr rtlCol="0" anchor="ctr"/>
-          <a:lstStyle/>
-          <a:p>
-            <a:pPr algn="ctr"/>
-          </a:p>
-        </p:txBody>
-      </p:sp>
-      <p:sp>
-        <p:nvSpPr>
-          <p:cNvPr id="22" name="Oval 21"/>
-          <p:cNvSpPr/>
-          <p:nvPr/>
-        </p:nvSpPr>
-        <p:spPr>
-          <a:xfrm>
-            <a:off x="9171432" y="5541264"/>
-            <a:ext cx="219456" cy="219456"/>
-          </a:xfrm>
-          <a:prstGeom prst="ellipse">
-            <a:avLst/>
-          </a:prstGeom>
-          <a:solidFill>
-            <a:srgbClr val="3D908A"/>
-          </a:solidFill>
-          <a:ln>
-            <a:noFill/>
-          </a:ln>
-        </p:spPr>
-        <p:style>
-          <a:lnRef idx="1">
-            <a:schemeClr val="accent1"/>
-          </a:lnRef>
-          <a:fillRef idx="3">
-            <a:schemeClr val="accent1"/>
-          </a:fillRef>
-          <a:effectRef idx="2">
-            <a:schemeClr val="accent1"/>
-          </a:effectRef>
-          <a:fontRef idx="minor">
-            <a:schemeClr val="lt1"/>
-          </a:fontRef>
-        </p:style>
-        <p:txBody>
-          <a:bodyPr rtlCol="0" anchor="ctr"/>
-          <a:lstStyle/>
-          <a:p>
-            <a:pPr algn="ctr"/>
-          </a:p>
-        </p:txBody>
-      </p:sp>
-      <p:sp>
-        <p:nvSpPr>
-          <p:cNvPr id="23" name="Oval 22"/>
-          <p:cNvSpPr/>
-          <p:nvPr/>
-        </p:nvSpPr>
-        <p:spPr>
-          <a:xfrm>
-            <a:off x="9034272" y="5394960"/>
-            <a:ext cx="219456" cy="219456"/>
-          </a:xfrm>
-          <a:prstGeom prst="ellipse">
-            <a:avLst/>
-          </a:prstGeom>
-          <a:solidFill>
-            <a:srgbClr val="3D908A"/>
-          </a:solidFill>
-          <a:ln>
-            <a:noFill/>
-          </a:ln>
-        </p:spPr>
-        <p:style>
-          <a:lnRef idx="1">
-            <a:schemeClr val="accent1"/>
-          </a:lnRef>
-          <a:fillRef idx="3">
-            <a:schemeClr val="accent1"/>
-          </a:fillRef>
-          <a:effectRef idx="2">
-            <a:schemeClr val="accent1"/>
-          </a:effectRef>
-          <a:fontRef idx="minor">
-            <a:schemeClr val="lt1"/>
-          </a:fontRef>
-        </p:style>
-        <p:txBody>
-          <a:bodyPr rtlCol="0" anchor="ctr"/>
-          <a:lstStyle/>
-          <a:p>
-            <a:pPr algn="ctr"/>
-          </a:p>
-        </p:txBody>
-      </p:sp>
-      <p:sp>
-        <p:nvSpPr>
-          <p:cNvPr id="24" name="Oval 23"/>
-          <p:cNvSpPr/>
-          <p:nvPr/>
-        </p:nvSpPr>
-        <p:spPr>
-          <a:xfrm>
-            <a:off x="10314432" y="5513832"/>
-            <a:ext cx="219456" cy="219456"/>
-          </a:xfrm>
-          <a:prstGeom prst="ellipse">
-            <a:avLst/>
-          </a:prstGeom>
-          <a:solidFill>
-            <a:srgbClr val="CB6B52"/>
-          </a:solidFill>
-          <a:ln>
-            <a:noFill/>
-          </a:ln>
-        </p:spPr>
-        <p:style>
-          <a:lnRef idx="1">
-            <a:schemeClr val="accent1"/>
-          </a:lnRef>
-          <a:fillRef idx="3">
-            <a:schemeClr val="accent1"/>
-          </a:fillRef>
-          <a:effectRef idx="2">
-            <a:schemeClr val="accent1"/>
-          </a:effectRef>
-          <a:fontRef idx="minor">
-            <a:schemeClr val="lt1"/>
-          </a:fontRef>
-        </p:style>
-        <p:txBody>
-          <a:bodyPr rtlCol="0" anchor="ctr"/>
-          <a:lstStyle/>
-          <a:p>
-            <a:pPr algn="ctr"/>
-          </a:p>
-        </p:txBody>
-      </p:sp>
-      <p:sp>
-        <p:nvSpPr>
-          <p:cNvPr id="25" name="Oval 24"/>
-          <p:cNvSpPr/>
-          <p:nvPr/>
-        </p:nvSpPr>
-        <p:spPr>
-          <a:xfrm>
-            <a:off x="10497312" y="5833872"/>
-            <a:ext cx="219456" cy="219456"/>
-          </a:xfrm>
-          <a:prstGeom prst="ellipse">
-            <a:avLst/>
-          </a:prstGeom>
-          <a:solidFill>
-            <a:srgbClr val="CB6B52"/>
-          </a:solidFill>
-          <a:ln>
-            <a:noFill/>
-          </a:ln>
-        </p:spPr>
-        <p:style>
-          <a:lnRef idx="1">
-            <a:schemeClr val="accent1"/>
-          </a:lnRef>
-          <a:fillRef idx="3">
-            <a:schemeClr val="accent1"/>
-          </a:fillRef>
-          <a:effectRef idx="2">
-            <a:schemeClr val="accent1"/>
-          </a:effectRef>
-          <a:fontRef idx="minor">
-            <a:schemeClr val="lt1"/>
-          </a:fontRef>
-        </p:style>
-        <p:txBody>
-          <a:bodyPr rtlCol="0" anchor="ctr"/>
-          <a:lstStyle/>
-          <a:p>
-            <a:pPr algn="ctr"/>
-          </a:p>
-        </p:txBody>
-      </p:sp>
-      <p:sp>
-        <p:nvSpPr>
-          <p:cNvPr id="26" name="Oval 25"/>
-          <p:cNvSpPr/>
-          <p:nvPr/>
-        </p:nvSpPr>
-        <p:spPr>
-          <a:xfrm>
-            <a:off x="10360152" y="5330952"/>
-            <a:ext cx="219456" cy="219456"/>
-          </a:xfrm>
-          <a:prstGeom prst="ellipse">
-            <a:avLst/>
-          </a:prstGeom>
-          <a:solidFill>
-            <a:srgbClr val="CB6B52"/>
-          </a:solidFill>
-          <a:ln>
-            <a:noFill/>
-          </a:ln>
-        </p:spPr>
-        <p:style>
-          <a:lnRef idx="1">
-            <a:schemeClr val="accent1"/>
-          </a:lnRef>
-          <a:fillRef idx="3">
-            <a:schemeClr val="accent1"/>
-          </a:fillRef>
-          <a:effectRef idx="2">
-            <a:schemeClr val="accent1"/>
-          </a:effectRef>
-          <a:fontRef idx="minor">
-            <a:schemeClr val="lt1"/>
-          </a:fontRef>
-        </p:style>
-        <p:txBody>
-          <a:bodyPr rtlCol="0" anchor="ctr"/>
-          <a:lstStyle/>
-          <a:p>
-            <a:pPr algn="ctr"/>
-          </a:p>
-        </p:txBody>
-      </p:sp>
-      <p:sp>
-        <p:nvSpPr>
-          <p:cNvPr id="27" name="TextBox 26"/>
-          <p:cNvSpPr txBox="1"/>
-          <p:nvPr/>
-        </p:nvSpPr>
-        <p:spPr>
-          <a:xfrm>
-            <a:off x="8732520" y="5925312"/>
-            <a:ext cx="2834640" cy="228600"/>
-          </a:xfrm>
-          <a:prstGeom prst="rect">
-            <a:avLst/>
-          </a:prstGeom>
-          <a:noFill/>
-        </p:spPr>
-        <p:txBody>
-          <a:bodyPr wrap="square">
-            <a:spAutoFit/>
-          </a:bodyPr>
-          <a:lstStyle/>
-          <a:p>
-            <a:pPr algn="ctr"/>
-            <a:r>
-              <a:rPr sz="1000" b="0" i="0">
-                <a:solidFill>
-                  <a:srgbClr val="6E8494"/>
-                </a:solidFill>
-              </a:rPr>
-              <a:t>● Group A  ● Group B</a:t>
+              <a:t>ASV  (Amplicon Sequence Variant)  —  an exact, unique biological sequence. More precise than the older OTU approach (97% clustering).</a:t>
             </a:r>
           </a:p>
         </p:txBody>
@@ -7507,7 +7653,7 @@
             <a:avLst/>
           </a:prstGeom>
           <a:solidFill>
-            <a:srgbClr val="7B6EAA"/>
+            <a:srgbClr val="4A7FA5"/>
           </a:solidFill>
           <a:ln>
             <a:noFill/>
@@ -7550,7 +7696,7 @@
             <a:avLst/>
           </a:prstGeom>
           <a:solidFill>
-            <a:srgbClr val="7B6EAA"/>
+            <a:srgbClr val="4A7FA5"/>
           </a:solidFill>
           <a:ln>
             <a:noFill/>
@@ -7607,7 +7753,7 @@
                   <a:srgbClr val="1E3A4A"/>
                 </a:solidFill>
               </a:rPr>
-              <a:t>Putting Names to Sequences</a:t>
+              <a:t>Measuring Diversity</a:t>
             </a:r>
           </a:p>
         </p:txBody>
@@ -7641,7 +7787,7 @@
                   <a:srgbClr val="6E8494"/>
                 </a:solidFill>
               </a:rPr>
-              <a:t>Matching each unique sequence against a curated reference database</a:t>
+              <a:t>How rich is each sample? How different are the communities from each other?</a:t>
             </a:r>
           </a:p>
         </p:txBody>
@@ -7654,201 +7800,8 @@
         </p:nvSpPr>
         <p:spPr>
           <a:xfrm>
-            <a:off x="502920" y="1481328"/>
-            <a:ext cx="2606040" cy="1737360"/>
-          </a:xfrm>
-          <a:prstGeom prst="rect">
-            <a:avLst/>
-          </a:prstGeom>
-          <a:solidFill>
-            <a:srgbClr val="FFFFFF"/>
-          </a:solidFill>
-          <a:ln w="25400">
-            <a:solidFill>
-              <a:srgbClr val="D5CFEE"/>
-            </a:solidFill>
-          </a:ln>
-        </p:spPr>
-        <p:style>
-          <a:lnRef idx="1">
-            <a:schemeClr val="accent1"/>
-          </a:lnRef>
-          <a:fillRef idx="3">
-            <a:schemeClr val="accent1"/>
-          </a:fillRef>
-          <a:effectRef idx="2">
-            <a:schemeClr val="accent1"/>
-          </a:effectRef>
-          <a:fontRef idx="minor">
-            <a:schemeClr val="lt1"/>
-          </a:fontRef>
-        </p:style>
-        <p:txBody>
-          <a:bodyPr rtlCol="0" anchor="ctr"/>
-          <a:lstStyle/>
-          <a:p>
-            <a:pPr algn="ctr"/>
-          </a:p>
-        </p:txBody>
-      </p:sp>
-      <p:sp>
-        <p:nvSpPr>
-          <p:cNvPr id="8" name="Rectangle 7"/>
-          <p:cNvSpPr/>
-          <p:nvPr/>
-        </p:nvSpPr>
-        <p:spPr>
-          <a:xfrm>
-            <a:off x="502920" y="1481328"/>
-            <a:ext cx="2606040" cy="530352"/>
-          </a:xfrm>
-          <a:prstGeom prst="rect">
-            <a:avLst/>
-          </a:prstGeom>
-          <a:solidFill>
-            <a:srgbClr val="D5CFEE"/>
-          </a:solidFill>
-          <a:ln>
-            <a:noFill/>
-          </a:ln>
-        </p:spPr>
-        <p:style>
-          <a:lnRef idx="1">
-            <a:schemeClr val="accent1"/>
-          </a:lnRef>
-          <a:fillRef idx="3">
-            <a:schemeClr val="accent1"/>
-          </a:fillRef>
-          <a:effectRef idx="2">
-            <a:schemeClr val="accent1"/>
-          </a:effectRef>
-          <a:fontRef idx="minor">
-            <a:schemeClr val="lt1"/>
-          </a:fontRef>
-        </p:style>
-        <p:txBody>
-          <a:bodyPr rtlCol="0" anchor="ctr"/>
-          <a:lstStyle/>
-          <a:p>
-            <a:pPr algn="ctr"/>
-          </a:p>
-        </p:txBody>
-      </p:sp>
-      <p:sp>
-        <p:nvSpPr>
-          <p:cNvPr id="9" name="TextBox 8"/>
-          <p:cNvSpPr txBox="1"/>
-          <p:nvPr/>
-        </p:nvSpPr>
-        <p:spPr>
-          <a:xfrm>
-            <a:off x="612648" y="1527048"/>
-            <a:ext cx="2377440" cy="457200"/>
-          </a:xfrm>
-          <a:prstGeom prst="rect">
-            <a:avLst/>
-          </a:prstGeom>
-          <a:noFill/>
-        </p:spPr>
-        <p:txBody>
-          <a:bodyPr wrap="square">
-            <a:spAutoFit/>
-          </a:bodyPr>
-          <a:lstStyle/>
-          <a:p>
-            <a:pPr algn="ctr"/>
-            <a:r>
-              <a:rPr sz="1400" b="1" i="0">
-                <a:solidFill>
-                  <a:srgbClr val="7B6EAA"/>
-                </a:solidFill>
-              </a:rPr>
-              <a:t>Unique
-sequences</a:t>
-            </a:r>
-          </a:p>
-        </p:txBody>
-      </p:sp>
-      <p:sp>
-        <p:nvSpPr>
-          <p:cNvPr id="10" name="TextBox 9"/>
-          <p:cNvSpPr txBox="1"/>
-          <p:nvPr/>
-        </p:nvSpPr>
-        <p:spPr>
-          <a:xfrm>
-            <a:off x="612648" y="2084831"/>
-            <a:ext cx="2377440" cy="1024128"/>
-          </a:xfrm>
-          <a:prstGeom prst="rect">
-            <a:avLst/>
-          </a:prstGeom>
-          <a:noFill/>
-        </p:spPr>
-        <p:txBody>
-          <a:bodyPr wrap="square">
-            <a:spAutoFit/>
-          </a:bodyPr>
-          <a:lstStyle/>
-          <a:p>
-            <a:pPr algn="ctr"/>
-            <a:r>
-              <a:rPr sz="1200" b="0" i="0">
-                <a:solidFill>
-                  <a:srgbClr val="1E3A4A"/>
-                </a:solidFill>
-              </a:rPr>
-              <a:t>Every distinct sequence
-from our samples</a:t>
-            </a:r>
-          </a:p>
-        </p:txBody>
-      </p:sp>
-      <p:cxnSp>
-        <p:nvCxnSpPr>
-          <p:cNvPr id="11" name="Connector 10"/>
-          <p:cNvCxnSpPr/>
-          <p:nvPr/>
-        </p:nvCxnSpPr>
-        <p:spPr>
-          <a:xfrm>
-            <a:off x="3108960" y="2304288"/>
-            <a:ext cx="320040" cy="0"/>
-          </a:xfrm>
-          <a:prstGeom prst="line">
-            <a:avLst/>
-          </a:prstGeom>
-          <a:ln w="25400">
-            <a:solidFill>
-              <a:srgbClr val="7B6EAA"/>
-            </a:solidFill>
-          </a:ln>
-        </p:spPr>
-        <p:style>
-          <a:lnRef idx="2">
-            <a:schemeClr val="accent1"/>
-          </a:lnRef>
-          <a:fillRef idx="0">
-            <a:schemeClr val="accent1"/>
-          </a:fillRef>
-          <a:effectRef idx="1">
-            <a:schemeClr val="accent1"/>
-          </a:effectRef>
-          <a:fontRef idx="minor">
-            <a:schemeClr val="tx1"/>
-          </a:fontRef>
-        </p:style>
-      </p:cxnSp>
-      <p:sp>
-        <p:nvSpPr>
-          <p:cNvPr id="12" name="Rectangle 11"/>
-          <p:cNvSpPr/>
-          <p:nvPr/>
-        </p:nvSpPr>
-        <p:spPr>
-          <a:xfrm>
-            <a:off x="3429000" y="1481328"/>
-            <a:ext cx="2606040" cy="1737360"/>
+            <a:off x="384048" y="1444752"/>
+            <a:ext cx="5440680" cy="3154680"/>
           </a:xfrm>
           <a:prstGeom prst="rect">
             <a:avLst/>
@@ -7886,14 +7839,14 @@
       </p:sp>
       <p:sp>
         <p:nvSpPr>
-          <p:cNvPr id="13" name="Rectangle 12"/>
+          <p:cNvPr id="8" name="Rectangle 7"/>
           <p:cNvSpPr/>
           <p:nvPr/>
         </p:nvSpPr>
         <p:spPr>
           <a:xfrm>
-            <a:off x="3429000" y="1481328"/>
-            <a:ext cx="2606040" cy="530352"/>
+            <a:off x="384048" y="1444752"/>
+            <a:ext cx="5440680" cy="530352"/>
           </a:xfrm>
           <a:prstGeom prst="rect">
             <a:avLst/>
@@ -7929,14 +7882,14 @@
       </p:sp>
       <p:sp>
         <p:nvSpPr>
-          <p:cNvPr id="14" name="TextBox 13"/>
+          <p:cNvPr id="9" name="TextBox 8"/>
           <p:cNvSpPr txBox="1"/>
           <p:nvPr/>
         </p:nvSpPr>
         <p:spPr>
           <a:xfrm>
-            <a:off x="3538728" y="1527048"/>
-            <a:ext cx="2377440" cy="457200"/>
+            <a:off x="566928" y="1499616"/>
+            <a:ext cx="5029200" cy="384048"/>
           </a:xfrm>
           <a:prstGeom prst="rect">
             <a:avLst/>
@@ -7949,572 +7902,28 @@
           </a:bodyPr>
           <a:lstStyle/>
           <a:p>
-            <a:pPr algn="ctr"/>
-            <a:r>
-              <a:rPr sz="1400" b="1" i="0">
+            <a:pPr algn="l"/>
+            <a:r>
+              <a:rPr sz="1600" b="1" i="0">
                 <a:solidFill>
                   <a:srgbClr val="4A7FA5"/>
                 </a:solidFill>
               </a:rPr>
-              <a:t>Reference
-database</a:t>
-            </a:r>
-          </a:p>
-        </p:txBody>
-      </p:sp>
-      <p:sp>
-        <p:nvSpPr>
-          <p:cNvPr id="15" name="TextBox 14"/>
+              <a:t>Alpha diversity  ·  Within a sample</a:t>
+            </a:r>
+          </a:p>
+        </p:txBody>
+      </p:sp>
+      <p:sp>
+        <p:nvSpPr>
+          <p:cNvPr id="10" name="TextBox 9"/>
           <p:cNvSpPr txBox="1"/>
           <p:nvPr/>
         </p:nvSpPr>
         <p:spPr>
           <a:xfrm>
-            <a:off x="3538728" y="2084831"/>
-            <a:ext cx="2377440" cy="1024128"/>
-          </a:xfrm>
-          <a:prstGeom prst="rect">
-            <a:avLst/>
-          </a:prstGeom>
-          <a:noFill/>
-        </p:spPr>
-        <p:txBody>
-          <a:bodyPr wrap="square">
-            <a:spAutoFit/>
-          </a:bodyPr>
-          <a:lstStyle/>
-          <a:p>
-            <a:pPr algn="ctr"/>
-            <a:r>
-              <a:rPr sz="1200" b="0" i="0">
-                <a:solidFill>
-                  <a:srgbClr val="1E3A4A"/>
-                </a:solidFill>
-              </a:rPr>
-              <a:t>Hundreds of thousands
-of known sequences</a:t>
-            </a:r>
-          </a:p>
-        </p:txBody>
-      </p:sp>
-      <p:cxnSp>
-        <p:nvCxnSpPr>
-          <p:cNvPr id="16" name="Connector 15"/>
-          <p:cNvCxnSpPr/>
-          <p:nvPr/>
-        </p:nvCxnSpPr>
-        <p:spPr>
-          <a:xfrm>
-            <a:off x="6035040" y="2304288"/>
-            <a:ext cx="320040" cy="0"/>
-          </a:xfrm>
-          <a:prstGeom prst="line">
-            <a:avLst/>
-          </a:prstGeom>
-          <a:ln w="25400">
-            <a:solidFill>
-              <a:srgbClr val="4A7FA5"/>
-            </a:solidFill>
-          </a:ln>
-        </p:spPr>
-        <p:style>
-          <a:lnRef idx="2">
-            <a:schemeClr val="accent1"/>
-          </a:lnRef>
-          <a:fillRef idx="0">
-            <a:schemeClr val="accent1"/>
-          </a:fillRef>
-          <a:effectRef idx="1">
-            <a:schemeClr val="accent1"/>
-          </a:effectRef>
-          <a:fontRef idx="minor">
-            <a:schemeClr val="tx1"/>
-          </a:fontRef>
-        </p:style>
-      </p:cxnSp>
-      <p:sp>
-        <p:nvSpPr>
-          <p:cNvPr id="17" name="Rectangle 16"/>
-          <p:cNvSpPr/>
-          <p:nvPr/>
-        </p:nvSpPr>
-        <p:spPr>
-          <a:xfrm>
-            <a:off x="6355080" y="1481328"/>
-            <a:ext cx="2606040" cy="1737360"/>
-          </a:xfrm>
-          <a:prstGeom prst="rect">
-            <a:avLst/>
-          </a:prstGeom>
-          <a:solidFill>
-            <a:srgbClr val="FFFFFF"/>
-          </a:solidFill>
-          <a:ln w="25400">
-            <a:solidFill>
-              <a:srgbClr val="B8DEDB"/>
-            </a:solidFill>
-          </a:ln>
-        </p:spPr>
-        <p:style>
-          <a:lnRef idx="1">
-            <a:schemeClr val="accent1"/>
-          </a:lnRef>
-          <a:fillRef idx="3">
-            <a:schemeClr val="accent1"/>
-          </a:fillRef>
-          <a:effectRef idx="2">
-            <a:schemeClr val="accent1"/>
-          </a:effectRef>
-          <a:fontRef idx="minor">
-            <a:schemeClr val="lt1"/>
-          </a:fontRef>
-        </p:style>
-        <p:txBody>
-          <a:bodyPr rtlCol="0" anchor="ctr"/>
-          <a:lstStyle/>
-          <a:p>
-            <a:pPr algn="ctr"/>
-          </a:p>
-        </p:txBody>
-      </p:sp>
-      <p:sp>
-        <p:nvSpPr>
-          <p:cNvPr id="18" name="Rectangle 17"/>
-          <p:cNvSpPr/>
-          <p:nvPr/>
-        </p:nvSpPr>
-        <p:spPr>
-          <a:xfrm>
-            <a:off x="6355080" y="1481328"/>
-            <a:ext cx="2606040" cy="530352"/>
-          </a:xfrm>
-          <a:prstGeom prst="rect">
-            <a:avLst/>
-          </a:prstGeom>
-          <a:solidFill>
-            <a:srgbClr val="B8DEDB"/>
-          </a:solidFill>
-          <a:ln>
-            <a:noFill/>
-          </a:ln>
-        </p:spPr>
-        <p:style>
-          <a:lnRef idx="1">
-            <a:schemeClr val="accent1"/>
-          </a:lnRef>
-          <a:fillRef idx="3">
-            <a:schemeClr val="accent1"/>
-          </a:fillRef>
-          <a:effectRef idx="2">
-            <a:schemeClr val="accent1"/>
-          </a:effectRef>
-          <a:fontRef idx="minor">
-            <a:schemeClr val="lt1"/>
-          </a:fontRef>
-        </p:style>
-        <p:txBody>
-          <a:bodyPr rtlCol="0" anchor="ctr"/>
-          <a:lstStyle/>
-          <a:p>
-            <a:pPr algn="ctr"/>
-          </a:p>
-        </p:txBody>
-      </p:sp>
-      <p:sp>
-        <p:nvSpPr>
-          <p:cNvPr id="19" name="TextBox 18"/>
-          <p:cNvSpPr txBox="1"/>
-          <p:nvPr/>
-        </p:nvSpPr>
-        <p:spPr>
-          <a:xfrm>
-            <a:off x="6464808" y="1527048"/>
-            <a:ext cx="2377440" cy="457200"/>
-          </a:xfrm>
-          <a:prstGeom prst="rect">
-            <a:avLst/>
-          </a:prstGeom>
-          <a:noFill/>
-        </p:spPr>
-        <p:txBody>
-          <a:bodyPr wrap="square">
-            <a:spAutoFit/>
-          </a:bodyPr>
-          <a:lstStyle/>
-          <a:p>
-            <a:pPr algn="ctr"/>
-            <a:r>
-              <a:rPr sz="1400" b="1" i="0">
-                <a:solidFill>
-                  <a:srgbClr val="3D908A"/>
-                </a:solidFill>
-              </a:rPr>
-              <a:t>Matching
-algorithm</a:t>
-            </a:r>
-          </a:p>
-        </p:txBody>
-      </p:sp>
-      <p:sp>
-        <p:nvSpPr>
-          <p:cNvPr id="20" name="TextBox 19"/>
-          <p:cNvSpPr txBox="1"/>
-          <p:nvPr/>
-        </p:nvSpPr>
-        <p:spPr>
-          <a:xfrm>
-            <a:off x="6464808" y="2084831"/>
-            <a:ext cx="2377440" cy="1024128"/>
-          </a:xfrm>
-          <a:prstGeom prst="rect">
-            <a:avLst/>
-          </a:prstGeom>
-          <a:noFill/>
-        </p:spPr>
-        <p:txBody>
-          <a:bodyPr wrap="square">
-            <a:spAutoFit/>
-          </a:bodyPr>
-          <a:lstStyle/>
-          <a:p>
-            <a:pPr algn="ctr"/>
-            <a:r>
-              <a:rPr sz="1200" b="0" i="0">
-                <a:solidFill>
-                  <a:srgbClr val="1E3A4A"/>
-                </a:solidFill>
-              </a:rPr>
-              <a:t>Statistical classifier
-finds best match</a:t>
-            </a:r>
-          </a:p>
-        </p:txBody>
-      </p:sp>
-      <p:cxnSp>
-        <p:nvCxnSpPr>
-          <p:cNvPr id="21" name="Connector 20"/>
-          <p:cNvCxnSpPr/>
-          <p:nvPr/>
-        </p:nvCxnSpPr>
-        <p:spPr>
-          <a:xfrm>
-            <a:off x="8961120" y="2304288"/>
-            <a:ext cx="320040" cy="0"/>
-          </a:xfrm>
-          <a:prstGeom prst="line">
-            <a:avLst/>
-          </a:prstGeom>
-          <a:ln w="25400">
-            <a:solidFill>
-              <a:srgbClr val="3D908A"/>
-            </a:solidFill>
-          </a:ln>
-        </p:spPr>
-        <p:style>
-          <a:lnRef idx="2">
-            <a:schemeClr val="accent1"/>
-          </a:lnRef>
-          <a:fillRef idx="0">
-            <a:schemeClr val="accent1"/>
-          </a:fillRef>
-          <a:effectRef idx="1">
-            <a:schemeClr val="accent1"/>
-          </a:effectRef>
-          <a:fontRef idx="minor">
-            <a:schemeClr val="tx1"/>
-          </a:fontRef>
-        </p:style>
-      </p:cxnSp>
-      <p:sp>
-        <p:nvSpPr>
-          <p:cNvPr id="22" name="Rectangle 21"/>
-          <p:cNvSpPr/>
-          <p:nvPr/>
-        </p:nvSpPr>
-        <p:spPr>
-          <a:xfrm>
-            <a:off x="9281160" y="1481328"/>
-            <a:ext cx="2606040" cy="1737360"/>
-          </a:xfrm>
-          <a:prstGeom prst="rect">
-            <a:avLst/>
-          </a:prstGeom>
-          <a:solidFill>
-            <a:srgbClr val="FFFFFF"/>
-          </a:solidFill>
-          <a:ln w="25400">
-            <a:solidFill>
-              <a:srgbClr val="C3E6C8"/>
-            </a:solidFill>
-          </a:ln>
-        </p:spPr>
-        <p:style>
-          <a:lnRef idx="1">
-            <a:schemeClr val="accent1"/>
-          </a:lnRef>
-          <a:fillRef idx="3">
-            <a:schemeClr val="accent1"/>
-          </a:fillRef>
-          <a:effectRef idx="2">
-            <a:schemeClr val="accent1"/>
-          </a:effectRef>
-          <a:fontRef idx="minor">
-            <a:schemeClr val="lt1"/>
-          </a:fontRef>
-        </p:style>
-        <p:txBody>
-          <a:bodyPr rtlCol="0" anchor="ctr"/>
-          <a:lstStyle/>
-          <a:p>
-            <a:pPr algn="ctr"/>
-          </a:p>
-        </p:txBody>
-      </p:sp>
-      <p:sp>
-        <p:nvSpPr>
-          <p:cNvPr id="23" name="Rectangle 22"/>
-          <p:cNvSpPr/>
-          <p:nvPr/>
-        </p:nvSpPr>
-        <p:spPr>
-          <a:xfrm>
-            <a:off x="9281160" y="1481328"/>
-            <a:ext cx="2606040" cy="530352"/>
-          </a:xfrm>
-          <a:prstGeom prst="rect">
-            <a:avLst/>
-          </a:prstGeom>
-          <a:solidFill>
-            <a:srgbClr val="C3E6C8"/>
-          </a:solidFill>
-          <a:ln>
-            <a:noFill/>
-          </a:ln>
-        </p:spPr>
-        <p:style>
-          <a:lnRef idx="1">
-            <a:schemeClr val="accent1"/>
-          </a:lnRef>
-          <a:fillRef idx="3">
-            <a:schemeClr val="accent1"/>
-          </a:fillRef>
-          <a:effectRef idx="2">
-            <a:schemeClr val="accent1"/>
-          </a:effectRef>
-          <a:fontRef idx="minor">
-            <a:schemeClr val="lt1"/>
-          </a:fontRef>
-        </p:style>
-        <p:txBody>
-          <a:bodyPr rtlCol="0" anchor="ctr"/>
-          <a:lstStyle/>
-          <a:p>
-            <a:pPr algn="ctr"/>
-          </a:p>
-        </p:txBody>
-      </p:sp>
-      <p:sp>
-        <p:nvSpPr>
-          <p:cNvPr id="24" name="TextBox 23"/>
-          <p:cNvSpPr txBox="1"/>
-          <p:nvPr/>
-        </p:nvSpPr>
-        <p:spPr>
-          <a:xfrm>
-            <a:off x="9390888" y="1527048"/>
-            <a:ext cx="2377440" cy="457200"/>
-          </a:xfrm>
-          <a:prstGeom prst="rect">
-            <a:avLst/>
-          </a:prstGeom>
-          <a:noFill/>
-        </p:spPr>
-        <p:txBody>
-          <a:bodyPr wrap="square">
-            <a:spAutoFit/>
-          </a:bodyPr>
-          <a:lstStyle/>
-          <a:p>
-            <a:pPr algn="ctr"/>
-            <a:r>
-              <a:rPr sz="1400" b="1" i="0">
-                <a:solidFill>
-                  <a:srgbClr val="4F9A60"/>
-                </a:solidFill>
-              </a:rPr>
-              <a:t>Taxonomic
-label</a:t>
-            </a:r>
-          </a:p>
-        </p:txBody>
-      </p:sp>
-      <p:sp>
-        <p:nvSpPr>
-          <p:cNvPr id="25" name="TextBox 24"/>
-          <p:cNvSpPr txBox="1"/>
-          <p:nvPr/>
-        </p:nvSpPr>
-        <p:spPr>
-          <a:xfrm>
-            <a:off x="9390888" y="2084831"/>
-            <a:ext cx="2377440" cy="1024128"/>
-          </a:xfrm>
-          <a:prstGeom prst="rect">
-            <a:avLst/>
-          </a:prstGeom>
-          <a:noFill/>
-        </p:spPr>
-        <p:txBody>
-          <a:bodyPr wrap="square">
-            <a:spAutoFit/>
-          </a:bodyPr>
-          <a:lstStyle/>
-          <a:p>
-            <a:pPr algn="ctr"/>
-            <a:r>
-              <a:rPr sz="1200" b="0" i="0">
-                <a:solidFill>
-                  <a:srgbClr val="1E3A4A"/>
-                </a:solidFill>
-              </a:rPr>
-              <a:t>Domain → Phylum → Class
-→ Order → Family → Genus</a:t>
-            </a:r>
-          </a:p>
-        </p:txBody>
-      </p:sp>
-      <p:sp>
-        <p:nvSpPr>
-          <p:cNvPr id="26" name="Rectangle 25"/>
-          <p:cNvSpPr/>
-          <p:nvPr/>
-        </p:nvSpPr>
-        <p:spPr>
-          <a:xfrm>
-            <a:off x="384048" y="3401568"/>
-            <a:ext cx="11411712" cy="2377440"/>
-          </a:xfrm>
-          <a:prstGeom prst="rect">
-            <a:avLst/>
-          </a:prstGeom>
-          <a:solidFill>
-            <a:srgbClr val="FFFFFF"/>
-          </a:solidFill>
-          <a:ln w="19050">
-            <a:solidFill>
-              <a:srgbClr val="D5CFEE"/>
-            </a:solidFill>
-          </a:ln>
-        </p:spPr>
-        <p:style>
-          <a:lnRef idx="1">
-            <a:schemeClr val="accent1"/>
-          </a:lnRef>
-          <a:fillRef idx="3">
-            <a:schemeClr val="accent1"/>
-          </a:fillRef>
-          <a:effectRef idx="2">
-            <a:schemeClr val="accent1"/>
-          </a:effectRef>
-          <a:fontRef idx="minor">
-            <a:schemeClr val="lt1"/>
-          </a:fontRef>
-        </p:style>
-        <p:txBody>
-          <a:bodyPr rtlCol="0" anchor="ctr"/>
-          <a:lstStyle/>
-          <a:p>
-            <a:pPr algn="ctr"/>
-          </a:p>
-        </p:txBody>
-      </p:sp>
-      <p:sp>
-        <p:nvSpPr>
-          <p:cNvPr id="27" name="Rectangle 26"/>
-          <p:cNvSpPr/>
-          <p:nvPr/>
-        </p:nvSpPr>
-        <p:spPr>
-          <a:xfrm>
-            <a:off x="384048" y="3401568"/>
-            <a:ext cx="256032" cy="2377440"/>
-          </a:xfrm>
-          <a:prstGeom prst="rect">
-            <a:avLst/>
-          </a:prstGeom>
-          <a:solidFill>
-            <a:srgbClr val="7B6EAA"/>
-          </a:solidFill>
-          <a:ln>
-            <a:noFill/>
-          </a:ln>
-        </p:spPr>
-        <p:style>
-          <a:lnRef idx="1">
-            <a:schemeClr val="accent1"/>
-          </a:lnRef>
-          <a:fillRef idx="3">
-            <a:schemeClr val="accent1"/>
-          </a:fillRef>
-          <a:effectRef idx="2">
-            <a:schemeClr val="accent1"/>
-          </a:effectRef>
-          <a:fontRef idx="minor">
-            <a:schemeClr val="lt1"/>
-          </a:fontRef>
-        </p:style>
-        <p:txBody>
-          <a:bodyPr rtlCol="0" anchor="ctr"/>
-          <a:lstStyle/>
-          <a:p>
-            <a:pPr algn="ctr"/>
-          </a:p>
-        </p:txBody>
-      </p:sp>
-      <p:sp>
-        <p:nvSpPr>
-          <p:cNvPr id="28" name="TextBox 27"/>
-          <p:cNvSpPr txBox="1"/>
-          <p:nvPr/>
-        </p:nvSpPr>
-        <p:spPr>
-          <a:xfrm>
-            <a:off x="749808" y="3474720"/>
-            <a:ext cx="5486400" cy="384048"/>
-          </a:xfrm>
-          <a:prstGeom prst="rect">
-            <a:avLst/>
-          </a:prstGeom>
-          <a:noFill/>
-        </p:spPr>
-        <p:txBody>
-          <a:bodyPr wrap="square">
-            <a:spAutoFit/>
-          </a:bodyPr>
-          <a:lstStyle/>
-          <a:p>
-            <a:pPr algn="l"/>
-            <a:r>
-              <a:rPr sz="1600" b="1" i="0">
-                <a:solidFill>
-                  <a:srgbClr val="7B6EAA"/>
-                </a:solidFill>
-              </a:rPr>
-              <a:t>Relative abundance barplot</a:t>
-            </a:r>
-          </a:p>
-        </p:txBody>
-      </p:sp>
-      <p:sp>
-        <p:nvSpPr>
-          <p:cNvPr id="29" name="TextBox 28"/>
-          <p:cNvSpPr txBox="1"/>
-          <p:nvPr/>
-        </p:nvSpPr>
-        <p:spPr>
-          <a:xfrm>
-            <a:off x="749808" y="3950208"/>
-            <a:ext cx="6858000" cy="1645920"/>
+            <a:off x="566928" y="2084831"/>
+            <a:ext cx="5074920" cy="2395728"/>
           </a:xfrm>
           <a:prstGeom prst="rect">
             <a:avLst/>
@@ -8534,29 +7943,78 @@
                   <a:srgbClr val="1E3A4A"/>
                 </a:solidFill>
               </a:rPr>
-              <a:t>Once every sequence has a name, we can visualize the composition
-of each sample as a stacked bar — showing what fraction of the
-community belongs to each group at any taxonomic level.</a:t>
-            </a:r>
-          </a:p>
-        </p:txBody>
-      </p:sp>
-      <p:sp>
-        <p:nvSpPr>
-          <p:cNvPr id="30" name="Rectangle 29"/>
+              <a:t>How many different microbes are present in ONE sample?
+We measure:
+·  Richness — how many distinct types exist
+·  Evenness — are they equally abundant, or does
+   one type dominate?
+·  Phylogenetic diversity — how evolutionarily
+   spread out are they?</a:t>
+            </a:r>
+          </a:p>
+        </p:txBody>
+      </p:sp>
+      <p:sp>
+        <p:nvSpPr>
+          <p:cNvPr id="11" name="Rectangle 10"/>
           <p:cNvSpPr/>
           <p:nvPr/>
         </p:nvSpPr>
         <p:spPr>
           <a:xfrm>
-            <a:off x="7863840" y="3493008"/>
-            <a:ext cx="4206240" cy="2148840"/>
-          </a:xfrm>
-          <a:prstGeom prst="rect">
-            <a:avLst/>
-          </a:prstGeom>
-          <a:solidFill>
-            <a:srgbClr val="E8EDF1"/>
+            <a:off x="6007608" y="1444752"/>
+            <a:ext cx="5788152" cy="3154680"/>
+          </a:xfrm>
+          <a:prstGeom prst="rect">
+            <a:avLst/>
+          </a:prstGeom>
+          <a:solidFill>
+            <a:srgbClr val="FFFFFF"/>
+          </a:solidFill>
+          <a:ln w="25400">
+            <a:solidFill>
+              <a:srgbClr val="F5C8BE"/>
+            </a:solidFill>
+          </a:ln>
+        </p:spPr>
+        <p:style>
+          <a:lnRef idx="1">
+            <a:schemeClr val="accent1"/>
+          </a:lnRef>
+          <a:fillRef idx="3">
+            <a:schemeClr val="accent1"/>
+          </a:fillRef>
+          <a:effectRef idx="2">
+            <a:schemeClr val="accent1"/>
+          </a:effectRef>
+          <a:fontRef idx="minor">
+            <a:schemeClr val="lt1"/>
+          </a:fontRef>
+        </p:style>
+        <p:txBody>
+          <a:bodyPr rtlCol="0" anchor="ctr"/>
+          <a:lstStyle/>
+          <a:p>
+            <a:pPr algn="ctr"/>
+          </a:p>
+        </p:txBody>
+      </p:sp>
+      <p:sp>
+        <p:nvSpPr>
+          <p:cNvPr id="12" name="Rectangle 11"/>
+          <p:cNvSpPr/>
+          <p:nvPr/>
+        </p:nvSpPr>
+        <p:spPr>
+          <a:xfrm>
+            <a:off x="6007608" y="1444752"/>
+            <a:ext cx="5788152" cy="530352"/>
+          </a:xfrm>
+          <a:prstGeom prst="rect">
+            <a:avLst/>
+          </a:prstGeom>
+          <a:solidFill>
+            <a:srgbClr val="F5C8BE"/>
           </a:solidFill>
           <a:ln>
             <a:noFill/>
@@ -8586,659 +8044,14 @@
       </p:sp>
       <p:sp>
         <p:nvSpPr>
-          <p:cNvPr id="31" name="Rectangle 30"/>
-          <p:cNvSpPr/>
-          <p:nvPr/>
-        </p:nvSpPr>
-        <p:spPr>
-          <a:xfrm>
-            <a:off x="8046719" y="4665726"/>
-            <a:ext cx="868680" cy="720090"/>
-          </a:xfrm>
-          <a:prstGeom prst="rect">
-            <a:avLst/>
-          </a:prstGeom>
-          <a:solidFill>
-            <a:srgbClr val="3D908A"/>
-          </a:solidFill>
-          <a:ln>
-            <a:noFill/>
-          </a:ln>
-        </p:spPr>
-        <p:style>
-          <a:lnRef idx="1">
-            <a:schemeClr val="accent1"/>
-          </a:lnRef>
-          <a:fillRef idx="3">
-            <a:schemeClr val="accent1"/>
-          </a:fillRef>
-          <a:effectRef idx="2">
-            <a:schemeClr val="accent1"/>
-          </a:effectRef>
-          <a:fontRef idx="minor">
-            <a:schemeClr val="lt1"/>
-          </a:fontRef>
-        </p:style>
-        <p:txBody>
-          <a:bodyPr rtlCol="0" anchor="ctr"/>
-          <a:lstStyle/>
-          <a:p>
-            <a:pPr algn="ctr"/>
-          </a:p>
-        </p:txBody>
-      </p:sp>
-      <p:sp>
-        <p:nvSpPr>
-          <p:cNvPr id="32" name="Rectangle 31"/>
-          <p:cNvSpPr/>
-          <p:nvPr/>
-        </p:nvSpPr>
-        <p:spPr>
-          <a:xfrm>
-            <a:off x="8046719" y="4345686"/>
-            <a:ext cx="868680" cy="320040"/>
-          </a:xfrm>
-          <a:prstGeom prst="rect">
-            <a:avLst/>
-          </a:prstGeom>
-          <a:solidFill>
-            <a:srgbClr val="4A7FA5"/>
-          </a:solidFill>
-          <a:ln>
-            <a:noFill/>
-          </a:ln>
-        </p:spPr>
-        <p:style>
-          <a:lnRef idx="1">
-            <a:schemeClr val="accent1"/>
-          </a:lnRef>
-          <a:fillRef idx="3">
-            <a:schemeClr val="accent1"/>
-          </a:fillRef>
-          <a:effectRef idx="2">
-            <a:schemeClr val="accent1"/>
-          </a:effectRef>
-          <a:fontRef idx="minor">
-            <a:schemeClr val="lt1"/>
-          </a:fontRef>
-        </p:style>
-        <p:txBody>
-          <a:bodyPr rtlCol="0" anchor="ctr"/>
-          <a:lstStyle/>
-          <a:p>
-            <a:pPr algn="ctr"/>
-          </a:p>
-        </p:txBody>
-      </p:sp>
-      <p:sp>
-        <p:nvSpPr>
-          <p:cNvPr id="33" name="Rectangle 32"/>
-          <p:cNvSpPr/>
-          <p:nvPr/>
-        </p:nvSpPr>
-        <p:spPr>
-          <a:xfrm>
-            <a:off x="8046719" y="4105655"/>
-            <a:ext cx="868680" cy="240030"/>
-          </a:xfrm>
-          <a:prstGeom prst="rect">
-            <a:avLst/>
-          </a:prstGeom>
-          <a:solidFill>
-            <a:srgbClr val="CB6B52"/>
-          </a:solidFill>
-          <a:ln>
-            <a:noFill/>
-          </a:ln>
-        </p:spPr>
-        <p:style>
-          <a:lnRef idx="1">
-            <a:schemeClr val="accent1"/>
-          </a:lnRef>
-          <a:fillRef idx="3">
-            <a:schemeClr val="accent1"/>
-          </a:fillRef>
-          <a:effectRef idx="2">
-            <a:schemeClr val="accent1"/>
-          </a:effectRef>
-          <a:fontRef idx="minor">
-            <a:schemeClr val="lt1"/>
-          </a:fontRef>
-        </p:style>
-        <p:txBody>
-          <a:bodyPr rtlCol="0" anchor="ctr"/>
-          <a:lstStyle/>
-          <a:p>
-            <a:pPr algn="ctr"/>
-          </a:p>
-        </p:txBody>
-      </p:sp>
-      <p:sp>
-        <p:nvSpPr>
-          <p:cNvPr id="34" name="Rectangle 33"/>
-          <p:cNvSpPr/>
-          <p:nvPr/>
-        </p:nvSpPr>
-        <p:spPr>
-          <a:xfrm>
-            <a:off x="8046719" y="3945635"/>
-            <a:ext cx="868680" cy="160020"/>
-          </a:xfrm>
-          <a:prstGeom prst="rect">
-            <a:avLst/>
-          </a:prstGeom>
-          <a:solidFill>
-            <a:srgbClr val="7B6EAA"/>
-          </a:solidFill>
-          <a:ln>
-            <a:noFill/>
-          </a:ln>
-        </p:spPr>
-        <p:style>
-          <a:lnRef idx="1">
-            <a:schemeClr val="accent1"/>
-          </a:lnRef>
-          <a:fillRef idx="3">
-            <a:schemeClr val="accent1"/>
-          </a:fillRef>
-          <a:effectRef idx="2">
-            <a:schemeClr val="accent1"/>
-          </a:effectRef>
-          <a:fontRef idx="minor">
-            <a:schemeClr val="lt1"/>
-          </a:fontRef>
-        </p:style>
-        <p:txBody>
-          <a:bodyPr rtlCol="0" anchor="ctr"/>
-          <a:lstStyle/>
-          <a:p>
-            <a:pPr algn="ctr"/>
-          </a:p>
-        </p:txBody>
-      </p:sp>
-      <p:sp>
-        <p:nvSpPr>
-          <p:cNvPr id="35" name="Rectangle 34"/>
-          <p:cNvSpPr/>
-          <p:nvPr/>
-        </p:nvSpPr>
-        <p:spPr>
-          <a:xfrm>
-            <a:off x="8046719" y="3785615"/>
-            <a:ext cx="868680" cy="160020"/>
-          </a:xfrm>
-          <a:prstGeom prst="rect">
-            <a:avLst/>
-          </a:prstGeom>
-          <a:solidFill>
-            <a:srgbClr val="4F9A60"/>
-          </a:solidFill>
-          <a:ln>
-            <a:noFill/>
-          </a:ln>
-        </p:spPr>
-        <p:style>
-          <a:lnRef idx="1">
-            <a:schemeClr val="accent1"/>
-          </a:lnRef>
-          <a:fillRef idx="3">
-            <a:schemeClr val="accent1"/>
-          </a:fillRef>
-          <a:effectRef idx="2">
-            <a:schemeClr val="accent1"/>
-          </a:effectRef>
-          <a:fontRef idx="minor">
-            <a:schemeClr val="lt1"/>
-          </a:fontRef>
-        </p:style>
-        <p:txBody>
-          <a:bodyPr rtlCol="0" anchor="ctr"/>
-          <a:lstStyle/>
-          <a:p>
-            <a:pPr algn="ctr"/>
-          </a:p>
-        </p:txBody>
-      </p:sp>
-      <p:sp>
-        <p:nvSpPr>
-          <p:cNvPr id="36" name="Rectangle 35"/>
-          <p:cNvSpPr/>
-          <p:nvPr/>
-        </p:nvSpPr>
-        <p:spPr>
-          <a:xfrm>
-            <a:off x="9281159" y="4985766"/>
-            <a:ext cx="868680" cy="400050"/>
-          </a:xfrm>
-          <a:prstGeom prst="rect">
-            <a:avLst/>
-          </a:prstGeom>
-          <a:solidFill>
-            <a:srgbClr val="3D908A"/>
-          </a:solidFill>
-          <a:ln>
-            <a:noFill/>
-          </a:ln>
-        </p:spPr>
-        <p:style>
-          <a:lnRef idx="1">
-            <a:schemeClr val="accent1"/>
-          </a:lnRef>
-          <a:fillRef idx="3">
-            <a:schemeClr val="accent1"/>
-          </a:fillRef>
-          <a:effectRef idx="2">
-            <a:schemeClr val="accent1"/>
-          </a:effectRef>
-          <a:fontRef idx="minor">
-            <a:schemeClr val="lt1"/>
-          </a:fontRef>
-        </p:style>
-        <p:txBody>
-          <a:bodyPr rtlCol="0" anchor="ctr"/>
-          <a:lstStyle/>
-          <a:p>
-            <a:pPr algn="ctr"/>
-          </a:p>
-        </p:txBody>
-      </p:sp>
-      <p:sp>
-        <p:nvSpPr>
-          <p:cNvPr id="37" name="Rectangle 36"/>
-          <p:cNvSpPr/>
-          <p:nvPr/>
-        </p:nvSpPr>
-        <p:spPr>
-          <a:xfrm>
-            <a:off x="9281159" y="4425696"/>
-            <a:ext cx="868680" cy="560069"/>
-          </a:xfrm>
-          <a:prstGeom prst="rect">
-            <a:avLst/>
-          </a:prstGeom>
-          <a:solidFill>
-            <a:srgbClr val="4A7FA5"/>
-          </a:solidFill>
-          <a:ln>
-            <a:noFill/>
-          </a:ln>
-        </p:spPr>
-        <p:style>
-          <a:lnRef idx="1">
-            <a:schemeClr val="accent1"/>
-          </a:lnRef>
-          <a:fillRef idx="3">
-            <a:schemeClr val="accent1"/>
-          </a:fillRef>
-          <a:effectRef idx="2">
-            <a:schemeClr val="accent1"/>
-          </a:effectRef>
-          <a:fontRef idx="minor">
-            <a:schemeClr val="lt1"/>
-          </a:fontRef>
-        </p:style>
-        <p:txBody>
-          <a:bodyPr rtlCol="0" anchor="ctr"/>
-          <a:lstStyle/>
-          <a:p>
-            <a:pPr algn="ctr"/>
-          </a:p>
-        </p:txBody>
-      </p:sp>
-      <p:sp>
-        <p:nvSpPr>
-          <p:cNvPr id="38" name="Rectangle 37"/>
-          <p:cNvSpPr/>
-          <p:nvPr/>
-        </p:nvSpPr>
-        <p:spPr>
-          <a:xfrm>
-            <a:off x="9281159" y="4105656"/>
-            <a:ext cx="868680" cy="320040"/>
-          </a:xfrm>
-          <a:prstGeom prst="rect">
-            <a:avLst/>
-          </a:prstGeom>
-          <a:solidFill>
-            <a:srgbClr val="CB6B52"/>
-          </a:solidFill>
-          <a:ln>
-            <a:noFill/>
-          </a:ln>
-        </p:spPr>
-        <p:style>
-          <a:lnRef idx="1">
-            <a:schemeClr val="accent1"/>
-          </a:lnRef>
-          <a:fillRef idx="3">
-            <a:schemeClr val="accent1"/>
-          </a:fillRef>
-          <a:effectRef idx="2">
-            <a:schemeClr val="accent1"/>
-          </a:effectRef>
-          <a:fontRef idx="minor">
-            <a:schemeClr val="lt1"/>
-          </a:fontRef>
-        </p:style>
-        <p:txBody>
-          <a:bodyPr rtlCol="0" anchor="ctr"/>
-          <a:lstStyle/>
-          <a:p>
-            <a:pPr algn="ctr"/>
-          </a:p>
-        </p:txBody>
-      </p:sp>
-      <p:sp>
-        <p:nvSpPr>
-          <p:cNvPr id="39" name="Rectangle 38"/>
-          <p:cNvSpPr/>
-          <p:nvPr/>
-        </p:nvSpPr>
-        <p:spPr>
-          <a:xfrm>
-            <a:off x="9281159" y="3913631"/>
-            <a:ext cx="868680" cy="192024"/>
-          </a:xfrm>
-          <a:prstGeom prst="rect">
-            <a:avLst/>
-          </a:prstGeom>
-          <a:solidFill>
-            <a:srgbClr val="7B6EAA"/>
-          </a:solidFill>
-          <a:ln>
-            <a:noFill/>
-          </a:ln>
-        </p:spPr>
-        <p:style>
-          <a:lnRef idx="1">
-            <a:schemeClr val="accent1"/>
-          </a:lnRef>
-          <a:fillRef idx="3">
-            <a:schemeClr val="accent1"/>
-          </a:fillRef>
-          <a:effectRef idx="2">
-            <a:schemeClr val="accent1"/>
-          </a:effectRef>
-          <a:fontRef idx="minor">
-            <a:schemeClr val="lt1"/>
-          </a:fontRef>
-        </p:style>
-        <p:txBody>
-          <a:bodyPr rtlCol="0" anchor="ctr"/>
-          <a:lstStyle/>
-          <a:p>
-            <a:pPr algn="ctr"/>
-          </a:p>
-        </p:txBody>
-      </p:sp>
-      <p:sp>
-        <p:nvSpPr>
-          <p:cNvPr id="40" name="Rectangle 39"/>
-          <p:cNvSpPr/>
-          <p:nvPr/>
-        </p:nvSpPr>
-        <p:spPr>
-          <a:xfrm>
-            <a:off x="9281159" y="3785615"/>
-            <a:ext cx="868680" cy="128016"/>
-          </a:xfrm>
-          <a:prstGeom prst="rect">
-            <a:avLst/>
-          </a:prstGeom>
-          <a:solidFill>
-            <a:srgbClr val="4F9A60"/>
-          </a:solidFill>
-          <a:ln>
-            <a:noFill/>
-          </a:ln>
-        </p:spPr>
-        <p:style>
-          <a:lnRef idx="1">
-            <a:schemeClr val="accent1"/>
-          </a:lnRef>
-          <a:fillRef idx="3">
-            <a:schemeClr val="accent1"/>
-          </a:fillRef>
-          <a:effectRef idx="2">
-            <a:schemeClr val="accent1"/>
-          </a:effectRef>
-          <a:fontRef idx="minor">
-            <a:schemeClr val="lt1"/>
-          </a:fontRef>
-        </p:style>
-        <p:txBody>
-          <a:bodyPr rtlCol="0" anchor="ctr"/>
-          <a:lstStyle/>
-          <a:p>
-            <a:pPr algn="ctr"/>
-          </a:p>
-        </p:txBody>
-      </p:sp>
-      <p:sp>
-        <p:nvSpPr>
-          <p:cNvPr id="41" name="Rectangle 40"/>
-          <p:cNvSpPr/>
-          <p:nvPr/>
-        </p:nvSpPr>
-        <p:spPr>
-          <a:xfrm>
-            <a:off x="10515600" y="4425696"/>
-            <a:ext cx="868680" cy="960120"/>
-          </a:xfrm>
-          <a:prstGeom prst="rect">
-            <a:avLst/>
-          </a:prstGeom>
-          <a:solidFill>
-            <a:srgbClr val="3D908A"/>
-          </a:solidFill>
-          <a:ln>
-            <a:noFill/>
-          </a:ln>
-        </p:spPr>
-        <p:style>
-          <a:lnRef idx="1">
-            <a:schemeClr val="accent1"/>
-          </a:lnRef>
-          <a:fillRef idx="3">
-            <a:schemeClr val="accent1"/>
-          </a:fillRef>
-          <a:effectRef idx="2">
-            <a:schemeClr val="accent1"/>
-          </a:effectRef>
-          <a:fontRef idx="minor">
-            <a:schemeClr val="lt1"/>
-          </a:fontRef>
-        </p:style>
-        <p:txBody>
-          <a:bodyPr rtlCol="0" anchor="ctr"/>
-          <a:lstStyle/>
-          <a:p>
-            <a:pPr algn="ctr"/>
-          </a:p>
-        </p:txBody>
-      </p:sp>
-      <p:sp>
-        <p:nvSpPr>
-          <p:cNvPr id="42" name="Rectangle 41"/>
-          <p:cNvSpPr/>
-          <p:nvPr/>
-        </p:nvSpPr>
-        <p:spPr>
-          <a:xfrm>
-            <a:off x="10515600" y="4265675"/>
-            <a:ext cx="868680" cy="160020"/>
-          </a:xfrm>
-          <a:prstGeom prst="rect">
-            <a:avLst/>
-          </a:prstGeom>
-          <a:solidFill>
-            <a:srgbClr val="4A7FA5"/>
-          </a:solidFill>
-          <a:ln>
-            <a:noFill/>
-          </a:ln>
-        </p:spPr>
-        <p:style>
-          <a:lnRef idx="1">
-            <a:schemeClr val="accent1"/>
-          </a:lnRef>
-          <a:fillRef idx="3">
-            <a:schemeClr val="accent1"/>
-          </a:fillRef>
-          <a:effectRef idx="2">
-            <a:schemeClr val="accent1"/>
-          </a:effectRef>
-          <a:fontRef idx="minor">
-            <a:schemeClr val="lt1"/>
-          </a:fontRef>
-        </p:style>
-        <p:txBody>
-          <a:bodyPr rtlCol="0" anchor="ctr"/>
-          <a:lstStyle/>
-          <a:p>
-            <a:pPr algn="ctr"/>
-          </a:p>
-        </p:txBody>
-      </p:sp>
-      <p:sp>
-        <p:nvSpPr>
-          <p:cNvPr id="43" name="Rectangle 42"/>
-          <p:cNvSpPr/>
-          <p:nvPr/>
-        </p:nvSpPr>
-        <p:spPr>
-          <a:xfrm>
-            <a:off x="10515600" y="3977639"/>
-            <a:ext cx="868680" cy="288036"/>
-          </a:xfrm>
-          <a:prstGeom prst="rect">
-            <a:avLst/>
-          </a:prstGeom>
-          <a:solidFill>
-            <a:srgbClr val="CB6B52"/>
-          </a:solidFill>
-          <a:ln>
-            <a:noFill/>
-          </a:ln>
-        </p:spPr>
-        <p:style>
-          <a:lnRef idx="1">
-            <a:schemeClr val="accent1"/>
-          </a:lnRef>
-          <a:fillRef idx="3">
-            <a:schemeClr val="accent1"/>
-          </a:fillRef>
-          <a:effectRef idx="2">
-            <a:schemeClr val="accent1"/>
-          </a:effectRef>
-          <a:fontRef idx="minor">
-            <a:schemeClr val="lt1"/>
-          </a:fontRef>
-        </p:style>
-        <p:txBody>
-          <a:bodyPr rtlCol="0" anchor="ctr"/>
-          <a:lstStyle/>
-          <a:p>
-            <a:pPr algn="ctr"/>
-          </a:p>
-        </p:txBody>
-      </p:sp>
-      <p:sp>
-        <p:nvSpPr>
-          <p:cNvPr id="44" name="Rectangle 43"/>
-          <p:cNvSpPr/>
-          <p:nvPr/>
-        </p:nvSpPr>
-        <p:spPr>
-          <a:xfrm>
-            <a:off x="10515600" y="3865626"/>
-            <a:ext cx="868680" cy="112014"/>
-          </a:xfrm>
-          <a:prstGeom prst="rect">
-            <a:avLst/>
-          </a:prstGeom>
-          <a:solidFill>
-            <a:srgbClr val="7B6EAA"/>
-          </a:solidFill>
-          <a:ln>
-            <a:noFill/>
-          </a:ln>
-        </p:spPr>
-        <p:style>
-          <a:lnRef idx="1">
-            <a:schemeClr val="accent1"/>
-          </a:lnRef>
-          <a:fillRef idx="3">
-            <a:schemeClr val="accent1"/>
-          </a:fillRef>
-          <a:effectRef idx="2">
-            <a:schemeClr val="accent1"/>
-          </a:effectRef>
-          <a:fontRef idx="minor">
-            <a:schemeClr val="lt1"/>
-          </a:fontRef>
-        </p:style>
-        <p:txBody>
-          <a:bodyPr rtlCol="0" anchor="ctr"/>
-          <a:lstStyle/>
-          <a:p>
-            <a:pPr algn="ctr"/>
-          </a:p>
-        </p:txBody>
-      </p:sp>
-      <p:sp>
-        <p:nvSpPr>
-          <p:cNvPr id="45" name="Rectangle 44"/>
-          <p:cNvSpPr/>
-          <p:nvPr/>
-        </p:nvSpPr>
-        <p:spPr>
-          <a:xfrm>
-            <a:off x="10515600" y="3785615"/>
-            <a:ext cx="868680" cy="80010"/>
-          </a:xfrm>
-          <a:prstGeom prst="rect">
-            <a:avLst/>
-          </a:prstGeom>
-          <a:solidFill>
-            <a:srgbClr val="4F9A60"/>
-          </a:solidFill>
-          <a:ln>
-            <a:noFill/>
-          </a:ln>
-        </p:spPr>
-        <p:style>
-          <a:lnRef idx="1">
-            <a:schemeClr val="accent1"/>
-          </a:lnRef>
-          <a:fillRef idx="3">
-            <a:schemeClr val="accent1"/>
-          </a:fillRef>
-          <a:effectRef idx="2">
-            <a:schemeClr val="accent1"/>
-          </a:effectRef>
-          <a:fontRef idx="minor">
-            <a:schemeClr val="lt1"/>
-          </a:fontRef>
-        </p:style>
-        <p:txBody>
-          <a:bodyPr rtlCol="0" anchor="ctr"/>
-          <a:lstStyle/>
-          <a:p>
-            <a:pPr algn="ctr"/>
-          </a:p>
-        </p:txBody>
-      </p:sp>
-      <p:sp>
-        <p:nvSpPr>
-          <p:cNvPr id="46" name="TextBox 45"/>
+          <p:cNvPr id="13" name="TextBox 12"/>
           <p:cNvSpPr txBox="1"/>
           <p:nvPr/>
         </p:nvSpPr>
         <p:spPr>
           <a:xfrm>
-            <a:off x="8046719" y="5431536"/>
-            <a:ext cx="868680" cy="228600"/>
+            <a:off x="6190488" y="1499616"/>
+            <a:ext cx="5394960" cy="384048"/>
           </a:xfrm>
           <a:prstGeom prst="rect">
             <a:avLst/>
@@ -9251,28 +8064,156 @@
           </a:bodyPr>
           <a:lstStyle/>
           <a:p>
-            <a:pPr algn="ctr"/>
-            <a:r>
-              <a:rPr sz="900" b="0" i="0">
+            <a:pPr algn="l"/>
+            <a:r>
+              <a:rPr sz="1600" b="1" i="0">
+                <a:solidFill>
+                  <a:srgbClr val="CB6B52"/>
+                </a:solidFill>
+              </a:rPr>
+              <a:t>Beta diversity  ·  Between samples</a:t>
+            </a:r>
+          </a:p>
+        </p:txBody>
+      </p:sp>
+      <p:sp>
+        <p:nvSpPr>
+          <p:cNvPr id="14" name="TextBox 13"/>
+          <p:cNvSpPr txBox="1"/>
+          <p:nvPr/>
+        </p:nvSpPr>
+        <p:spPr>
+          <a:xfrm>
+            <a:off x="6190488" y="2084831"/>
+            <a:ext cx="5394960" cy="2395728"/>
+          </a:xfrm>
+          <a:prstGeom prst="rect">
+            <a:avLst/>
+          </a:prstGeom>
+          <a:noFill/>
+        </p:spPr>
+        <p:txBody>
+          <a:bodyPr wrap="square">
+            <a:spAutoFit/>
+          </a:bodyPr>
+          <a:lstStyle/>
+          <a:p>
+            <a:pPr algn="l"/>
+            <a:r>
+              <a:rPr sz="1300" b="0" i="0">
                 <a:solidFill>
                   <a:srgbClr val="1E3A4A"/>
                 </a:solidFill>
               </a:rPr>
-              <a:t>Sample 1</a:t>
-            </a:r>
-          </a:p>
-        </p:txBody>
-      </p:sp>
-      <p:sp>
-        <p:nvSpPr>
-          <p:cNvPr id="47" name="TextBox 46"/>
+              <a:t>How similar or different are two communities?
+We compare all pairs of samples and project
+them into a 2D plot (PCoA).
+·  Samples close together share a similar
+   microbial composition.
+·  Samples far apart have distinct communities.
+·  Groups that cluster = shared structure.</a:t>
+            </a:r>
+          </a:p>
+        </p:txBody>
+      </p:sp>
+      <p:sp>
+        <p:nvSpPr>
+          <p:cNvPr id="15" name="Rectangle 14"/>
+          <p:cNvSpPr/>
+          <p:nvPr/>
+        </p:nvSpPr>
+        <p:spPr>
+          <a:xfrm>
+            <a:off x="384048" y="4681728"/>
+            <a:ext cx="11411712" cy="1572768"/>
+          </a:xfrm>
+          <a:prstGeom prst="rect">
+            <a:avLst/>
+          </a:prstGeom>
+          <a:solidFill>
+            <a:srgbClr val="FFFFFF"/>
+          </a:solidFill>
+          <a:ln w="12700">
+            <a:solidFill>
+              <a:srgbClr val="E8EDF1"/>
+            </a:solidFill>
+          </a:ln>
+        </p:spPr>
+        <p:style>
+          <a:lnRef idx="1">
+            <a:schemeClr val="accent1"/>
+          </a:lnRef>
+          <a:fillRef idx="3">
+            <a:schemeClr val="accent1"/>
+          </a:fillRef>
+          <a:effectRef idx="2">
+            <a:schemeClr val="accent1"/>
+          </a:effectRef>
+          <a:fontRef idx="minor">
+            <a:schemeClr val="lt1"/>
+          </a:fontRef>
+        </p:style>
+        <p:txBody>
+          <a:bodyPr rtlCol="0" anchor="ctr"/>
+          <a:lstStyle/>
+          <a:p>
+            <a:pPr algn="ctr"/>
+          </a:p>
+        </p:txBody>
+      </p:sp>
+      <p:sp>
+        <p:nvSpPr>
+          <p:cNvPr id="16" name="Rectangle 15"/>
+          <p:cNvSpPr/>
+          <p:nvPr/>
+        </p:nvSpPr>
+        <p:spPr>
+          <a:xfrm>
+            <a:off x="384048" y="4681728"/>
+            <a:ext cx="256032" cy="1572768"/>
+          </a:xfrm>
+          <a:prstGeom prst="rect">
+            <a:avLst/>
+          </a:prstGeom>
+          <a:solidFill>
+            <a:srgbClr val="6E8494"/>
+          </a:solidFill>
+          <a:ln>
+            <a:noFill/>
+          </a:ln>
+        </p:spPr>
+        <p:style>
+          <a:lnRef idx="1">
+            <a:schemeClr val="accent1"/>
+          </a:lnRef>
+          <a:fillRef idx="3">
+            <a:schemeClr val="accent1"/>
+          </a:fillRef>
+          <a:effectRef idx="2">
+            <a:schemeClr val="accent1"/>
+          </a:effectRef>
+          <a:fontRef idx="minor">
+            <a:schemeClr val="lt1"/>
+          </a:fontRef>
+        </p:style>
+        <p:txBody>
+          <a:bodyPr rtlCol="0" anchor="ctr"/>
+          <a:lstStyle/>
+          <a:p>
+            <a:pPr algn="ctr"/>
+          </a:p>
+        </p:txBody>
+      </p:sp>
+      <p:sp>
+        <p:nvSpPr>
+          <p:cNvPr id="17" name="TextBox 16"/>
           <p:cNvSpPr txBox="1"/>
           <p:nvPr/>
         </p:nvSpPr>
         <p:spPr>
           <a:xfrm>
-            <a:off x="9281159" y="5431536"/>
-            <a:ext cx="868680" cy="228600"/>
+            <a:off x="749808" y="4754880"/>
+            <a:ext cx="3657600" cy="347472"/>
           </a:xfrm>
           <a:prstGeom prst="rect">
             <a:avLst/>
@@ -9285,28 +8226,28 @@
           </a:bodyPr>
           <a:lstStyle/>
           <a:p>
-            <a:pPr algn="ctr"/>
-            <a:r>
-              <a:rPr sz="900" b="0" i="0">
+            <a:pPr algn="l"/>
+            <a:r>
+              <a:rPr sz="1400" b="1" i="0">
                 <a:solidFill>
                   <a:srgbClr val="1E3A4A"/>
                 </a:solidFill>
               </a:rPr>
-              <a:t>Sample 2</a:t>
-            </a:r>
-          </a:p>
-        </p:txBody>
-      </p:sp>
-      <p:sp>
-        <p:nvSpPr>
-          <p:cNvPr id="48" name="TextBox 47"/>
+              <a:t>Why rarefaction?</a:t>
+            </a:r>
+          </a:p>
+        </p:txBody>
+      </p:sp>
+      <p:sp>
+        <p:nvSpPr>
+          <p:cNvPr id="18" name="TextBox 17"/>
           <p:cNvSpPr txBox="1"/>
           <p:nvPr/>
         </p:nvSpPr>
         <p:spPr>
           <a:xfrm>
-            <a:off x="10515600" y="5431536"/>
-            <a:ext cx="868680" cy="228600"/>
+            <a:off x="749808" y="5157216"/>
+            <a:ext cx="10789920" cy="841248"/>
           </a:xfrm>
           <a:prstGeom prst="rect">
             <a:avLst/>
@@ -9319,14 +8260,384 @@
           </a:bodyPr>
           <a:lstStyle/>
           <a:p>
-            <a:pPr algn="ctr"/>
-            <a:r>
-              <a:rPr sz="900" b="0" i="0">
+            <a:pPr algn="l"/>
+            <a:r>
+              <a:rPr sz="1300" b="0" i="0">
                 <a:solidFill>
                   <a:srgbClr val="1E3A4A"/>
                 </a:solidFill>
               </a:rPr>
-              <a:t>Sample 3</a:t>
+              <a:t>Different samples often have different numbers of reads — not because of biology, but because of technical variation in sequencing.
+To compare diversity fairly, we subsample all samples down to the same depth before computing any metrics.</a:t>
+            </a:r>
+          </a:p>
+        </p:txBody>
+      </p:sp>
+      <p:sp>
+        <p:nvSpPr>
+          <p:cNvPr id="19" name="Rectangle 18"/>
+          <p:cNvSpPr/>
+          <p:nvPr/>
+        </p:nvSpPr>
+        <p:spPr>
+          <a:xfrm>
+            <a:off x="8686800" y="4754880"/>
+            <a:ext cx="2926080" cy="1371600"/>
+          </a:xfrm>
+          <a:prstGeom prst="rect">
+            <a:avLst/>
+          </a:prstGeom>
+          <a:solidFill>
+            <a:srgbClr val="E8EDF1"/>
+          </a:solidFill>
+          <a:ln>
+            <a:noFill/>
+          </a:ln>
+        </p:spPr>
+        <p:style>
+          <a:lnRef idx="1">
+            <a:schemeClr val="accent1"/>
+          </a:lnRef>
+          <a:fillRef idx="3">
+            <a:schemeClr val="accent1"/>
+          </a:fillRef>
+          <a:effectRef idx="2">
+            <a:schemeClr val="accent1"/>
+          </a:effectRef>
+          <a:fontRef idx="minor">
+            <a:schemeClr val="lt1"/>
+          </a:fontRef>
+        </p:style>
+        <p:txBody>
+          <a:bodyPr rtlCol="0" anchor="ctr"/>
+          <a:lstStyle/>
+          <a:p>
+            <a:pPr algn="ctr"/>
+          </a:p>
+        </p:txBody>
+      </p:sp>
+      <p:sp>
+        <p:nvSpPr>
+          <p:cNvPr id="20" name="TextBox 19"/>
+          <p:cNvSpPr txBox="1"/>
+          <p:nvPr/>
+        </p:nvSpPr>
+        <p:spPr>
+          <a:xfrm>
+            <a:off x="8823960" y="4773168"/>
+            <a:ext cx="2560320" cy="256032"/>
+          </a:xfrm>
+          <a:prstGeom prst="rect">
+            <a:avLst/>
+          </a:prstGeom>
+          <a:noFill/>
+        </p:spPr>
+        <p:txBody>
+          <a:bodyPr wrap="square">
+            <a:spAutoFit/>
+          </a:bodyPr>
+          <a:lstStyle/>
+          <a:p>
+            <a:pPr algn="ctr"/>
+            <a:r>
+              <a:rPr sz="1000" b="0" i="1">
+                <a:solidFill>
+                  <a:srgbClr val="6E8494"/>
+                </a:solidFill>
+              </a:rPr>
+              <a:t>PCoA plot</a:t>
+            </a:r>
+          </a:p>
+        </p:txBody>
+      </p:sp>
+      <p:sp>
+        <p:nvSpPr>
+          <p:cNvPr id="21" name="Oval 20"/>
+          <p:cNvSpPr/>
+          <p:nvPr/>
+        </p:nvSpPr>
+        <p:spPr>
+          <a:xfrm>
+            <a:off x="8942832" y="5239512"/>
+            <a:ext cx="219456" cy="219456"/>
+          </a:xfrm>
+          <a:prstGeom prst="ellipse">
+            <a:avLst/>
+          </a:prstGeom>
+          <a:solidFill>
+            <a:srgbClr val="3D908A"/>
+          </a:solidFill>
+          <a:ln>
+            <a:noFill/>
+          </a:ln>
+        </p:spPr>
+        <p:style>
+          <a:lnRef idx="1">
+            <a:schemeClr val="accent1"/>
+          </a:lnRef>
+          <a:fillRef idx="3">
+            <a:schemeClr val="accent1"/>
+          </a:fillRef>
+          <a:effectRef idx="2">
+            <a:schemeClr val="accent1"/>
+          </a:effectRef>
+          <a:fontRef idx="minor">
+            <a:schemeClr val="lt1"/>
+          </a:fontRef>
+        </p:style>
+        <p:txBody>
+          <a:bodyPr rtlCol="0" anchor="ctr"/>
+          <a:lstStyle/>
+          <a:p>
+            <a:pPr algn="ctr"/>
+          </a:p>
+        </p:txBody>
+      </p:sp>
+      <p:sp>
+        <p:nvSpPr>
+          <p:cNvPr id="22" name="Oval 21"/>
+          <p:cNvSpPr/>
+          <p:nvPr/>
+        </p:nvSpPr>
+        <p:spPr>
+          <a:xfrm>
+            <a:off x="9171432" y="5541264"/>
+            <a:ext cx="219456" cy="219456"/>
+          </a:xfrm>
+          <a:prstGeom prst="ellipse">
+            <a:avLst/>
+          </a:prstGeom>
+          <a:solidFill>
+            <a:srgbClr val="3D908A"/>
+          </a:solidFill>
+          <a:ln>
+            <a:noFill/>
+          </a:ln>
+        </p:spPr>
+        <p:style>
+          <a:lnRef idx="1">
+            <a:schemeClr val="accent1"/>
+          </a:lnRef>
+          <a:fillRef idx="3">
+            <a:schemeClr val="accent1"/>
+          </a:fillRef>
+          <a:effectRef idx="2">
+            <a:schemeClr val="accent1"/>
+          </a:effectRef>
+          <a:fontRef idx="minor">
+            <a:schemeClr val="lt1"/>
+          </a:fontRef>
+        </p:style>
+        <p:txBody>
+          <a:bodyPr rtlCol="0" anchor="ctr"/>
+          <a:lstStyle/>
+          <a:p>
+            <a:pPr algn="ctr"/>
+          </a:p>
+        </p:txBody>
+      </p:sp>
+      <p:sp>
+        <p:nvSpPr>
+          <p:cNvPr id="23" name="Oval 22"/>
+          <p:cNvSpPr/>
+          <p:nvPr/>
+        </p:nvSpPr>
+        <p:spPr>
+          <a:xfrm>
+            <a:off x="9034272" y="5394960"/>
+            <a:ext cx="219456" cy="219456"/>
+          </a:xfrm>
+          <a:prstGeom prst="ellipse">
+            <a:avLst/>
+          </a:prstGeom>
+          <a:solidFill>
+            <a:srgbClr val="3D908A"/>
+          </a:solidFill>
+          <a:ln>
+            <a:noFill/>
+          </a:ln>
+        </p:spPr>
+        <p:style>
+          <a:lnRef idx="1">
+            <a:schemeClr val="accent1"/>
+          </a:lnRef>
+          <a:fillRef idx="3">
+            <a:schemeClr val="accent1"/>
+          </a:fillRef>
+          <a:effectRef idx="2">
+            <a:schemeClr val="accent1"/>
+          </a:effectRef>
+          <a:fontRef idx="minor">
+            <a:schemeClr val="lt1"/>
+          </a:fontRef>
+        </p:style>
+        <p:txBody>
+          <a:bodyPr rtlCol="0" anchor="ctr"/>
+          <a:lstStyle/>
+          <a:p>
+            <a:pPr algn="ctr"/>
+          </a:p>
+        </p:txBody>
+      </p:sp>
+      <p:sp>
+        <p:nvSpPr>
+          <p:cNvPr id="24" name="Oval 23"/>
+          <p:cNvSpPr/>
+          <p:nvPr/>
+        </p:nvSpPr>
+        <p:spPr>
+          <a:xfrm>
+            <a:off x="10314432" y="5513832"/>
+            <a:ext cx="219456" cy="219456"/>
+          </a:xfrm>
+          <a:prstGeom prst="ellipse">
+            <a:avLst/>
+          </a:prstGeom>
+          <a:solidFill>
+            <a:srgbClr val="CB6B52"/>
+          </a:solidFill>
+          <a:ln>
+            <a:noFill/>
+          </a:ln>
+        </p:spPr>
+        <p:style>
+          <a:lnRef idx="1">
+            <a:schemeClr val="accent1"/>
+          </a:lnRef>
+          <a:fillRef idx="3">
+            <a:schemeClr val="accent1"/>
+          </a:fillRef>
+          <a:effectRef idx="2">
+            <a:schemeClr val="accent1"/>
+          </a:effectRef>
+          <a:fontRef idx="minor">
+            <a:schemeClr val="lt1"/>
+          </a:fontRef>
+        </p:style>
+        <p:txBody>
+          <a:bodyPr rtlCol="0" anchor="ctr"/>
+          <a:lstStyle/>
+          <a:p>
+            <a:pPr algn="ctr"/>
+          </a:p>
+        </p:txBody>
+      </p:sp>
+      <p:sp>
+        <p:nvSpPr>
+          <p:cNvPr id="25" name="Oval 24"/>
+          <p:cNvSpPr/>
+          <p:nvPr/>
+        </p:nvSpPr>
+        <p:spPr>
+          <a:xfrm>
+            <a:off x="10497312" y="5833872"/>
+            <a:ext cx="219456" cy="219456"/>
+          </a:xfrm>
+          <a:prstGeom prst="ellipse">
+            <a:avLst/>
+          </a:prstGeom>
+          <a:solidFill>
+            <a:srgbClr val="CB6B52"/>
+          </a:solidFill>
+          <a:ln>
+            <a:noFill/>
+          </a:ln>
+        </p:spPr>
+        <p:style>
+          <a:lnRef idx="1">
+            <a:schemeClr val="accent1"/>
+          </a:lnRef>
+          <a:fillRef idx="3">
+            <a:schemeClr val="accent1"/>
+          </a:fillRef>
+          <a:effectRef idx="2">
+            <a:schemeClr val="accent1"/>
+          </a:effectRef>
+          <a:fontRef idx="minor">
+            <a:schemeClr val="lt1"/>
+          </a:fontRef>
+        </p:style>
+        <p:txBody>
+          <a:bodyPr rtlCol="0" anchor="ctr"/>
+          <a:lstStyle/>
+          <a:p>
+            <a:pPr algn="ctr"/>
+          </a:p>
+        </p:txBody>
+      </p:sp>
+      <p:sp>
+        <p:nvSpPr>
+          <p:cNvPr id="26" name="Oval 25"/>
+          <p:cNvSpPr/>
+          <p:nvPr/>
+        </p:nvSpPr>
+        <p:spPr>
+          <a:xfrm>
+            <a:off x="10360152" y="5330952"/>
+            <a:ext cx="219456" cy="219456"/>
+          </a:xfrm>
+          <a:prstGeom prst="ellipse">
+            <a:avLst/>
+          </a:prstGeom>
+          <a:solidFill>
+            <a:srgbClr val="CB6B52"/>
+          </a:solidFill>
+          <a:ln>
+            <a:noFill/>
+          </a:ln>
+        </p:spPr>
+        <p:style>
+          <a:lnRef idx="1">
+            <a:schemeClr val="accent1"/>
+          </a:lnRef>
+          <a:fillRef idx="3">
+            <a:schemeClr val="accent1"/>
+          </a:fillRef>
+          <a:effectRef idx="2">
+            <a:schemeClr val="accent1"/>
+          </a:effectRef>
+          <a:fontRef idx="minor">
+            <a:schemeClr val="lt1"/>
+          </a:fontRef>
+        </p:style>
+        <p:txBody>
+          <a:bodyPr rtlCol="0" anchor="ctr"/>
+          <a:lstStyle/>
+          <a:p>
+            <a:pPr algn="ctr"/>
+          </a:p>
+        </p:txBody>
+      </p:sp>
+      <p:sp>
+        <p:nvSpPr>
+          <p:cNvPr id="27" name="TextBox 26"/>
+          <p:cNvSpPr txBox="1"/>
+          <p:nvPr/>
+        </p:nvSpPr>
+        <p:spPr>
+          <a:xfrm>
+            <a:off x="8732520" y="5925312"/>
+            <a:ext cx="2834640" cy="228600"/>
+          </a:xfrm>
+          <a:prstGeom prst="rect">
+            <a:avLst/>
+          </a:prstGeom>
+          <a:noFill/>
+        </p:spPr>
+        <p:txBody>
+          <a:bodyPr wrap="square">
+            <a:spAutoFit/>
+          </a:bodyPr>
+          <a:lstStyle/>
+          <a:p>
+            <a:pPr algn="ctr"/>
+            <a:r>
+              <a:rPr sz="1000" b="0" i="0">
+                <a:solidFill>
+                  <a:srgbClr val="6E8494"/>
+                </a:solidFill>
+              </a:rPr>
+              <a:t>● Group A  ● Group B</a:t>
             </a:r>
           </a:p>
         </p:txBody>
@@ -9340,6 +8651,1914 @@
 </file>
 
 <file path=ppt/slides/slide6.xml><?xml version="1.0" encoding="utf-8"?>
+<p:sld xmlns:a="http://schemas.openxmlformats.org/drawingml/2006/main" xmlns:p="http://schemas.openxmlformats.org/presentationml/2006/main" xmlns:r="http://schemas.openxmlformats.org/officeDocument/2006/relationships">
+  <p:cSld>
+    <p:bg>
+      <p:bgPr>
+        <a:solidFill>
+          <a:srgbClr val="FAFBFC"/>
+        </a:solidFill>
+        <a:effectLst/>
+      </p:bgPr>
+    </p:bg>
+    <p:spTree>
+      <p:nvGrpSpPr>
+        <p:cNvPr id="1" name=""/>
+        <p:cNvGrpSpPr/>
+        <p:nvPr/>
+      </p:nvGrpSpPr>
+      <p:grpSpPr/>
+      <p:sp>
+        <p:nvSpPr>
+          <p:cNvPr id="2" name="Rectangle 1"/>
+          <p:cNvSpPr/>
+          <p:nvPr/>
+        </p:nvSpPr>
+        <p:spPr>
+          <a:xfrm>
+            <a:off x="0" y="0"/>
+            <a:ext cx="12188952" cy="1261872"/>
+          </a:xfrm>
+          <a:prstGeom prst="rect">
+            <a:avLst/>
+          </a:prstGeom>
+          <a:solidFill>
+            <a:srgbClr val="FFFFFF"/>
+          </a:solidFill>
+          <a:ln>
+            <a:noFill/>
+          </a:ln>
+        </p:spPr>
+        <p:style>
+          <a:lnRef idx="1">
+            <a:schemeClr val="accent1"/>
+          </a:lnRef>
+          <a:fillRef idx="3">
+            <a:schemeClr val="accent1"/>
+          </a:fillRef>
+          <a:effectRef idx="2">
+            <a:schemeClr val="accent1"/>
+          </a:effectRef>
+          <a:fontRef idx="minor">
+            <a:schemeClr val="lt1"/>
+          </a:fontRef>
+        </p:style>
+        <p:txBody>
+          <a:bodyPr rtlCol="0" anchor="ctr"/>
+          <a:lstStyle/>
+          <a:p>
+            <a:pPr algn="ctr"/>
+          </a:p>
+        </p:txBody>
+      </p:sp>
+      <p:sp>
+        <p:nvSpPr>
+          <p:cNvPr id="3" name="Rectangle 2"/>
+          <p:cNvSpPr/>
+          <p:nvPr/>
+        </p:nvSpPr>
+        <p:spPr>
+          <a:xfrm>
+            <a:off x="0" y="1261872"/>
+            <a:ext cx="12188952" cy="54864"/>
+          </a:xfrm>
+          <a:prstGeom prst="rect">
+            <a:avLst/>
+          </a:prstGeom>
+          <a:solidFill>
+            <a:srgbClr val="7B6EAA"/>
+          </a:solidFill>
+          <a:ln>
+            <a:noFill/>
+          </a:ln>
+        </p:spPr>
+        <p:style>
+          <a:lnRef idx="1">
+            <a:schemeClr val="accent1"/>
+          </a:lnRef>
+          <a:fillRef idx="3">
+            <a:schemeClr val="accent1"/>
+          </a:fillRef>
+          <a:effectRef idx="2">
+            <a:schemeClr val="accent1"/>
+          </a:effectRef>
+          <a:fontRef idx="minor">
+            <a:schemeClr val="lt1"/>
+          </a:fontRef>
+        </p:style>
+        <p:txBody>
+          <a:bodyPr rtlCol="0" anchor="ctr"/>
+          <a:lstStyle/>
+          <a:p>
+            <a:pPr algn="ctr"/>
+          </a:p>
+        </p:txBody>
+      </p:sp>
+      <p:sp>
+        <p:nvSpPr>
+          <p:cNvPr id="4" name="Rectangle 3"/>
+          <p:cNvSpPr/>
+          <p:nvPr/>
+        </p:nvSpPr>
+        <p:spPr>
+          <a:xfrm>
+            <a:off x="0" y="0"/>
+            <a:ext cx="256032" cy="1261872"/>
+          </a:xfrm>
+          <a:prstGeom prst="rect">
+            <a:avLst/>
+          </a:prstGeom>
+          <a:solidFill>
+            <a:srgbClr val="7B6EAA"/>
+          </a:solidFill>
+          <a:ln>
+            <a:noFill/>
+          </a:ln>
+        </p:spPr>
+        <p:style>
+          <a:lnRef idx="1">
+            <a:schemeClr val="accent1"/>
+          </a:lnRef>
+          <a:fillRef idx="3">
+            <a:schemeClr val="accent1"/>
+          </a:fillRef>
+          <a:effectRef idx="2">
+            <a:schemeClr val="accent1"/>
+          </a:effectRef>
+          <a:fontRef idx="minor">
+            <a:schemeClr val="lt1"/>
+          </a:fontRef>
+        </p:style>
+        <p:txBody>
+          <a:bodyPr rtlCol="0" anchor="ctr"/>
+          <a:lstStyle/>
+          <a:p>
+            <a:pPr algn="ctr"/>
+          </a:p>
+        </p:txBody>
+      </p:sp>
+      <p:sp>
+        <p:nvSpPr>
+          <p:cNvPr id="5" name="TextBox 4"/>
+          <p:cNvSpPr txBox="1"/>
+          <p:nvPr/>
+        </p:nvSpPr>
+        <p:spPr>
+          <a:xfrm>
+            <a:off x="384048" y="91440"/>
+            <a:ext cx="10972800" cy="658368"/>
+          </a:xfrm>
+          <a:prstGeom prst="rect">
+            <a:avLst/>
+          </a:prstGeom>
+          <a:noFill/>
+        </p:spPr>
+        <p:txBody>
+          <a:bodyPr wrap="square">
+            <a:spAutoFit/>
+          </a:bodyPr>
+          <a:lstStyle/>
+          <a:p>
+            <a:pPr algn="l"/>
+            <a:r>
+              <a:rPr sz="3400" b="1" i="0">
+                <a:solidFill>
+                  <a:srgbClr val="1E3A4A"/>
+                </a:solidFill>
+              </a:rPr>
+              <a:t>Putting Names to Sequences</a:t>
+            </a:r>
+          </a:p>
+        </p:txBody>
+      </p:sp>
+      <p:sp>
+        <p:nvSpPr>
+          <p:cNvPr id="6" name="TextBox 5"/>
+          <p:cNvSpPr txBox="1"/>
+          <p:nvPr/>
+        </p:nvSpPr>
+        <p:spPr>
+          <a:xfrm>
+            <a:off x="384048" y="749808"/>
+            <a:ext cx="10972800" cy="384048"/>
+          </a:xfrm>
+          <a:prstGeom prst="rect">
+            <a:avLst/>
+          </a:prstGeom>
+          <a:noFill/>
+        </p:spPr>
+        <p:txBody>
+          <a:bodyPr wrap="square">
+            <a:spAutoFit/>
+          </a:bodyPr>
+          <a:lstStyle/>
+          <a:p>
+            <a:pPr algn="l"/>
+            <a:r>
+              <a:rPr sz="1500" b="0" i="1">
+                <a:solidFill>
+                  <a:srgbClr val="6E8494"/>
+                </a:solidFill>
+              </a:rPr>
+              <a:t>Matching each unique sequence against a curated reference database</a:t>
+            </a:r>
+          </a:p>
+        </p:txBody>
+      </p:sp>
+      <p:sp>
+        <p:nvSpPr>
+          <p:cNvPr id="7" name="Rectangle 6"/>
+          <p:cNvSpPr/>
+          <p:nvPr/>
+        </p:nvSpPr>
+        <p:spPr>
+          <a:xfrm>
+            <a:off x="502920" y="1481328"/>
+            <a:ext cx="2606040" cy="1737360"/>
+          </a:xfrm>
+          <a:prstGeom prst="rect">
+            <a:avLst/>
+          </a:prstGeom>
+          <a:solidFill>
+            <a:srgbClr val="FFFFFF"/>
+          </a:solidFill>
+          <a:ln w="25400">
+            <a:solidFill>
+              <a:srgbClr val="D5CFEE"/>
+            </a:solidFill>
+          </a:ln>
+        </p:spPr>
+        <p:style>
+          <a:lnRef idx="1">
+            <a:schemeClr val="accent1"/>
+          </a:lnRef>
+          <a:fillRef idx="3">
+            <a:schemeClr val="accent1"/>
+          </a:fillRef>
+          <a:effectRef idx="2">
+            <a:schemeClr val="accent1"/>
+          </a:effectRef>
+          <a:fontRef idx="minor">
+            <a:schemeClr val="lt1"/>
+          </a:fontRef>
+        </p:style>
+        <p:txBody>
+          <a:bodyPr rtlCol="0" anchor="ctr"/>
+          <a:lstStyle/>
+          <a:p>
+            <a:pPr algn="ctr"/>
+          </a:p>
+        </p:txBody>
+      </p:sp>
+      <p:sp>
+        <p:nvSpPr>
+          <p:cNvPr id="8" name="Rectangle 7"/>
+          <p:cNvSpPr/>
+          <p:nvPr/>
+        </p:nvSpPr>
+        <p:spPr>
+          <a:xfrm>
+            <a:off x="502920" y="1481328"/>
+            <a:ext cx="2606040" cy="530352"/>
+          </a:xfrm>
+          <a:prstGeom prst="rect">
+            <a:avLst/>
+          </a:prstGeom>
+          <a:solidFill>
+            <a:srgbClr val="D5CFEE"/>
+          </a:solidFill>
+          <a:ln>
+            <a:noFill/>
+          </a:ln>
+        </p:spPr>
+        <p:style>
+          <a:lnRef idx="1">
+            <a:schemeClr val="accent1"/>
+          </a:lnRef>
+          <a:fillRef idx="3">
+            <a:schemeClr val="accent1"/>
+          </a:fillRef>
+          <a:effectRef idx="2">
+            <a:schemeClr val="accent1"/>
+          </a:effectRef>
+          <a:fontRef idx="minor">
+            <a:schemeClr val="lt1"/>
+          </a:fontRef>
+        </p:style>
+        <p:txBody>
+          <a:bodyPr rtlCol="0" anchor="ctr"/>
+          <a:lstStyle/>
+          <a:p>
+            <a:pPr algn="ctr"/>
+          </a:p>
+        </p:txBody>
+      </p:sp>
+      <p:sp>
+        <p:nvSpPr>
+          <p:cNvPr id="9" name="TextBox 8"/>
+          <p:cNvSpPr txBox="1"/>
+          <p:nvPr/>
+        </p:nvSpPr>
+        <p:spPr>
+          <a:xfrm>
+            <a:off x="612648" y="1527048"/>
+            <a:ext cx="2377440" cy="457200"/>
+          </a:xfrm>
+          <a:prstGeom prst="rect">
+            <a:avLst/>
+          </a:prstGeom>
+          <a:noFill/>
+        </p:spPr>
+        <p:txBody>
+          <a:bodyPr wrap="square">
+            <a:spAutoFit/>
+          </a:bodyPr>
+          <a:lstStyle/>
+          <a:p>
+            <a:pPr algn="ctr"/>
+            <a:r>
+              <a:rPr sz="1400" b="1" i="0">
+                <a:solidFill>
+                  <a:srgbClr val="7B6EAA"/>
+                </a:solidFill>
+              </a:rPr>
+              <a:t>Unique
+sequences</a:t>
+            </a:r>
+          </a:p>
+        </p:txBody>
+      </p:sp>
+      <p:sp>
+        <p:nvSpPr>
+          <p:cNvPr id="10" name="TextBox 9"/>
+          <p:cNvSpPr txBox="1"/>
+          <p:nvPr/>
+        </p:nvSpPr>
+        <p:spPr>
+          <a:xfrm>
+            <a:off x="612648" y="2084831"/>
+            <a:ext cx="2377440" cy="1024128"/>
+          </a:xfrm>
+          <a:prstGeom prst="rect">
+            <a:avLst/>
+          </a:prstGeom>
+          <a:noFill/>
+        </p:spPr>
+        <p:txBody>
+          <a:bodyPr wrap="square">
+            <a:spAutoFit/>
+          </a:bodyPr>
+          <a:lstStyle/>
+          <a:p>
+            <a:pPr algn="ctr"/>
+            <a:r>
+              <a:rPr sz="1200" b="0" i="0">
+                <a:solidFill>
+                  <a:srgbClr val="1E3A4A"/>
+                </a:solidFill>
+              </a:rPr>
+              <a:t>Every distinct sequence
+from our samples</a:t>
+            </a:r>
+          </a:p>
+        </p:txBody>
+      </p:sp>
+      <p:cxnSp>
+        <p:nvCxnSpPr>
+          <p:cNvPr id="11" name="Connector 10"/>
+          <p:cNvCxnSpPr/>
+          <p:nvPr/>
+        </p:nvCxnSpPr>
+        <p:spPr>
+          <a:xfrm>
+            <a:off x="3108960" y="2304288"/>
+            <a:ext cx="320040" cy="0"/>
+          </a:xfrm>
+          <a:prstGeom prst="line">
+            <a:avLst/>
+          </a:prstGeom>
+          <a:ln w="25400">
+            <a:solidFill>
+              <a:srgbClr val="7B6EAA"/>
+            </a:solidFill>
+          </a:ln>
+        </p:spPr>
+        <p:style>
+          <a:lnRef idx="2">
+            <a:schemeClr val="accent1"/>
+          </a:lnRef>
+          <a:fillRef idx="0">
+            <a:schemeClr val="accent1"/>
+          </a:fillRef>
+          <a:effectRef idx="1">
+            <a:schemeClr val="accent1"/>
+          </a:effectRef>
+          <a:fontRef idx="minor">
+            <a:schemeClr val="tx1"/>
+          </a:fontRef>
+        </p:style>
+      </p:cxnSp>
+      <p:sp>
+        <p:nvSpPr>
+          <p:cNvPr id="12" name="Rectangle 11"/>
+          <p:cNvSpPr/>
+          <p:nvPr/>
+        </p:nvSpPr>
+        <p:spPr>
+          <a:xfrm>
+            <a:off x="3429000" y="1481328"/>
+            <a:ext cx="2606040" cy="1737360"/>
+          </a:xfrm>
+          <a:prstGeom prst="rect">
+            <a:avLst/>
+          </a:prstGeom>
+          <a:solidFill>
+            <a:srgbClr val="FFFFFF"/>
+          </a:solidFill>
+          <a:ln w="25400">
+            <a:solidFill>
+              <a:srgbClr val="BBD6ED"/>
+            </a:solidFill>
+          </a:ln>
+        </p:spPr>
+        <p:style>
+          <a:lnRef idx="1">
+            <a:schemeClr val="accent1"/>
+          </a:lnRef>
+          <a:fillRef idx="3">
+            <a:schemeClr val="accent1"/>
+          </a:fillRef>
+          <a:effectRef idx="2">
+            <a:schemeClr val="accent1"/>
+          </a:effectRef>
+          <a:fontRef idx="minor">
+            <a:schemeClr val="lt1"/>
+          </a:fontRef>
+        </p:style>
+        <p:txBody>
+          <a:bodyPr rtlCol="0" anchor="ctr"/>
+          <a:lstStyle/>
+          <a:p>
+            <a:pPr algn="ctr"/>
+          </a:p>
+        </p:txBody>
+      </p:sp>
+      <p:sp>
+        <p:nvSpPr>
+          <p:cNvPr id="13" name="Rectangle 12"/>
+          <p:cNvSpPr/>
+          <p:nvPr/>
+        </p:nvSpPr>
+        <p:spPr>
+          <a:xfrm>
+            <a:off x="3429000" y="1481328"/>
+            <a:ext cx="2606040" cy="530352"/>
+          </a:xfrm>
+          <a:prstGeom prst="rect">
+            <a:avLst/>
+          </a:prstGeom>
+          <a:solidFill>
+            <a:srgbClr val="BBD6ED"/>
+          </a:solidFill>
+          <a:ln>
+            <a:noFill/>
+          </a:ln>
+        </p:spPr>
+        <p:style>
+          <a:lnRef idx="1">
+            <a:schemeClr val="accent1"/>
+          </a:lnRef>
+          <a:fillRef idx="3">
+            <a:schemeClr val="accent1"/>
+          </a:fillRef>
+          <a:effectRef idx="2">
+            <a:schemeClr val="accent1"/>
+          </a:effectRef>
+          <a:fontRef idx="minor">
+            <a:schemeClr val="lt1"/>
+          </a:fontRef>
+        </p:style>
+        <p:txBody>
+          <a:bodyPr rtlCol="0" anchor="ctr"/>
+          <a:lstStyle/>
+          <a:p>
+            <a:pPr algn="ctr"/>
+          </a:p>
+        </p:txBody>
+      </p:sp>
+      <p:sp>
+        <p:nvSpPr>
+          <p:cNvPr id="14" name="TextBox 13"/>
+          <p:cNvSpPr txBox="1"/>
+          <p:nvPr/>
+        </p:nvSpPr>
+        <p:spPr>
+          <a:xfrm>
+            <a:off x="3538728" y="1527048"/>
+            <a:ext cx="2377440" cy="457200"/>
+          </a:xfrm>
+          <a:prstGeom prst="rect">
+            <a:avLst/>
+          </a:prstGeom>
+          <a:noFill/>
+        </p:spPr>
+        <p:txBody>
+          <a:bodyPr wrap="square">
+            <a:spAutoFit/>
+          </a:bodyPr>
+          <a:lstStyle/>
+          <a:p>
+            <a:pPr algn="ctr"/>
+            <a:r>
+              <a:rPr sz="1400" b="1" i="0">
+                <a:solidFill>
+                  <a:srgbClr val="4A7FA5"/>
+                </a:solidFill>
+              </a:rPr>
+              <a:t>Reference
+database</a:t>
+            </a:r>
+          </a:p>
+        </p:txBody>
+      </p:sp>
+      <p:sp>
+        <p:nvSpPr>
+          <p:cNvPr id="15" name="TextBox 14"/>
+          <p:cNvSpPr txBox="1"/>
+          <p:nvPr/>
+        </p:nvSpPr>
+        <p:spPr>
+          <a:xfrm>
+            <a:off x="3538728" y="2084831"/>
+            <a:ext cx="2377440" cy="1024128"/>
+          </a:xfrm>
+          <a:prstGeom prst="rect">
+            <a:avLst/>
+          </a:prstGeom>
+          <a:noFill/>
+        </p:spPr>
+        <p:txBody>
+          <a:bodyPr wrap="square">
+            <a:spAutoFit/>
+          </a:bodyPr>
+          <a:lstStyle/>
+          <a:p>
+            <a:pPr algn="ctr"/>
+            <a:r>
+              <a:rPr sz="1200" b="0" i="0">
+                <a:solidFill>
+                  <a:srgbClr val="1E3A4A"/>
+                </a:solidFill>
+              </a:rPr>
+              <a:t>Hundreds of thousands
+of known sequences</a:t>
+            </a:r>
+          </a:p>
+        </p:txBody>
+      </p:sp>
+      <p:cxnSp>
+        <p:nvCxnSpPr>
+          <p:cNvPr id="16" name="Connector 15"/>
+          <p:cNvCxnSpPr/>
+          <p:nvPr/>
+        </p:nvCxnSpPr>
+        <p:spPr>
+          <a:xfrm>
+            <a:off x="6035040" y="2304288"/>
+            <a:ext cx="320040" cy="0"/>
+          </a:xfrm>
+          <a:prstGeom prst="line">
+            <a:avLst/>
+          </a:prstGeom>
+          <a:ln w="25400">
+            <a:solidFill>
+              <a:srgbClr val="4A7FA5"/>
+            </a:solidFill>
+          </a:ln>
+        </p:spPr>
+        <p:style>
+          <a:lnRef idx="2">
+            <a:schemeClr val="accent1"/>
+          </a:lnRef>
+          <a:fillRef idx="0">
+            <a:schemeClr val="accent1"/>
+          </a:fillRef>
+          <a:effectRef idx="1">
+            <a:schemeClr val="accent1"/>
+          </a:effectRef>
+          <a:fontRef idx="minor">
+            <a:schemeClr val="tx1"/>
+          </a:fontRef>
+        </p:style>
+      </p:cxnSp>
+      <p:sp>
+        <p:nvSpPr>
+          <p:cNvPr id="17" name="Rectangle 16"/>
+          <p:cNvSpPr/>
+          <p:nvPr/>
+        </p:nvSpPr>
+        <p:spPr>
+          <a:xfrm>
+            <a:off x="6355080" y="1481328"/>
+            <a:ext cx="2606040" cy="1737360"/>
+          </a:xfrm>
+          <a:prstGeom prst="rect">
+            <a:avLst/>
+          </a:prstGeom>
+          <a:solidFill>
+            <a:srgbClr val="FFFFFF"/>
+          </a:solidFill>
+          <a:ln w="25400">
+            <a:solidFill>
+              <a:srgbClr val="B8DEDB"/>
+            </a:solidFill>
+          </a:ln>
+        </p:spPr>
+        <p:style>
+          <a:lnRef idx="1">
+            <a:schemeClr val="accent1"/>
+          </a:lnRef>
+          <a:fillRef idx="3">
+            <a:schemeClr val="accent1"/>
+          </a:fillRef>
+          <a:effectRef idx="2">
+            <a:schemeClr val="accent1"/>
+          </a:effectRef>
+          <a:fontRef idx="minor">
+            <a:schemeClr val="lt1"/>
+          </a:fontRef>
+        </p:style>
+        <p:txBody>
+          <a:bodyPr rtlCol="0" anchor="ctr"/>
+          <a:lstStyle/>
+          <a:p>
+            <a:pPr algn="ctr"/>
+          </a:p>
+        </p:txBody>
+      </p:sp>
+      <p:sp>
+        <p:nvSpPr>
+          <p:cNvPr id="18" name="Rectangle 17"/>
+          <p:cNvSpPr/>
+          <p:nvPr/>
+        </p:nvSpPr>
+        <p:spPr>
+          <a:xfrm>
+            <a:off x="6355080" y="1481328"/>
+            <a:ext cx="2606040" cy="530352"/>
+          </a:xfrm>
+          <a:prstGeom prst="rect">
+            <a:avLst/>
+          </a:prstGeom>
+          <a:solidFill>
+            <a:srgbClr val="B8DEDB"/>
+          </a:solidFill>
+          <a:ln>
+            <a:noFill/>
+          </a:ln>
+        </p:spPr>
+        <p:style>
+          <a:lnRef idx="1">
+            <a:schemeClr val="accent1"/>
+          </a:lnRef>
+          <a:fillRef idx="3">
+            <a:schemeClr val="accent1"/>
+          </a:fillRef>
+          <a:effectRef idx="2">
+            <a:schemeClr val="accent1"/>
+          </a:effectRef>
+          <a:fontRef idx="minor">
+            <a:schemeClr val="lt1"/>
+          </a:fontRef>
+        </p:style>
+        <p:txBody>
+          <a:bodyPr rtlCol="0" anchor="ctr"/>
+          <a:lstStyle/>
+          <a:p>
+            <a:pPr algn="ctr"/>
+          </a:p>
+        </p:txBody>
+      </p:sp>
+      <p:sp>
+        <p:nvSpPr>
+          <p:cNvPr id="19" name="TextBox 18"/>
+          <p:cNvSpPr txBox="1"/>
+          <p:nvPr/>
+        </p:nvSpPr>
+        <p:spPr>
+          <a:xfrm>
+            <a:off x="6464808" y="1527048"/>
+            <a:ext cx="2377440" cy="457200"/>
+          </a:xfrm>
+          <a:prstGeom prst="rect">
+            <a:avLst/>
+          </a:prstGeom>
+          <a:noFill/>
+        </p:spPr>
+        <p:txBody>
+          <a:bodyPr wrap="square">
+            <a:spAutoFit/>
+          </a:bodyPr>
+          <a:lstStyle/>
+          <a:p>
+            <a:pPr algn="ctr"/>
+            <a:r>
+              <a:rPr sz="1400" b="1" i="0">
+                <a:solidFill>
+                  <a:srgbClr val="3D908A"/>
+                </a:solidFill>
+              </a:rPr>
+              <a:t>Matching
+algorithm</a:t>
+            </a:r>
+          </a:p>
+        </p:txBody>
+      </p:sp>
+      <p:sp>
+        <p:nvSpPr>
+          <p:cNvPr id="20" name="TextBox 19"/>
+          <p:cNvSpPr txBox="1"/>
+          <p:nvPr/>
+        </p:nvSpPr>
+        <p:spPr>
+          <a:xfrm>
+            <a:off x="6464808" y="2084831"/>
+            <a:ext cx="2377440" cy="1024128"/>
+          </a:xfrm>
+          <a:prstGeom prst="rect">
+            <a:avLst/>
+          </a:prstGeom>
+          <a:noFill/>
+        </p:spPr>
+        <p:txBody>
+          <a:bodyPr wrap="square">
+            <a:spAutoFit/>
+          </a:bodyPr>
+          <a:lstStyle/>
+          <a:p>
+            <a:pPr algn="ctr"/>
+            <a:r>
+              <a:rPr sz="1200" b="0" i="0">
+                <a:solidFill>
+                  <a:srgbClr val="1E3A4A"/>
+                </a:solidFill>
+              </a:rPr>
+              <a:t>Statistical classifier
+finds best match</a:t>
+            </a:r>
+          </a:p>
+        </p:txBody>
+      </p:sp>
+      <p:cxnSp>
+        <p:nvCxnSpPr>
+          <p:cNvPr id="21" name="Connector 20"/>
+          <p:cNvCxnSpPr/>
+          <p:nvPr/>
+        </p:nvCxnSpPr>
+        <p:spPr>
+          <a:xfrm>
+            <a:off x="8961120" y="2304288"/>
+            <a:ext cx="320040" cy="0"/>
+          </a:xfrm>
+          <a:prstGeom prst="line">
+            <a:avLst/>
+          </a:prstGeom>
+          <a:ln w="25400">
+            <a:solidFill>
+              <a:srgbClr val="3D908A"/>
+            </a:solidFill>
+          </a:ln>
+        </p:spPr>
+        <p:style>
+          <a:lnRef idx="2">
+            <a:schemeClr val="accent1"/>
+          </a:lnRef>
+          <a:fillRef idx="0">
+            <a:schemeClr val="accent1"/>
+          </a:fillRef>
+          <a:effectRef idx="1">
+            <a:schemeClr val="accent1"/>
+          </a:effectRef>
+          <a:fontRef idx="minor">
+            <a:schemeClr val="tx1"/>
+          </a:fontRef>
+        </p:style>
+      </p:cxnSp>
+      <p:sp>
+        <p:nvSpPr>
+          <p:cNvPr id="22" name="Rectangle 21"/>
+          <p:cNvSpPr/>
+          <p:nvPr/>
+        </p:nvSpPr>
+        <p:spPr>
+          <a:xfrm>
+            <a:off x="9281160" y="1481328"/>
+            <a:ext cx="2606040" cy="1737360"/>
+          </a:xfrm>
+          <a:prstGeom prst="rect">
+            <a:avLst/>
+          </a:prstGeom>
+          <a:solidFill>
+            <a:srgbClr val="FFFFFF"/>
+          </a:solidFill>
+          <a:ln w="25400">
+            <a:solidFill>
+              <a:srgbClr val="C3E6C8"/>
+            </a:solidFill>
+          </a:ln>
+        </p:spPr>
+        <p:style>
+          <a:lnRef idx="1">
+            <a:schemeClr val="accent1"/>
+          </a:lnRef>
+          <a:fillRef idx="3">
+            <a:schemeClr val="accent1"/>
+          </a:fillRef>
+          <a:effectRef idx="2">
+            <a:schemeClr val="accent1"/>
+          </a:effectRef>
+          <a:fontRef idx="minor">
+            <a:schemeClr val="lt1"/>
+          </a:fontRef>
+        </p:style>
+        <p:txBody>
+          <a:bodyPr rtlCol="0" anchor="ctr"/>
+          <a:lstStyle/>
+          <a:p>
+            <a:pPr algn="ctr"/>
+          </a:p>
+        </p:txBody>
+      </p:sp>
+      <p:sp>
+        <p:nvSpPr>
+          <p:cNvPr id="23" name="Rectangle 22"/>
+          <p:cNvSpPr/>
+          <p:nvPr/>
+        </p:nvSpPr>
+        <p:spPr>
+          <a:xfrm>
+            <a:off x="9281160" y="1481328"/>
+            <a:ext cx="2606040" cy="530352"/>
+          </a:xfrm>
+          <a:prstGeom prst="rect">
+            <a:avLst/>
+          </a:prstGeom>
+          <a:solidFill>
+            <a:srgbClr val="C3E6C8"/>
+          </a:solidFill>
+          <a:ln>
+            <a:noFill/>
+          </a:ln>
+        </p:spPr>
+        <p:style>
+          <a:lnRef idx="1">
+            <a:schemeClr val="accent1"/>
+          </a:lnRef>
+          <a:fillRef idx="3">
+            <a:schemeClr val="accent1"/>
+          </a:fillRef>
+          <a:effectRef idx="2">
+            <a:schemeClr val="accent1"/>
+          </a:effectRef>
+          <a:fontRef idx="minor">
+            <a:schemeClr val="lt1"/>
+          </a:fontRef>
+        </p:style>
+        <p:txBody>
+          <a:bodyPr rtlCol="0" anchor="ctr"/>
+          <a:lstStyle/>
+          <a:p>
+            <a:pPr algn="ctr"/>
+          </a:p>
+        </p:txBody>
+      </p:sp>
+      <p:sp>
+        <p:nvSpPr>
+          <p:cNvPr id="24" name="TextBox 23"/>
+          <p:cNvSpPr txBox="1"/>
+          <p:nvPr/>
+        </p:nvSpPr>
+        <p:spPr>
+          <a:xfrm>
+            <a:off x="9390888" y="1527048"/>
+            <a:ext cx="2377440" cy="457200"/>
+          </a:xfrm>
+          <a:prstGeom prst="rect">
+            <a:avLst/>
+          </a:prstGeom>
+          <a:noFill/>
+        </p:spPr>
+        <p:txBody>
+          <a:bodyPr wrap="square">
+            <a:spAutoFit/>
+          </a:bodyPr>
+          <a:lstStyle/>
+          <a:p>
+            <a:pPr algn="ctr"/>
+            <a:r>
+              <a:rPr sz="1400" b="1" i="0">
+                <a:solidFill>
+                  <a:srgbClr val="4F9A60"/>
+                </a:solidFill>
+              </a:rPr>
+              <a:t>Taxonomic
+label</a:t>
+            </a:r>
+          </a:p>
+        </p:txBody>
+      </p:sp>
+      <p:sp>
+        <p:nvSpPr>
+          <p:cNvPr id="25" name="TextBox 24"/>
+          <p:cNvSpPr txBox="1"/>
+          <p:nvPr/>
+        </p:nvSpPr>
+        <p:spPr>
+          <a:xfrm>
+            <a:off x="9390888" y="2084831"/>
+            <a:ext cx="2377440" cy="1024128"/>
+          </a:xfrm>
+          <a:prstGeom prst="rect">
+            <a:avLst/>
+          </a:prstGeom>
+          <a:noFill/>
+        </p:spPr>
+        <p:txBody>
+          <a:bodyPr wrap="square">
+            <a:spAutoFit/>
+          </a:bodyPr>
+          <a:lstStyle/>
+          <a:p>
+            <a:pPr algn="ctr"/>
+            <a:r>
+              <a:rPr sz="1200" b="0" i="0">
+                <a:solidFill>
+                  <a:srgbClr val="1E3A4A"/>
+                </a:solidFill>
+              </a:rPr>
+              <a:t>Domain → Phylum → Class
+→ Order → Family → Genus</a:t>
+            </a:r>
+          </a:p>
+        </p:txBody>
+      </p:sp>
+      <p:sp>
+        <p:nvSpPr>
+          <p:cNvPr id="26" name="Rectangle 25"/>
+          <p:cNvSpPr/>
+          <p:nvPr/>
+        </p:nvSpPr>
+        <p:spPr>
+          <a:xfrm>
+            <a:off x="384048" y="3401568"/>
+            <a:ext cx="11411712" cy="2377440"/>
+          </a:xfrm>
+          <a:prstGeom prst="rect">
+            <a:avLst/>
+          </a:prstGeom>
+          <a:solidFill>
+            <a:srgbClr val="FFFFFF"/>
+          </a:solidFill>
+          <a:ln w="19050">
+            <a:solidFill>
+              <a:srgbClr val="D5CFEE"/>
+            </a:solidFill>
+          </a:ln>
+        </p:spPr>
+        <p:style>
+          <a:lnRef idx="1">
+            <a:schemeClr val="accent1"/>
+          </a:lnRef>
+          <a:fillRef idx="3">
+            <a:schemeClr val="accent1"/>
+          </a:fillRef>
+          <a:effectRef idx="2">
+            <a:schemeClr val="accent1"/>
+          </a:effectRef>
+          <a:fontRef idx="minor">
+            <a:schemeClr val="lt1"/>
+          </a:fontRef>
+        </p:style>
+        <p:txBody>
+          <a:bodyPr rtlCol="0" anchor="ctr"/>
+          <a:lstStyle/>
+          <a:p>
+            <a:pPr algn="ctr"/>
+          </a:p>
+        </p:txBody>
+      </p:sp>
+      <p:sp>
+        <p:nvSpPr>
+          <p:cNvPr id="27" name="Rectangle 26"/>
+          <p:cNvSpPr/>
+          <p:nvPr/>
+        </p:nvSpPr>
+        <p:spPr>
+          <a:xfrm>
+            <a:off x="384048" y="3401568"/>
+            <a:ext cx="256032" cy="2377440"/>
+          </a:xfrm>
+          <a:prstGeom prst="rect">
+            <a:avLst/>
+          </a:prstGeom>
+          <a:solidFill>
+            <a:srgbClr val="7B6EAA"/>
+          </a:solidFill>
+          <a:ln>
+            <a:noFill/>
+          </a:ln>
+        </p:spPr>
+        <p:style>
+          <a:lnRef idx="1">
+            <a:schemeClr val="accent1"/>
+          </a:lnRef>
+          <a:fillRef idx="3">
+            <a:schemeClr val="accent1"/>
+          </a:fillRef>
+          <a:effectRef idx="2">
+            <a:schemeClr val="accent1"/>
+          </a:effectRef>
+          <a:fontRef idx="minor">
+            <a:schemeClr val="lt1"/>
+          </a:fontRef>
+        </p:style>
+        <p:txBody>
+          <a:bodyPr rtlCol="0" anchor="ctr"/>
+          <a:lstStyle/>
+          <a:p>
+            <a:pPr algn="ctr"/>
+          </a:p>
+        </p:txBody>
+      </p:sp>
+      <p:sp>
+        <p:nvSpPr>
+          <p:cNvPr id="28" name="TextBox 27"/>
+          <p:cNvSpPr txBox="1"/>
+          <p:nvPr/>
+        </p:nvSpPr>
+        <p:spPr>
+          <a:xfrm>
+            <a:off x="749808" y="3474720"/>
+            <a:ext cx="5486400" cy="384048"/>
+          </a:xfrm>
+          <a:prstGeom prst="rect">
+            <a:avLst/>
+          </a:prstGeom>
+          <a:noFill/>
+        </p:spPr>
+        <p:txBody>
+          <a:bodyPr wrap="square">
+            <a:spAutoFit/>
+          </a:bodyPr>
+          <a:lstStyle/>
+          <a:p>
+            <a:pPr algn="l"/>
+            <a:r>
+              <a:rPr sz="1600" b="1" i="0">
+                <a:solidFill>
+                  <a:srgbClr val="7B6EAA"/>
+                </a:solidFill>
+              </a:rPr>
+              <a:t>Relative abundance barplot</a:t>
+            </a:r>
+          </a:p>
+        </p:txBody>
+      </p:sp>
+      <p:sp>
+        <p:nvSpPr>
+          <p:cNvPr id="29" name="TextBox 28"/>
+          <p:cNvSpPr txBox="1"/>
+          <p:nvPr/>
+        </p:nvSpPr>
+        <p:spPr>
+          <a:xfrm>
+            <a:off x="749808" y="3950208"/>
+            <a:ext cx="6858000" cy="1645920"/>
+          </a:xfrm>
+          <a:prstGeom prst="rect">
+            <a:avLst/>
+          </a:prstGeom>
+          <a:noFill/>
+        </p:spPr>
+        <p:txBody>
+          <a:bodyPr wrap="square">
+            <a:spAutoFit/>
+          </a:bodyPr>
+          <a:lstStyle/>
+          <a:p>
+            <a:pPr algn="l"/>
+            <a:r>
+              <a:rPr sz="1300" b="0" i="0">
+                <a:solidFill>
+                  <a:srgbClr val="1E3A4A"/>
+                </a:solidFill>
+              </a:rPr>
+              <a:t>Once every sequence has a name, we can visualize the composition
+of each sample as a stacked bar — showing what fraction of the
+community belongs to each group at any taxonomic level.</a:t>
+            </a:r>
+          </a:p>
+        </p:txBody>
+      </p:sp>
+      <p:sp>
+        <p:nvSpPr>
+          <p:cNvPr id="30" name="Rectangle 29"/>
+          <p:cNvSpPr/>
+          <p:nvPr/>
+        </p:nvSpPr>
+        <p:spPr>
+          <a:xfrm>
+            <a:off x="7863840" y="3493008"/>
+            <a:ext cx="4206240" cy="2148840"/>
+          </a:xfrm>
+          <a:prstGeom prst="rect">
+            <a:avLst/>
+          </a:prstGeom>
+          <a:solidFill>
+            <a:srgbClr val="E8EDF1"/>
+          </a:solidFill>
+          <a:ln>
+            <a:noFill/>
+          </a:ln>
+        </p:spPr>
+        <p:style>
+          <a:lnRef idx="1">
+            <a:schemeClr val="accent1"/>
+          </a:lnRef>
+          <a:fillRef idx="3">
+            <a:schemeClr val="accent1"/>
+          </a:fillRef>
+          <a:effectRef idx="2">
+            <a:schemeClr val="accent1"/>
+          </a:effectRef>
+          <a:fontRef idx="minor">
+            <a:schemeClr val="lt1"/>
+          </a:fontRef>
+        </p:style>
+        <p:txBody>
+          <a:bodyPr rtlCol="0" anchor="ctr"/>
+          <a:lstStyle/>
+          <a:p>
+            <a:pPr algn="ctr"/>
+          </a:p>
+        </p:txBody>
+      </p:sp>
+      <p:sp>
+        <p:nvSpPr>
+          <p:cNvPr id="31" name="Rectangle 30"/>
+          <p:cNvSpPr/>
+          <p:nvPr/>
+        </p:nvSpPr>
+        <p:spPr>
+          <a:xfrm>
+            <a:off x="8046719" y="4665726"/>
+            <a:ext cx="868680" cy="720090"/>
+          </a:xfrm>
+          <a:prstGeom prst="rect">
+            <a:avLst/>
+          </a:prstGeom>
+          <a:solidFill>
+            <a:srgbClr val="3D908A"/>
+          </a:solidFill>
+          <a:ln>
+            <a:noFill/>
+          </a:ln>
+        </p:spPr>
+        <p:style>
+          <a:lnRef idx="1">
+            <a:schemeClr val="accent1"/>
+          </a:lnRef>
+          <a:fillRef idx="3">
+            <a:schemeClr val="accent1"/>
+          </a:fillRef>
+          <a:effectRef idx="2">
+            <a:schemeClr val="accent1"/>
+          </a:effectRef>
+          <a:fontRef idx="minor">
+            <a:schemeClr val="lt1"/>
+          </a:fontRef>
+        </p:style>
+        <p:txBody>
+          <a:bodyPr rtlCol="0" anchor="ctr"/>
+          <a:lstStyle/>
+          <a:p>
+            <a:pPr algn="ctr"/>
+          </a:p>
+        </p:txBody>
+      </p:sp>
+      <p:sp>
+        <p:nvSpPr>
+          <p:cNvPr id="32" name="Rectangle 31"/>
+          <p:cNvSpPr/>
+          <p:nvPr/>
+        </p:nvSpPr>
+        <p:spPr>
+          <a:xfrm>
+            <a:off x="8046719" y="4345686"/>
+            <a:ext cx="868680" cy="320040"/>
+          </a:xfrm>
+          <a:prstGeom prst="rect">
+            <a:avLst/>
+          </a:prstGeom>
+          <a:solidFill>
+            <a:srgbClr val="4A7FA5"/>
+          </a:solidFill>
+          <a:ln>
+            <a:noFill/>
+          </a:ln>
+        </p:spPr>
+        <p:style>
+          <a:lnRef idx="1">
+            <a:schemeClr val="accent1"/>
+          </a:lnRef>
+          <a:fillRef idx="3">
+            <a:schemeClr val="accent1"/>
+          </a:fillRef>
+          <a:effectRef idx="2">
+            <a:schemeClr val="accent1"/>
+          </a:effectRef>
+          <a:fontRef idx="minor">
+            <a:schemeClr val="lt1"/>
+          </a:fontRef>
+        </p:style>
+        <p:txBody>
+          <a:bodyPr rtlCol="0" anchor="ctr"/>
+          <a:lstStyle/>
+          <a:p>
+            <a:pPr algn="ctr"/>
+          </a:p>
+        </p:txBody>
+      </p:sp>
+      <p:sp>
+        <p:nvSpPr>
+          <p:cNvPr id="33" name="Rectangle 32"/>
+          <p:cNvSpPr/>
+          <p:nvPr/>
+        </p:nvSpPr>
+        <p:spPr>
+          <a:xfrm>
+            <a:off x="8046719" y="4105655"/>
+            <a:ext cx="868680" cy="240030"/>
+          </a:xfrm>
+          <a:prstGeom prst="rect">
+            <a:avLst/>
+          </a:prstGeom>
+          <a:solidFill>
+            <a:srgbClr val="CB6B52"/>
+          </a:solidFill>
+          <a:ln>
+            <a:noFill/>
+          </a:ln>
+        </p:spPr>
+        <p:style>
+          <a:lnRef idx="1">
+            <a:schemeClr val="accent1"/>
+          </a:lnRef>
+          <a:fillRef idx="3">
+            <a:schemeClr val="accent1"/>
+          </a:fillRef>
+          <a:effectRef idx="2">
+            <a:schemeClr val="accent1"/>
+          </a:effectRef>
+          <a:fontRef idx="minor">
+            <a:schemeClr val="lt1"/>
+          </a:fontRef>
+        </p:style>
+        <p:txBody>
+          <a:bodyPr rtlCol="0" anchor="ctr"/>
+          <a:lstStyle/>
+          <a:p>
+            <a:pPr algn="ctr"/>
+          </a:p>
+        </p:txBody>
+      </p:sp>
+      <p:sp>
+        <p:nvSpPr>
+          <p:cNvPr id="34" name="Rectangle 33"/>
+          <p:cNvSpPr/>
+          <p:nvPr/>
+        </p:nvSpPr>
+        <p:spPr>
+          <a:xfrm>
+            <a:off x="8046719" y="3945635"/>
+            <a:ext cx="868680" cy="160020"/>
+          </a:xfrm>
+          <a:prstGeom prst="rect">
+            <a:avLst/>
+          </a:prstGeom>
+          <a:solidFill>
+            <a:srgbClr val="7B6EAA"/>
+          </a:solidFill>
+          <a:ln>
+            <a:noFill/>
+          </a:ln>
+        </p:spPr>
+        <p:style>
+          <a:lnRef idx="1">
+            <a:schemeClr val="accent1"/>
+          </a:lnRef>
+          <a:fillRef idx="3">
+            <a:schemeClr val="accent1"/>
+          </a:fillRef>
+          <a:effectRef idx="2">
+            <a:schemeClr val="accent1"/>
+          </a:effectRef>
+          <a:fontRef idx="minor">
+            <a:schemeClr val="lt1"/>
+          </a:fontRef>
+        </p:style>
+        <p:txBody>
+          <a:bodyPr rtlCol="0" anchor="ctr"/>
+          <a:lstStyle/>
+          <a:p>
+            <a:pPr algn="ctr"/>
+          </a:p>
+        </p:txBody>
+      </p:sp>
+      <p:sp>
+        <p:nvSpPr>
+          <p:cNvPr id="35" name="Rectangle 34"/>
+          <p:cNvSpPr/>
+          <p:nvPr/>
+        </p:nvSpPr>
+        <p:spPr>
+          <a:xfrm>
+            <a:off x="8046719" y="3785615"/>
+            <a:ext cx="868680" cy="160020"/>
+          </a:xfrm>
+          <a:prstGeom prst="rect">
+            <a:avLst/>
+          </a:prstGeom>
+          <a:solidFill>
+            <a:srgbClr val="4F9A60"/>
+          </a:solidFill>
+          <a:ln>
+            <a:noFill/>
+          </a:ln>
+        </p:spPr>
+        <p:style>
+          <a:lnRef idx="1">
+            <a:schemeClr val="accent1"/>
+          </a:lnRef>
+          <a:fillRef idx="3">
+            <a:schemeClr val="accent1"/>
+          </a:fillRef>
+          <a:effectRef idx="2">
+            <a:schemeClr val="accent1"/>
+          </a:effectRef>
+          <a:fontRef idx="minor">
+            <a:schemeClr val="lt1"/>
+          </a:fontRef>
+        </p:style>
+        <p:txBody>
+          <a:bodyPr rtlCol="0" anchor="ctr"/>
+          <a:lstStyle/>
+          <a:p>
+            <a:pPr algn="ctr"/>
+          </a:p>
+        </p:txBody>
+      </p:sp>
+      <p:sp>
+        <p:nvSpPr>
+          <p:cNvPr id="36" name="Rectangle 35"/>
+          <p:cNvSpPr/>
+          <p:nvPr/>
+        </p:nvSpPr>
+        <p:spPr>
+          <a:xfrm>
+            <a:off x="9281159" y="4985766"/>
+            <a:ext cx="868680" cy="400050"/>
+          </a:xfrm>
+          <a:prstGeom prst="rect">
+            <a:avLst/>
+          </a:prstGeom>
+          <a:solidFill>
+            <a:srgbClr val="3D908A"/>
+          </a:solidFill>
+          <a:ln>
+            <a:noFill/>
+          </a:ln>
+        </p:spPr>
+        <p:style>
+          <a:lnRef idx="1">
+            <a:schemeClr val="accent1"/>
+          </a:lnRef>
+          <a:fillRef idx="3">
+            <a:schemeClr val="accent1"/>
+          </a:fillRef>
+          <a:effectRef idx="2">
+            <a:schemeClr val="accent1"/>
+          </a:effectRef>
+          <a:fontRef idx="minor">
+            <a:schemeClr val="lt1"/>
+          </a:fontRef>
+        </p:style>
+        <p:txBody>
+          <a:bodyPr rtlCol="0" anchor="ctr"/>
+          <a:lstStyle/>
+          <a:p>
+            <a:pPr algn="ctr"/>
+          </a:p>
+        </p:txBody>
+      </p:sp>
+      <p:sp>
+        <p:nvSpPr>
+          <p:cNvPr id="37" name="Rectangle 36"/>
+          <p:cNvSpPr/>
+          <p:nvPr/>
+        </p:nvSpPr>
+        <p:spPr>
+          <a:xfrm>
+            <a:off x="9281159" y="4425696"/>
+            <a:ext cx="868680" cy="560069"/>
+          </a:xfrm>
+          <a:prstGeom prst="rect">
+            <a:avLst/>
+          </a:prstGeom>
+          <a:solidFill>
+            <a:srgbClr val="4A7FA5"/>
+          </a:solidFill>
+          <a:ln>
+            <a:noFill/>
+          </a:ln>
+        </p:spPr>
+        <p:style>
+          <a:lnRef idx="1">
+            <a:schemeClr val="accent1"/>
+          </a:lnRef>
+          <a:fillRef idx="3">
+            <a:schemeClr val="accent1"/>
+          </a:fillRef>
+          <a:effectRef idx="2">
+            <a:schemeClr val="accent1"/>
+          </a:effectRef>
+          <a:fontRef idx="minor">
+            <a:schemeClr val="lt1"/>
+          </a:fontRef>
+        </p:style>
+        <p:txBody>
+          <a:bodyPr rtlCol="0" anchor="ctr"/>
+          <a:lstStyle/>
+          <a:p>
+            <a:pPr algn="ctr"/>
+          </a:p>
+        </p:txBody>
+      </p:sp>
+      <p:sp>
+        <p:nvSpPr>
+          <p:cNvPr id="38" name="Rectangle 37"/>
+          <p:cNvSpPr/>
+          <p:nvPr/>
+        </p:nvSpPr>
+        <p:spPr>
+          <a:xfrm>
+            <a:off x="9281159" y="4105656"/>
+            <a:ext cx="868680" cy="320040"/>
+          </a:xfrm>
+          <a:prstGeom prst="rect">
+            <a:avLst/>
+          </a:prstGeom>
+          <a:solidFill>
+            <a:srgbClr val="CB6B52"/>
+          </a:solidFill>
+          <a:ln>
+            <a:noFill/>
+          </a:ln>
+        </p:spPr>
+        <p:style>
+          <a:lnRef idx="1">
+            <a:schemeClr val="accent1"/>
+          </a:lnRef>
+          <a:fillRef idx="3">
+            <a:schemeClr val="accent1"/>
+          </a:fillRef>
+          <a:effectRef idx="2">
+            <a:schemeClr val="accent1"/>
+          </a:effectRef>
+          <a:fontRef idx="minor">
+            <a:schemeClr val="lt1"/>
+          </a:fontRef>
+        </p:style>
+        <p:txBody>
+          <a:bodyPr rtlCol="0" anchor="ctr"/>
+          <a:lstStyle/>
+          <a:p>
+            <a:pPr algn="ctr"/>
+          </a:p>
+        </p:txBody>
+      </p:sp>
+      <p:sp>
+        <p:nvSpPr>
+          <p:cNvPr id="39" name="Rectangle 38"/>
+          <p:cNvSpPr/>
+          <p:nvPr/>
+        </p:nvSpPr>
+        <p:spPr>
+          <a:xfrm>
+            <a:off x="9281159" y="3913631"/>
+            <a:ext cx="868680" cy="192024"/>
+          </a:xfrm>
+          <a:prstGeom prst="rect">
+            <a:avLst/>
+          </a:prstGeom>
+          <a:solidFill>
+            <a:srgbClr val="7B6EAA"/>
+          </a:solidFill>
+          <a:ln>
+            <a:noFill/>
+          </a:ln>
+        </p:spPr>
+        <p:style>
+          <a:lnRef idx="1">
+            <a:schemeClr val="accent1"/>
+          </a:lnRef>
+          <a:fillRef idx="3">
+            <a:schemeClr val="accent1"/>
+          </a:fillRef>
+          <a:effectRef idx="2">
+            <a:schemeClr val="accent1"/>
+          </a:effectRef>
+          <a:fontRef idx="minor">
+            <a:schemeClr val="lt1"/>
+          </a:fontRef>
+        </p:style>
+        <p:txBody>
+          <a:bodyPr rtlCol="0" anchor="ctr"/>
+          <a:lstStyle/>
+          <a:p>
+            <a:pPr algn="ctr"/>
+          </a:p>
+        </p:txBody>
+      </p:sp>
+      <p:sp>
+        <p:nvSpPr>
+          <p:cNvPr id="40" name="Rectangle 39"/>
+          <p:cNvSpPr/>
+          <p:nvPr/>
+        </p:nvSpPr>
+        <p:spPr>
+          <a:xfrm>
+            <a:off x="9281159" y="3785615"/>
+            <a:ext cx="868680" cy="128016"/>
+          </a:xfrm>
+          <a:prstGeom prst="rect">
+            <a:avLst/>
+          </a:prstGeom>
+          <a:solidFill>
+            <a:srgbClr val="4F9A60"/>
+          </a:solidFill>
+          <a:ln>
+            <a:noFill/>
+          </a:ln>
+        </p:spPr>
+        <p:style>
+          <a:lnRef idx="1">
+            <a:schemeClr val="accent1"/>
+          </a:lnRef>
+          <a:fillRef idx="3">
+            <a:schemeClr val="accent1"/>
+          </a:fillRef>
+          <a:effectRef idx="2">
+            <a:schemeClr val="accent1"/>
+          </a:effectRef>
+          <a:fontRef idx="minor">
+            <a:schemeClr val="lt1"/>
+          </a:fontRef>
+        </p:style>
+        <p:txBody>
+          <a:bodyPr rtlCol="0" anchor="ctr"/>
+          <a:lstStyle/>
+          <a:p>
+            <a:pPr algn="ctr"/>
+          </a:p>
+        </p:txBody>
+      </p:sp>
+      <p:sp>
+        <p:nvSpPr>
+          <p:cNvPr id="41" name="Rectangle 40"/>
+          <p:cNvSpPr/>
+          <p:nvPr/>
+        </p:nvSpPr>
+        <p:spPr>
+          <a:xfrm>
+            <a:off x="10515600" y="4425696"/>
+            <a:ext cx="868680" cy="960120"/>
+          </a:xfrm>
+          <a:prstGeom prst="rect">
+            <a:avLst/>
+          </a:prstGeom>
+          <a:solidFill>
+            <a:srgbClr val="3D908A"/>
+          </a:solidFill>
+          <a:ln>
+            <a:noFill/>
+          </a:ln>
+        </p:spPr>
+        <p:style>
+          <a:lnRef idx="1">
+            <a:schemeClr val="accent1"/>
+          </a:lnRef>
+          <a:fillRef idx="3">
+            <a:schemeClr val="accent1"/>
+          </a:fillRef>
+          <a:effectRef idx="2">
+            <a:schemeClr val="accent1"/>
+          </a:effectRef>
+          <a:fontRef idx="minor">
+            <a:schemeClr val="lt1"/>
+          </a:fontRef>
+        </p:style>
+        <p:txBody>
+          <a:bodyPr rtlCol="0" anchor="ctr"/>
+          <a:lstStyle/>
+          <a:p>
+            <a:pPr algn="ctr"/>
+          </a:p>
+        </p:txBody>
+      </p:sp>
+      <p:sp>
+        <p:nvSpPr>
+          <p:cNvPr id="42" name="Rectangle 41"/>
+          <p:cNvSpPr/>
+          <p:nvPr/>
+        </p:nvSpPr>
+        <p:spPr>
+          <a:xfrm>
+            <a:off x="10515600" y="4265675"/>
+            <a:ext cx="868680" cy="160020"/>
+          </a:xfrm>
+          <a:prstGeom prst="rect">
+            <a:avLst/>
+          </a:prstGeom>
+          <a:solidFill>
+            <a:srgbClr val="4A7FA5"/>
+          </a:solidFill>
+          <a:ln>
+            <a:noFill/>
+          </a:ln>
+        </p:spPr>
+        <p:style>
+          <a:lnRef idx="1">
+            <a:schemeClr val="accent1"/>
+          </a:lnRef>
+          <a:fillRef idx="3">
+            <a:schemeClr val="accent1"/>
+          </a:fillRef>
+          <a:effectRef idx="2">
+            <a:schemeClr val="accent1"/>
+          </a:effectRef>
+          <a:fontRef idx="minor">
+            <a:schemeClr val="lt1"/>
+          </a:fontRef>
+        </p:style>
+        <p:txBody>
+          <a:bodyPr rtlCol="0" anchor="ctr"/>
+          <a:lstStyle/>
+          <a:p>
+            <a:pPr algn="ctr"/>
+          </a:p>
+        </p:txBody>
+      </p:sp>
+      <p:sp>
+        <p:nvSpPr>
+          <p:cNvPr id="43" name="Rectangle 42"/>
+          <p:cNvSpPr/>
+          <p:nvPr/>
+        </p:nvSpPr>
+        <p:spPr>
+          <a:xfrm>
+            <a:off x="10515600" y="3977639"/>
+            <a:ext cx="868680" cy="288036"/>
+          </a:xfrm>
+          <a:prstGeom prst="rect">
+            <a:avLst/>
+          </a:prstGeom>
+          <a:solidFill>
+            <a:srgbClr val="CB6B52"/>
+          </a:solidFill>
+          <a:ln>
+            <a:noFill/>
+          </a:ln>
+        </p:spPr>
+        <p:style>
+          <a:lnRef idx="1">
+            <a:schemeClr val="accent1"/>
+          </a:lnRef>
+          <a:fillRef idx="3">
+            <a:schemeClr val="accent1"/>
+          </a:fillRef>
+          <a:effectRef idx="2">
+            <a:schemeClr val="accent1"/>
+          </a:effectRef>
+          <a:fontRef idx="minor">
+            <a:schemeClr val="lt1"/>
+          </a:fontRef>
+        </p:style>
+        <p:txBody>
+          <a:bodyPr rtlCol="0" anchor="ctr"/>
+          <a:lstStyle/>
+          <a:p>
+            <a:pPr algn="ctr"/>
+          </a:p>
+        </p:txBody>
+      </p:sp>
+      <p:sp>
+        <p:nvSpPr>
+          <p:cNvPr id="44" name="Rectangle 43"/>
+          <p:cNvSpPr/>
+          <p:nvPr/>
+        </p:nvSpPr>
+        <p:spPr>
+          <a:xfrm>
+            <a:off x="10515600" y="3865626"/>
+            <a:ext cx="868680" cy="112014"/>
+          </a:xfrm>
+          <a:prstGeom prst="rect">
+            <a:avLst/>
+          </a:prstGeom>
+          <a:solidFill>
+            <a:srgbClr val="7B6EAA"/>
+          </a:solidFill>
+          <a:ln>
+            <a:noFill/>
+          </a:ln>
+        </p:spPr>
+        <p:style>
+          <a:lnRef idx="1">
+            <a:schemeClr val="accent1"/>
+          </a:lnRef>
+          <a:fillRef idx="3">
+            <a:schemeClr val="accent1"/>
+          </a:fillRef>
+          <a:effectRef idx="2">
+            <a:schemeClr val="accent1"/>
+          </a:effectRef>
+          <a:fontRef idx="minor">
+            <a:schemeClr val="lt1"/>
+          </a:fontRef>
+        </p:style>
+        <p:txBody>
+          <a:bodyPr rtlCol="0" anchor="ctr"/>
+          <a:lstStyle/>
+          <a:p>
+            <a:pPr algn="ctr"/>
+          </a:p>
+        </p:txBody>
+      </p:sp>
+      <p:sp>
+        <p:nvSpPr>
+          <p:cNvPr id="45" name="Rectangle 44"/>
+          <p:cNvSpPr/>
+          <p:nvPr/>
+        </p:nvSpPr>
+        <p:spPr>
+          <a:xfrm>
+            <a:off x="10515600" y="3785615"/>
+            <a:ext cx="868680" cy="80010"/>
+          </a:xfrm>
+          <a:prstGeom prst="rect">
+            <a:avLst/>
+          </a:prstGeom>
+          <a:solidFill>
+            <a:srgbClr val="4F9A60"/>
+          </a:solidFill>
+          <a:ln>
+            <a:noFill/>
+          </a:ln>
+        </p:spPr>
+        <p:style>
+          <a:lnRef idx="1">
+            <a:schemeClr val="accent1"/>
+          </a:lnRef>
+          <a:fillRef idx="3">
+            <a:schemeClr val="accent1"/>
+          </a:fillRef>
+          <a:effectRef idx="2">
+            <a:schemeClr val="accent1"/>
+          </a:effectRef>
+          <a:fontRef idx="minor">
+            <a:schemeClr val="lt1"/>
+          </a:fontRef>
+        </p:style>
+        <p:txBody>
+          <a:bodyPr rtlCol="0" anchor="ctr"/>
+          <a:lstStyle/>
+          <a:p>
+            <a:pPr algn="ctr"/>
+          </a:p>
+        </p:txBody>
+      </p:sp>
+      <p:sp>
+        <p:nvSpPr>
+          <p:cNvPr id="46" name="TextBox 45"/>
+          <p:cNvSpPr txBox="1"/>
+          <p:nvPr/>
+        </p:nvSpPr>
+        <p:spPr>
+          <a:xfrm>
+            <a:off x="8046719" y="5431536"/>
+            <a:ext cx="868680" cy="228600"/>
+          </a:xfrm>
+          <a:prstGeom prst="rect">
+            <a:avLst/>
+          </a:prstGeom>
+          <a:noFill/>
+        </p:spPr>
+        <p:txBody>
+          <a:bodyPr wrap="square">
+            <a:spAutoFit/>
+          </a:bodyPr>
+          <a:lstStyle/>
+          <a:p>
+            <a:pPr algn="ctr"/>
+            <a:r>
+              <a:rPr sz="900" b="0" i="0">
+                <a:solidFill>
+                  <a:srgbClr val="1E3A4A"/>
+                </a:solidFill>
+              </a:rPr>
+              <a:t>Sample 1</a:t>
+            </a:r>
+          </a:p>
+        </p:txBody>
+      </p:sp>
+      <p:sp>
+        <p:nvSpPr>
+          <p:cNvPr id="47" name="TextBox 46"/>
+          <p:cNvSpPr txBox="1"/>
+          <p:nvPr/>
+        </p:nvSpPr>
+        <p:spPr>
+          <a:xfrm>
+            <a:off x="9281159" y="5431536"/>
+            <a:ext cx="868680" cy="228600"/>
+          </a:xfrm>
+          <a:prstGeom prst="rect">
+            <a:avLst/>
+          </a:prstGeom>
+          <a:noFill/>
+        </p:spPr>
+        <p:txBody>
+          <a:bodyPr wrap="square">
+            <a:spAutoFit/>
+          </a:bodyPr>
+          <a:lstStyle/>
+          <a:p>
+            <a:pPr algn="ctr"/>
+            <a:r>
+              <a:rPr sz="900" b="0" i="0">
+                <a:solidFill>
+                  <a:srgbClr val="1E3A4A"/>
+                </a:solidFill>
+              </a:rPr>
+              <a:t>Sample 2</a:t>
+            </a:r>
+          </a:p>
+        </p:txBody>
+      </p:sp>
+      <p:sp>
+        <p:nvSpPr>
+          <p:cNvPr id="48" name="TextBox 47"/>
+          <p:cNvSpPr txBox="1"/>
+          <p:nvPr/>
+        </p:nvSpPr>
+        <p:spPr>
+          <a:xfrm>
+            <a:off x="10515600" y="5431536"/>
+            <a:ext cx="868680" cy="228600"/>
+          </a:xfrm>
+          <a:prstGeom prst="rect">
+            <a:avLst/>
+          </a:prstGeom>
+          <a:noFill/>
+        </p:spPr>
+        <p:txBody>
+          <a:bodyPr wrap="square">
+            <a:spAutoFit/>
+          </a:bodyPr>
+          <a:lstStyle/>
+          <a:p>
+            <a:pPr algn="ctr"/>
+            <a:r>
+              <a:rPr sz="900" b="0" i="0">
+                <a:solidFill>
+                  <a:srgbClr val="1E3A4A"/>
+                </a:solidFill>
+              </a:rPr>
+              <a:t>Sample 3</a:t>
+            </a:r>
+          </a:p>
+        </p:txBody>
+      </p:sp>
+    </p:spTree>
+  </p:cSld>
+  <p:clrMapOvr>
+    <a:masterClrMapping/>
+  </p:clrMapOvr>
+</p:sld>
+</file>
+
+<file path=ppt/slides/slide7.xml><?xml version="1.0" encoding="utf-8"?>
 <p:sld xmlns:a="http://schemas.openxmlformats.org/drawingml/2006/main" xmlns:p="http://schemas.openxmlformats.org/presentationml/2006/main" xmlns:r="http://schemas.openxmlformats.org/officeDocument/2006/relationships">
   <p:cSld>
     <p:bg>
